--- a/lecons/F3/36_FORM4_LESSON32_Atmospheric_Temperatures.pptx
+++ b/lecons/F3/36_FORM4_LESSON32_Atmospheric_Temperatures.pptx
@@ -51,9 +51,15 @@
     <p:sldId id="299" r:id="rId45"/>
     <p:sldId id="300" r:id="rId46"/>
     <p:sldId id="301" r:id="rId47"/>
+    <p:sldId id="302" r:id="rId48"/>
+    <p:sldId id="303" r:id="rId49"/>
+    <p:sldId id="304" r:id="rId50"/>
+    <p:sldId id="305" r:id="rId51"/>
+    <p:sldId id="306" r:id="rId52"/>
+    <p:sldId id="307" r:id="rId53"/>
   </p:sldIdLst>
   <p:notesMasterIdLst>
-    <p:notesMasterId r:id="rId48"/>
+    <p:notesMasterId r:id="rId54"/>
   </p:notesMasterIdLst>
   <p:sldSz cx="12192000" cy="6858000"/>
   <p:notesSz cx="6858000" cy="12192000"/>
@@ -635,7 +641,7 @@
           <a:p>
             <a:r>
               <a:rPr lang="en-US" dirty="0"/>
-              <a:t>Listen carefully to this situation from real life. Ali puts his thermometer in the sun on the concrete and reads 45 °C. Bouba hangs his in the shade of a tree and reads 36 °C. They wonder which reading is correct. Think about it, because I am going to ask you some questions.</a:t>
+              <a:t>Listen carefully to this situation from real life. Ali puts his thermometer in the sun on the concrete and reads 45 °C. Bouba hangs his in the shade of a tree and reads 36 °C. They ask: "Which reading is correct, and how do weather stations measure the true temperature of the air?" Think about it, because I am going to ask you some questions.</a:t>
             </a:r>
             <a:endParaRPr lang="en-US" dirty="0"/>
           </a:p>
@@ -811,7 +817,7 @@
           <a:p>
             <a:r>
               <a:rPr lang="en-US" dirty="0"/>
-              <a:t>Good. The two readings are different.</a:t>
+              <a:t>Good. The two boys get different temperatures and do not know how to measure the air temperature correctly.</a:t>
             </a:r>
             <a:endParaRPr lang="en-US" dirty="0"/>
           </a:p>
@@ -899,7 +905,7 @@
           <a:p>
             <a:r>
               <a:rPr lang="en-US" dirty="0"/>
-              <a:t>Question 2: Which reading is correct? Think for a moment, then raise your hand to answer.</a:t>
+              <a:t>Question 2: Which reading is higher? Think for a moment, then raise your hand to answer.</a:t>
             </a:r>
             <a:endParaRPr lang="en-US" dirty="0"/>
           </a:p>
@@ -987,7 +993,7 @@
           <a:p>
             <a:r>
               <a:rPr lang="en-US" dirty="0"/>
-              <a:t>Good. Bouba's, in the shade.</a:t>
+              <a:t>Good. Ali's reading in the sun (45 °C).</a:t>
             </a:r>
             <a:endParaRPr lang="en-US" dirty="0"/>
           </a:p>
@@ -1075,7 +1081,7 @@
           <a:p>
             <a:r>
               <a:rPr lang="en-US" dirty="0"/>
-              <a:t>Question 3: Where should a thermometer be placed? Think for a moment, then raise your hand to answer.</a:t>
+              <a:t>Question 3: Why is it higher? Think for a moment, then raise your hand to answer.</a:t>
             </a:r>
             <a:endParaRPr lang="en-US" dirty="0"/>
           </a:p>
@@ -1163,7 +1169,7 @@
           <a:p>
             <a:r>
               <a:rPr lang="en-US" dirty="0"/>
-              <a:t>Good. In the shade, in a Stevenson screen.</a:t>
+              <a:t>Good. The Sun and the hot concrete heat the thermometer directly.</a:t>
             </a:r>
             <a:endParaRPr lang="en-US" dirty="0"/>
           </a:p>
@@ -1427,7 +1433,7 @@
           <a:p>
             <a:r>
               <a:rPr lang="en-US" dirty="0"/>
-              <a:t>Activity 1. Look carefully at this picture: a thermometer that shows the highest and the lowest temperature. Observe every detail before I ask the question.</a:t>
+              <a:t>Activity 1. Look carefully at this picture: a special thermometer. Observe every detail before I ask the question.</a:t>
             </a:r>
             <a:endParaRPr lang="en-US" dirty="0"/>
           </a:p>
@@ -1603,7 +1609,7 @@
           <a:p>
             <a:r>
               <a:rPr lang="en-US" dirty="0"/>
-              <a:t>Here is the question for Activity 1: What does this thermometer record? Take one minute to think and write your answer in your rough notebook.</a:t>
+              <a:t>Here is the question for Activity 1: This thermometer has two sides. What does it record? Take one minute to think and write your answer in your rough notebook.</a:t>
             </a:r>
             <a:endParaRPr lang="en-US" dirty="0"/>
           </a:p>
@@ -1691,7 +1697,7 @@
           <a:p>
             <a:r>
               <a:rPr lang="en-US" dirty="0"/>
-              <a:t>Let us check the answer together. The maximum and the minimum temperature of the day.</a:t>
+              <a:t>Let us check the answer together. The maximum and the minimum temperatures of the day.</a:t>
             </a:r>
             <a:endParaRPr lang="en-US" dirty="0"/>
           </a:p>
@@ -1779,7 +1785,7 @@
           <a:p>
             <a:r>
               <a:rPr lang="en-US" dirty="0"/>
-              <a:t>Activity 2. Look carefully at this diagram: a worked example. Observe every detail before I ask the question.</a:t>
+              <a:t>Activity 2. Look carefully at this diagram: calculating with temperatures. Observe every detail before I ask the question.</a:t>
             </a:r>
             <a:endParaRPr lang="en-US" dirty="0"/>
           </a:p>
@@ -1867,7 +1873,7 @@
           <a:p>
             <a:r>
               <a:rPr lang="en-US" dirty="0"/>
-              <a:t>Here is the question for Activity 2: Maximum 38 °C, minimum 24 °C. Find the mean and the range. Take one minute to think and write your answer in your rough notebook.</a:t>
+              <a:t>Here is the question for Activity 2: The maximum is 38 °C and the minimum is 24 °C. What is the mean temperature? Take one minute to think and write your answer in your rough notebook.</a:t>
             </a:r>
             <a:endParaRPr lang="en-US" dirty="0"/>
           </a:p>
@@ -1955,7 +1961,7 @@
           <a:p>
             <a:r>
               <a:rPr lang="en-US" dirty="0"/>
-              <a:t>Let us check the answer together. Mean: 31 °C. Range: 14 °C.</a:t>
+              <a:t>Let us check the answer together. (38 + 24) ÷ 2 = 31 °C.</a:t>
             </a:r>
             <a:endParaRPr lang="en-US" dirty="0"/>
           </a:p>
@@ -2043,7 +2049,7 @@
           <a:p>
             <a:r>
               <a:rPr lang="en-US" dirty="0"/>
-              <a:t>Activity 3. Look carefully at this picture: a Stevenson screen. Observe every detail before I ask the question.</a:t>
+              <a:t>Here is the next question: What is the daily range? Take one minute to think and write your answer in your rough notebook.</a:t>
             </a:r>
             <a:endParaRPr lang="en-US" dirty="0"/>
           </a:p>
@@ -2131,7 +2137,7 @@
           <a:p>
             <a:r>
               <a:rPr lang="en-US" dirty="0"/>
-              <a:t>Here is the question for Activity 3: Why is this box white with openings on the sides? Take one minute to think and write your answer in your rough notebook.</a:t>
+              <a:t>Let us check the answer together. 38 − 24 = 14 °C.</a:t>
             </a:r>
             <a:endParaRPr lang="en-US" dirty="0"/>
           </a:p>
@@ -2219,7 +2225,7 @@
           <a:p>
             <a:r>
               <a:rPr lang="en-US" dirty="0"/>
-              <a:t>Let us check the answer together. White reflects the sun; the openings let the air pass.</a:t>
+              <a:t>Activity 3. Look carefully at this picture: a white wooden box. Observe every detail before I ask the question.</a:t>
             </a:r>
             <a:endParaRPr lang="en-US" dirty="0"/>
           </a:p>
@@ -2307,7 +2313,7 @@
           <a:p>
             <a:r>
               <a:rPr lang="en-US" dirty="0"/>
-              <a:t>Now we are going to copy the board summary. Write the title and the headings neatly in your notebooks. I will give you enough time for each slide, so do not rush.</a:t>
+              <a:t>Here is the question for Activity 3: Why is this box painted white? Take one minute to think and write your answer in your rough notebook.</a:t>
             </a:r>
             <a:endParaRPr lang="en-US" dirty="0"/>
           </a:p>
@@ -2395,7 +2401,7 @@
           <a:p>
             <a:r>
               <a:rPr lang="en-US" dirty="0"/>
-              <a:t>Let us copy Meaning and Measurement of Temperature. Temperature is defined and measured as follows. On this slide we have Temperature and Thermometer. Write each point on a new line, with the key term first, and explain it in your own words when we revise. When you finish, we go to the next slide.</a:t>
+              <a:t>Let us check the answer together. White reflects the rays of the Sun, so the thermometers inside measure the air in the shade.</a:t>
             </a:r>
             <a:endParaRPr lang="en-US" dirty="0"/>
           </a:p>
@@ -2571,7 +2577,7 @@
           <a:p>
             <a:r>
               <a:rPr lang="en-US" dirty="0"/>
-              <a:t>We continue with Meaning and Measurement of Temperature. On this slide we have Six's thermometer. Write each point on a new line, with the key term first, and explain it in your own words when we revise.</a:t>
+              <a:t>Now we are going to copy the board summary. Write the title and the headings neatly in your notebooks. I will give you enough time for each slide, so do not rush.</a:t>
             </a:r>
             <a:endParaRPr lang="en-US" dirty="0"/>
           </a:p>
@@ -2659,7 +2665,7 @@
           <a:p>
             <a:r>
               <a:rPr lang="en-US" dirty="0"/>
-              <a:t>Let us copy Presentation of Temperature. Temperature data are presented with the following calculations. On this slide we have Mean daily temperature and Daily range. Write each point on a new line, with the key term first, and explain it in your own words when we revise.</a:t>
+              <a:t>Let us copy the definitions. The key terms of this lesson are defined as follows. On this slide we have Atmospheric temperature. Write each point on a new line, with the key term first, and explain it in your own words when we revise. When you finish, we go to the next slide.</a:t>
             </a:r>
             <a:endParaRPr lang="en-US" dirty="0"/>
           </a:p>
@@ -2747,7 +2753,7 @@
           <a:p>
             <a:r>
               <a:rPr lang="en-US" dirty="0"/>
-              <a:t>Now draw this illustration in your notebook: calculating the mean and the range. Give it a title and label it clearly.</a:t>
+              <a:t>We continue with the definitions. On this slide we have Mean daily temperature and Daily range of temperature. Write each point on a new line, with the key term first, and explain it in your own words when we revise.</a:t>
             </a:r>
             <a:endParaRPr lang="en-US" dirty="0"/>
           </a:p>
@@ -2835,7 +2841,7 @@
           <a:p>
             <a:r>
               <a:rPr lang="en-US" dirty="0"/>
-              <a:t>Let us copy Siting of the Stevenson Screen. The Stevenson screen is built and placed as follows. On this slide we have Colour and Louvred sides. Write each point on a new line, with the key term first, and explain it in your own words when we revise. When you finish, we go to the next slide.</a:t>
+              <a:t>Let us copy Measurement of Temperature. Temperature is measured with the following instruments. On this slide we have Ordinary thermometer. Write each point on a new line, with the key term first, and explain it in your own words when we revise.</a:t>
             </a:r>
             <a:endParaRPr lang="en-US" dirty="0"/>
           </a:p>
@@ -2923,7 +2929,7 @@
           <a:p>
             <a:r>
               <a:rPr lang="en-US" dirty="0"/>
-              <a:t>We continue with Siting of the Stevenson Screen. On this slide we have Siting. Write each point on a new line, with the key term first, and explain it in your own words when we revise.</a:t>
+              <a:t>Copy the point on Six's thermometer on the left, then draw the diagram on the right: six's thermometer. Give it a title and label it clearly.</a:t>
             </a:r>
             <a:endParaRPr lang="en-US" dirty="0"/>
           </a:p>
@@ -3011,7 +3017,7 @@
           <a:p>
             <a:r>
               <a:rPr lang="en-US" dirty="0"/>
-              <a:t>Now let us check what you have understood. Question 1: Maximum 34 °C, minimum 20 °C. What is the mean? Answer in your exercise book.</a:t>
+              <a:t>We continue with Measurement of Temperature. On this slide we have Time of reading. Write each point on a new line, with the key term first, and explain it in your own words when we revise.</a:t>
             </a:r>
             <a:endParaRPr lang="en-US" dirty="0"/>
           </a:p>
@@ -3099,7 +3105,7 @@
           <a:p>
             <a:r>
               <a:rPr lang="en-US" dirty="0"/>
-              <a:t>The expected answer is: 27 °C. If you got it right, well done.</a:t>
+              <a:t>Let us copy Presentation of Temperature. Temperature data are presented as follows. Copy the point on Mean daily temperature on the left, then draw the diagram on the right: mean and range. Give it a title and label it clearly.</a:t>
             </a:r>
             <a:endParaRPr lang="en-US" dirty="0"/>
           </a:p>
@@ -3187,7 +3193,7 @@
           <a:p>
             <a:r>
               <a:rPr lang="en-US" dirty="0"/>
-              <a:t>Now let us check what you have understood. Question 2: Why is the Stevenson screen painted white? Answer in your exercise book.</a:t>
+              <a:t>We continue with Presentation of Temperature. On this slide we have Daily range, Mean monthly and annual temperature and Graphs and maps. Write each point on a new line, with the key term first, and explain it in your own words when we revise.</a:t>
             </a:r>
             <a:endParaRPr lang="en-US" dirty="0"/>
           </a:p>
@@ -3275,7 +3281,7 @@
           <a:p>
             <a:r>
               <a:rPr lang="en-US" dirty="0"/>
-              <a:t>The expected answer is: to reflect the sunlight. If you got it right, well done.</a:t>
+              <a:t>Let us copy Siting of the Stevenson Screen. The Stevenson screen is built and placed as follows. Copy the point on White colour on the left, then draw the diagram on the right: the Stevenson screen and its siting. Give it a title and label it clearly.</a:t>
             </a:r>
             <a:endParaRPr lang="en-US" dirty="0"/>
           </a:p>
@@ -3363,7 +3369,7 @@
           <a:p>
             <a:r>
               <a:rPr lang="en-US" dirty="0"/>
-              <a:t>For those who need more practice, fill in the blanks in your exercise book. The answers are: number 1, Six's; number 2, 2; number 3, Stevenson.</a:t>
+              <a:t>We continue with Siting of the Stevenson Screen. On this slide we have Louvred sides and Height. Write each point on a new line, with the key term first, and explain it in your own words when we revise. When you finish, we go to the next slide.</a:t>
             </a:r>
             <a:endParaRPr lang="en-US" dirty="0"/>
           </a:p>
@@ -3539,7 +3545,7 @@
           <a:p>
             <a:r>
               <a:rPr lang="en-US" dirty="0"/>
-              <a:t>For your homework: Wet a piece of cloth and hang it outside in the morning and in the afternoon. Note how long it takes to dry each time. We shall correct it at the beginning of our next lesson.</a:t>
+              <a:t>We continue with Siting of the Stevenson Screen. On this slide we have Open site on grass and Door facing north. Write each point on a new line, with the key term first, and explain it in your own words when we revise.</a:t>
             </a:r>
             <a:endParaRPr lang="en-US" dirty="0"/>
           </a:p>
@@ -3627,7 +3633,7 @@
           <a:p>
             <a:r>
               <a:rPr lang="en-US" dirty="0"/>
-              <a:t>Our next lesson will be on Lesson 33: Weather Elements: Humidity, Wind, Pressure and Sunshine. Thank you for your attention, and see you next time.</a:t>
+              <a:t>Now let us check what you have understood. Question 1: Maximum 34 °C, minimum 20 °C. What is the mean? Answer in your exercise book.</a:t>
             </a:r>
             <a:endParaRPr lang="en-US" dirty="0"/>
           </a:p>
@@ -3715,7 +3721,7 @@
           <a:p>
             <a:r>
               <a:rPr lang="en-US" dirty="0"/>
-              <a:t>Let us play the bilingual game. I say a word in English, and you give me the French word. Then we do the reverse.</a:t>
+              <a:t>The expected answer is: 27 °C. If you got it right, well done.</a:t>
             </a:r>
             <a:endParaRPr lang="en-US" dirty="0"/>
           </a:p>
@@ -3803,7 +3809,7 @@
           <a:p>
             <a:r>
               <a:rPr lang="en-US" dirty="0"/>
-              <a:t>I record this information in the official logbook of the class after the lesson.</a:t>
+              <a:t>Now let us check what you have understood. Question 2: Why is the Stevenson screen painted white? Answer in your exercise book.</a:t>
             </a:r>
             <a:endParaRPr lang="en-US" dirty="0"/>
           </a:p>
@@ -3891,7 +3897,7 @@
           <a:p>
             <a:r>
               <a:rPr lang="en-US" dirty="0"/>
-              <a:t>I complete the second page of the logbook: the matter taught, the evaluation, the homework and the attendance.</a:t>
+              <a:t>The expected answer is: to reflect the sunlight. If you got it right, well done.</a:t>
             </a:r>
             <a:endParaRPr lang="en-US" dirty="0"/>
           </a:p>
@@ -3979,7 +3985,7 @@
           <a:p>
             <a:r>
               <a:rPr lang="en-US" dirty="0"/>
-              <a:t>This slide is for me, the teacher: it gives the timing of the lesson and what to do if the projector is not available.</a:t>
+              <a:t>For those who need more practice, fill in the blanks in your exercise book. The answers are: number 1, Six's; number 2, 2; number 3, Stevenson.</a:t>
             </a:r>
             <a:endParaRPr lang="en-US" dirty="0"/>
           </a:p>
@@ -4067,7 +4073,7 @@
           <a:p>
             <a:r>
               <a:rPr lang="en-US" dirty="0"/>
-              <a:t>These are the references and picture credits used to prepare this lesson.</a:t>
+              <a:t>For your homework: Wet a piece of cloth and hang it outside in the morning and in the afternoon. Note how long it takes to dry each time. We shall correct it at the beginning of our next lesson.</a:t>
             </a:r>
             <a:endParaRPr lang="en-US" dirty="0"/>
           </a:p>
@@ -4091,6 +4097,270 @@
             <a:fld id="{F7021451-1387-4CA6-816F-3879F97B5CBC}" type="slidenum">
               <a:rPr lang="en-US"/>
               <a:t>46</a:t>
+            </a:fld>
+            <a:endParaRPr lang="en-US"/>
+          </a:p>
+        </p:txBody>
+      </p:sp>
+    </p:spTree>
+    <p:extLst>
+      <p:ext uri="{BB962C8B-B14F-4D97-AF65-F5344CB8AC3E}">
+        <p14:creationId xmlns:p14="http://schemas.microsoft.com/office/powerpoint/2010/main" val="1024086991"/>
+      </p:ext>
+    </p:extLst>
+  </p:cSld>
+  <p:clrMapOvr>
+    <a:masterClrMapping/>
+  </p:clrMapOvr>
+</p:notes>
+</file>
+
+<file path=ppt/notesSlides/notesSlide47.xml><?xml version="1.0" encoding="utf-8"?>
+<p:notes xmlns:a="http://schemas.openxmlformats.org/drawingml/2006/main" xmlns:r="http://schemas.openxmlformats.org/officeDocument/2006/relationships" xmlns:p="http://schemas.openxmlformats.org/presentationml/2006/main">
+  <p:cSld>
+    <p:spTree>
+      <p:nvGrpSpPr>
+        <p:cNvPr id="1" name=""/>
+        <p:cNvGrpSpPr/>
+        <p:nvPr/>
+      </p:nvGrpSpPr>
+      <p:grpSpPr>
+        <a:xfrm>
+          <a:off x="0" y="0"/>
+          <a:ext cx="0" cy="0"/>
+          <a:chOff x="0" y="0"/>
+          <a:chExt cx="0" cy="0"/>
+        </a:xfrm>
+      </p:grpSpPr>
+      <p:sp>
+        <p:nvSpPr>
+          <p:cNvPr id="2" name="Slide Image Placeholder 1"/>
+          <p:cNvSpPr>
+            <a:spLocks noGrp="1" noRot="1" noChangeAspect="1"/>
+          </p:cNvSpPr>
+          <p:nvPr>
+            <p:ph type="sldImg"/>
+          </p:nvPr>
+        </p:nvSpPr>
+        <p:spPr/>
+      </p:sp>
+      <p:sp>
+        <p:nvSpPr>
+          <p:cNvPr id="3" name="Notes Placeholder 2"/>
+          <p:cNvSpPr>
+            <a:spLocks noGrp="1"/>
+          </p:cNvSpPr>
+          <p:nvPr>
+            <p:ph type="body" idx="1"/>
+          </p:nvPr>
+        </p:nvSpPr>
+        <p:spPr/>
+        <p:txBody>
+          <a:bodyPr/>
+          <a:lstStyle/>
+          <a:p>
+            <a:r>
+              <a:rPr lang="en-US" dirty="0"/>
+              <a:t>Our next lesson will be on Lesson 33: Weather Elements: Humidity, Wind, Pressure and Sunshine. Thank you for your attention, and see you next time.</a:t>
+            </a:r>
+            <a:endParaRPr lang="en-US" dirty="0"/>
+          </a:p>
+        </p:txBody>
+      </p:sp>
+      <p:sp>
+        <p:nvSpPr>
+          <p:cNvPr id="4" name="Slide Number Placeholder 3"/>
+          <p:cNvSpPr>
+            <a:spLocks noGrp="1"/>
+          </p:cNvSpPr>
+          <p:nvPr>
+            <p:ph type="sldNum" sz="quarter" idx="10"/>
+          </p:nvPr>
+        </p:nvSpPr>
+        <p:spPr/>
+        <p:txBody>
+          <a:bodyPr/>
+          <a:lstStyle/>
+          <a:p>
+            <a:fld id="{F7021451-1387-4CA6-816F-3879F97B5CBC}" type="slidenum">
+              <a:rPr lang="en-US"/>
+              <a:t>47</a:t>
+            </a:fld>
+            <a:endParaRPr lang="en-US"/>
+          </a:p>
+        </p:txBody>
+      </p:sp>
+    </p:spTree>
+    <p:extLst>
+      <p:ext uri="{BB962C8B-B14F-4D97-AF65-F5344CB8AC3E}">
+        <p14:creationId xmlns:p14="http://schemas.microsoft.com/office/powerpoint/2010/main" val="1024086991"/>
+      </p:ext>
+    </p:extLst>
+  </p:cSld>
+  <p:clrMapOvr>
+    <a:masterClrMapping/>
+  </p:clrMapOvr>
+</p:notes>
+</file>
+
+<file path=ppt/notesSlides/notesSlide48.xml><?xml version="1.0" encoding="utf-8"?>
+<p:notes xmlns:a="http://schemas.openxmlformats.org/drawingml/2006/main" xmlns:r="http://schemas.openxmlformats.org/officeDocument/2006/relationships" xmlns:p="http://schemas.openxmlformats.org/presentationml/2006/main">
+  <p:cSld>
+    <p:spTree>
+      <p:nvGrpSpPr>
+        <p:cNvPr id="1" name=""/>
+        <p:cNvGrpSpPr/>
+        <p:nvPr/>
+      </p:nvGrpSpPr>
+      <p:grpSpPr>
+        <a:xfrm>
+          <a:off x="0" y="0"/>
+          <a:ext cx="0" cy="0"/>
+          <a:chOff x="0" y="0"/>
+          <a:chExt cx="0" cy="0"/>
+        </a:xfrm>
+      </p:grpSpPr>
+      <p:sp>
+        <p:nvSpPr>
+          <p:cNvPr id="2" name="Slide Image Placeholder 1"/>
+          <p:cNvSpPr>
+            <a:spLocks noGrp="1" noRot="1" noChangeAspect="1"/>
+          </p:cNvSpPr>
+          <p:nvPr>
+            <p:ph type="sldImg"/>
+          </p:nvPr>
+        </p:nvSpPr>
+        <p:spPr/>
+      </p:sp>
+      <p:sp>
+        <p:nvSpPr>
+          <p:cNvPr id="3" name="Notes Placeholder 2"/>
+          <p:cNvSpPr>
+            <a:spLocks noGrp="1"/>
+          </p:cNvSpPr>
+          <p:nvPr>
+            <p:ph type="body" idx="1"/>
+          </p:nvPr>
+        </p:nvSpPr>
+        <p:spPr/>
+        <p:txBody>
+          <a:bodyPr/>
+          <a:lstStyle/>
+          <a:p>
+            <a:r>
+              <a:rPr lang="en-US" dirty="0"/>
+              <a:t>Let us play the bilingual game. I say a word in English, and you give me the French word. Then we do the reverse.</a:t>
+            </a:r>
+            <a:endParaRPr lang="en-US" dirty="0"/>
+          </a:p>
+        </p:txBody>
+      </p:sp>
+      <p:sp>
+        <p:nvSpPr>
+          <p:cNvPr id="4" name="Slide Number Placeholder 3"/>
+          <p:cNvSpPr>
+            <a:spLocks noGrp="1"/>
+          </p:cNvSpPr>
+          <p:nvPr>
+            <p:ph type="sldNum" sz="quarter" idx="10"/>
+          </p:nvPr>
+        </p:nvSpPr>
+        <p:spPr/>
+        <p:txBody>
+          <a:bodyPr/>
+          <a:lstStyle/>
+          <a:p>
+            <a:fld id="{F7021451-1387-4CA6-816F-3879F97B5CBC}" type="slidenum">
+              <a:rPr lang="en-US"/>
+              <a:t>48</a:t>
+            </a:fld>
+            <a:endParaRPr lang="en-US"/>
+          </a:p>
+        </p:txBody>
+      </p:sp>
+    </p:spTree>
+    <p:extLst>
+      <p:ext uri="{BB962C8B-B14F-4D97-AF65-F5344CB8AC3E}">
+        <p14:creationId xmlns:p14="http://schemas.microsoft.com/office/powerpoint/2010/main" val="1024086991"/>
+      </p:ext>
+    </p:extLst>
+  </p:cSld>
+  <p:clrMapOvr>
+    <a:masterClrMapping/>
+  </p:clrMapOvr>
+</p:notes>
+</file>
+
+<file path=ppt/notesSlides/notesSlide49.xml><?xml version="1.0" encoding="utf-8"?>
+<p:notes xmlns:a="http://schemas.openxmlformats.org/drawingml/2006/main" xmlns:r="http://schemas.openxmlformats.org/officeDocument/2006/relationships" xmlns:p="http://schemas.openxmlformats.org/presentationml/2006/main">
+  <p:cSld>
+    <p:spTree>
+      <p:nvGrpSpPr>
+        <p:cNvPr id="1" name=""/>
+        <p:cNvGrpSpPr/>
+        <p:nvPr/>
+      </p:nvGrpSpPr>
+      <p:grpSpPr>
+        <a:xfrm>
+          <a:off x="0" y="0"/>
+          <a:ext cx="0" cy="0"/>
+          <a:chOff x="0" y="0"/>
+          <a:chExt cx="0" cy="0"/>
+        </a:xfrm>
+      </p:grpSpPr>
+      <p:sp>
+        <p:nvSpPr>
+          <p:cNvPr id="2" name="Slide Image Placeholder 1"/>
+          <p:cNvSpPr>
+            <a:spLocks noGrp="1" noRot="1" noChangeAspect="1"/>
+          </p:cNvSpPr>
+          <p:nvPr>
+            <p:ph type="sldImg"/>
+          </p:nvPr>
+        </p:nvSpPr>
+        <p:spPr/>
+      </p:sp>
+      <p:sp>
+        <p:nvSpPr>
+          <p:cNvPr id="3" name="Notes Placeholder 2"/>
+          <p:cNvSpPr>
+            <a:spLocks noGrp="1"/>
+          </p:cNvSpPr>
+          <p:nvPr>
+            <p:ph type="body" idx="1"/>
+          </p:nvPr>
+        </p:nvSpPr>
+        <p:spPr/>
+        <p:txBody>
+          <a:bodyPr/>
+          <a:lstStyle/>
+          <a:p>
+            <a:r>
+              <a:rPr lang="en-US" dirty="0"/>
+              <a:t>I record this information in the official logbook of the class after the lesson.</a:t>
+            </a:r>
+            <a:endParaRPr lang="en-US" dirty="0"/>
+          </a:p>
+        </p:txBody>
+      </p:sp>
+      <p:sp>
+        <p:nvSpPr>
+          <p:cNvPr id="4" name="Slide Number Placeholder 3"/>
+          <p:cNvSpPr>
+            <a:spLocks noGrp="1"/>
+          </p:cNvSpPr>
+          <p:nvPr>
+            <p:ph type="sldNum" sz="quarter" idx="10"/>
+          </p:nvPr>
+        </p:nvSpPr>
+        <p:spPr/>
+        <p:txBody>
+          <a:bodyPr/>
+          <a:lstStyle/>
+          <a:p>
+            <a:fld id="{F7021451-1387-4CA6-816F-3879F97B5CBC}" type="slidenum">
+              <a:rPr lang="en-US"/>
+              <a:t>49</a:t>
             </a:fld>
             <a:endParaRPr lang="en-US"/>
           </a:p>
@@ -4179,6 +4449,270 @@
             <a:fld id="{F7021451-1387-4CA6-816F-3879F97B5CBC}" type="slidenum">
               <a:rPr lang="en-US"/>
               <a:t>5</a:t>
+            </a:fld>
+            <a:endParaRPr lang="en-US"/>
+          </a:p>
+        </p:txBody>
+      </p:sp>
+    </p:spTree>
+    <p:extLst>
+      <p:ext uri="{BB962C8B-B14F-4D97-AF65-F5344CB8AC3E}">
+        <p14:creationId xmlns:p14="http://schemas.microsoft.com/office/powerpoint/2010/main" val="1024086991"/>
+      </p:ext>
+    </p:extLst>
+  </p:cSld>
+  <p:clrMapOvr>
+    <a:masterClrMapping/>
+  </p:clrMapOvr>
+</p:notes>
+</file>
+
+<file path=ppt/notesSlides/notesSlide50.xml><?xml version="1.0" encoding="utf-8"?>
+<p:notes xmlns:a="http://schemas.openxmlformats.org/drawingml/2006/main" xmlns:r="http://schemas.openxmlformats.org/officeDocument/2006/relationships" xmlns:p="http://schemas.openxmlformats.org/presentationml/2006/main">
+  <p:cSld>
+    <p:spTree>
+      <p:nvGrpSpPr>
+        <p:cNvPr id="1" name=""/>
+        <p:cNvGrpSpPr/>
+        <p:nvPr/>
+      </p:nvGrpSpPr>
+      <p:grpSpPr>
+        <a:xfrm>
+          <a:off x="0" y="0"/>
+          <a:ext cx="0" cy="0"/>
+          <a:chOff x="0" y="0"/>
+          <a:chExt cx="0" cy="0"/>
+        </a:xfrm>
+      </p:grpSpPr>
+      <p:sp>
+        <p:nvSpPr>
+          <p:cNvPr id="2" name="Slide Image Placeholder 1"/>
+          <p:cNvSpPr>
+            <a:spLocks noGrp="1" noRot="1" noChangeAspect="1"/>
+          </p:cNvSpPr>
+          <p:nvPr>
+            <p:ph type="sldImg"/>
+          </p:nvPr>
+        </p:nvSpPr>
+        <p:spPr/>
+      </p:sp>
+      <p:sp>
+        <p:nvSpPr>
+          <p:cNvPr id="3" name="Notes Placeholder 2"/>
+          <p:cNvSpPr>
+            <a:spLocks noGrp="1"/>
+          </p:cNvSpPr>
+          <p:nvPr>
+            <p:ph type="body" idx="1"/>
+          </p:nvPr>
+        </p:nvSpPr>
+        <p:spPr/>
+        <p:txBody>
+          <a:bodyPr/>
+          <a:lstStyle/>
+          <a:p>
+            <a:r>
+              <a:rPr lang="en-US" dirty="0"/>
+              <a:t>I complete the second page of the logbook: the matter taught, the evaluation, the homework and the attendance.</a:t>
+            </a:r>
+            <a:endParaRPr lang="en-US" dirty="0"/>
+          </a:p>
+        </p:txBody>
+      </p:sp>
+      <p:sp>
+        <p:nvSpPr>
+          <p:cNvPr id="4" name="Slide Number Placeholder 3"/>
+          <p:cNvSpPr>
+            <a:spLocks noGrp="1"/>
+          </p:cNvSpPr>
+          <p:nvPr>
+            <p:ph type="sldNum" sz="quarter" idx="10"/>
+          </p:nvPr>
+        </p:nvSpPr>
+        <p:spPr/>
+        <p:txBody>
+          <a:bodyPr/>
+          <a:lstStyle/>
+          <a:p>
+            <a:fld id="{F7021451-1387-4CA6-816F-3879F97B5CBC}" type="slidenum">
+              <a:rPr lang="en-US"/>
+              <a:t>50</a:t>
+            </a:fld>
+            <a:endParaRPr lang="en-US"/>
+          </a:p>
+        </p:txBody>
+      </p:sp>
+    </p:spTree>
+    <p:extLst>
+      <p:ext uri="{BB962C8B-B14F-4D97-AF65-F5344CB8AC3E}">
+        <p14:creationId xmlns:p14="http://schemas.microsoft.com/office/powerpoint/2010/main" val="1024086991"/>
+      </p:ext>
+    </p:extLst>
+  </p:cSld>
+  <p:clrMapOvr>
+    <a:masterClrMapping/>
+  </p:clrMapOvr>
+</p:notes>
+</file>
+
+<file path=ppt/notesSlides/notesSlide51.xml><?xml version="1.0" encoding="utf-8"?>
+<p:notes xmlns:a="http://schemas.openxmlformats.org/drawingml/2006/main" xmlns:r="http://schemas.openxmlformats.org/officeDocument/2006/relationships" xmlns:p="http://schemas.openxmlformats.org/presentationml/2006/main">
+  <p:cSld>
+    <p:spTree>
+      <p:nvGrpSpPr>
+        <p:cNvPr id="1" name=""/>
+        <p:cNvGrpSpPr/>
+        <p:nvPr/>
+      </p:nvGrpSpPr>
+      <p:grpSpPr>
+        <a:xfrm>
+          <a:off x="0" y="0"/>
+          <a:ext cx="0" cy="0"/>
+          <a:chOff x="0" y="0"/>
+          <a:chExt cx="0" cy="0"/>
+        </a:xfrm>
+      </p:grpSpPr>
+      <p:sp>
+        <p:nvSpPr>
+          <p:cNvPr id="2" name="Slide Image Placeholder 1"/>
+          <p:cNvSpPr>
+            <a:spLocks noGrp="1" noRot="1" noChangeAspect="1"/>
+          </p:cNvSpPr>
+          <p:nvPr>
+            <p:ph type="sldImg"/>
+          </p:nvPr>
+        </p:nvSpPr>
+        <p:spPr/>
+      </p:sp>
+      <p:sp>
+        <p:nvSpPr>
+          <p:cNvPr id="3" name="Notes Placeholder 2"/>
+          <p:cNvSpPr>
+            <a:spLocks noGrp="1"/>
+          </p:cNvSpPr>
+          <p:nvPr>
+            <p:ph type="body" idx="1"/>
+          </p:nvPr>
+        </p:nvSpPr>
+        <p:spPr/>
+        <p:txBody>
+          <a:bodyPr/>
+          <a:lstStyle/>
+          <a:p>
+            <a:r>
+              <a:rPr lang="en-US" dirty="0"/>
+              <a:t>This slide is for me, the teacher: it gives the timing of the lesson and what to do if the projector is not available.</a:t>
+            </a:r>
+            <a:endParaRPr lang="en-US" dirty="0"/>
+          </a:p>
+        </p:txBody>
+      </p:sp>
+      <p:sp>
+        <p:nvSpPr>
+          <p:cNvPr id="4" name="Slide Number Placeholder 3"/>
+          <p:cNvSpPr>
+            <a:spLocks noGrp="1"/>
+          </p:cNvSpPr>
+          <p:nvPr>
+            <p:ph type="sldNum" sz="quarter" idx="10"/>
+          </p:nvPr>
+        </p:nvSpPr>
+        <p:spPr/>
+        <p:txBody>
+          <a:bodyPr/>
+          <a:lstStyle/>
+          <a:p>
+            <a:fld id="{F7021451-1387-4CA6-816F-3879F97B5CBC}" type="slidenum">
+              <a:rPr lang="en-US"/>
+              <a:t>51</a:t>
+            </a:fld>
+            <a:endParaRPr lang="en-US"/>
+          </a:p>
+        </p:txBody>
+      </p:sp>
+    </p:spTree>
+    <p:extLst>
+      <p:ext uri="{BB962C8B-B14F-4D97-AF65-F5344CB8AC3E}">
+        <p14:creationId xmlns:p14="http://schemas.microsoft.com/office/powerpoint/2010/main" val="1024086991"/>
+      </p:ext>
+    </p:extLst>
+  </p:cSld>
+  <p:clrMapOvr>
+    <a:masterClrMapping/>
+  </p:clrMapOvr>
+</p:notes>
+</file>
+
+<file path=ppt/notesSlides/notesSlide52.xml><?xml version="1.0" encoding="utf-8"?>
+<p:notes xmlns:a="http://schemas.openxmlformats.org/drawingml/2006/main" xmlns:r="http://schemas.openxmlformats.org/officeDocument/2006/relationships" xmlns:p="http://schemas.openxmlformats.org/presentationml/2006/main">
+  <p:cSld>
+    <p:spTree>
+      <p:nvGrpSpPr>
+        <p:cNvPr id="1" name=""/>
+        <p:cNvGrpSpPr/>
+        <p:nvPr/>
+      </p:nvGrpSpPr>
+      <p:grpSpPr>
+        <a:xfrm>
+          <a:off x="0" y="0"/>
+          <a:ext cx="0" cy="0"/>
+          <a:chOff x="0" y="0"/>
+          <a:chExt cx="0" cy="0"/>
+        </a:xfrm>
+      </p:grpSpPr>
+      <p:sp>
+        <p:nvSpPr>
+          <p:cNvPr id="2" name="Slide Image Placeholder 1"/>
+          <p:cNvSpPr>
+            <a:spLocks noGrp="1" noRot="1" noChangeAspect="1"/>
+          </p:cNvSpPr>
+          <p:nvPr>
+            <p:ph type="sldImg"/>
+          </p:nvPr>
+        </p:nvSpPr>
+        <p:spPr/>
+      </p:sp>
+      <p:sp>
+        <p:nvSpPr>
+          <p:cNvPr id="3" name="Notes Placeholder 2"/>
+          <p:cNvSpPr>
+            <a:spLocks noGrp="1"/>
+          </p:cNvSpPr>
+          <p:nvPr>
+            <p:ph type="body" idx="1"/>
+          </p:nvPr>
+        </p:nvSpPr>
+        <p:spPr/>
+        <p:txBody>
+          <a:bodyPr/>
+          <a:lstStyle/>
+          <a:p>
+            <a:r>
+              <a:rPr lang="en-US" dirty="0"/>
+              <a:t>These are the references and picture credits used to prepare this lesson.</a:t>
+            </a:r>
+            <a:endParaRPr lang="en-US" dirty="0"/>
+          </a:p>
+        </p:txBody>
+      </p:sp>
+      <p:sp>
+        <p:nvSpPr>
+          <p:cNvPr id="4" name="Slide Number Placeholder 3"/>
+          <p:cNvSpPr>
+            <a:spLocks noGrp="1"/>
+          </p:cNvSpPr>
+          <p:nvPr>
+            <p:ph type="sldNum" sz="quarter" idx="10"/>
+          </p:nvPr>
+        </p:nvSpPr>
+        <p:spPr/>
+        <p:txBody>
+          <a:bodyPr/>
+          <a:lstStyle/>
+          <a:p>
+            <a:fld id="{F7021451-1387-4CA6-816F-3879F97B5CBC}" type="slidenum">
+              <a:rPr lang="en-US"/>
+              <a:t>52</a:t>
             </a:fld>
             <a:endParaRPr lang="en-US"/>
           </a:p>
@@ -5887,7 +6421,7 @@
         <p:spPr>
           <a:xfrm>
             <a:off x="0" y="658368"/>
-            <a:ext cx="5120640" cy="5833872"/>
+            <a:ext cx="2468880" cy="5833872"/>
           </a:xfrm>
           <a:prstGeom prst="rect">
             <a:avLst/>
@@ -5902,8 +6436,8 @@
         </p:nvSpPr>
         <p:spPr>
           <a:xfrm>
-            <a:off x="5349240" y="1005840"/>
-            <a:ext cx="6522415" cy="731520"/>
+            <a:off x="2697480" y="1005840"/>
+            <a:ext cx="9174175" cy="731520"/>
           </a:xfrm>
           <a:prstGeom prst="rect">
             <a:avLst/>
@@ -5943,8 +6477,8 @@
         </p:nvSpPr>
         <p:spPr>
           <a:xfrm>
-            <a:off x="5349240" y="1783080"/>
-            <a:ext cx="6522415" cy="4663440"/>
+            <a:off x="2697480" y="1783080"/>
+            <a:ext cx="9174175" cy="4663440"/>
           </a:xfrm>
           <a:prstGeom prst="rect">
             <a:avLst/>
@@ -5971,7 +6505,7 @@
                 <a:ea typeface="Times New Roman" pitchFamily="34" charset="-122"/>
                 <a:cs typeface="Times New Roman" pitchFamily="34" charset="-120"/>
               </a:rPr>
-              <a:t>Ali puts his thermometer in the sun on the concrete and reads 45 °C. Bouba hangs his in the shade of a tree and reads 36 °C. They wonder which reading is correct.</a:t>
+              <a:t>Ali puts his thermometer in the sun on the concrete and reads 45 °C. Bouba hangs his in the shade of a tree and reads 36 °C. They ask: "Which reading is correct, and how do weather stations measure the true temperature of the air?"</a:t>
             </a:r>
             <a:endParaRPr lang="en-US" sz="4000" dirty="0"/>
           </a:p>
@@ -6409,7 +6943,7 @@
                 <a:ea typeface="Times New Roman" pitchFamily="34" charset="-122"/>
                 <a:cs typeface="Times New Roman" pitchFamily="34" charset="-120"/>
               </a:rPr>
-              <a:t>The two readings are different.</a:t>
+              <a:t>The two boys get different temperatures and do not know how to measure the air temperature correctly.</a:t>
             </a:r>
             <a:endParaRPr lang="en-US" sz="4000" dirty="0"/>
           </a:p>
@@ -6628,7 +7162,7 @@
                 <a:ea typeface="Times New Roman" pitchFamily="34" charset="-122"/>
                 <a:cs typeface="Times New Roman" pitchFamily="34" charset="-120"/>
               </a:rPr>
-              <a:t>Which reading is correct?</a:t>
+              <a:t>Which reading is higher?</a:t>
             </a:r>
             <a:endParaRPr lang="en-US" sz="4000" dirty="0"/>
           </a:p>
@@ -6847,7 +7381,7 @@
                 <a:ea typeface="Times New Roman" pitchFamily="34" charset="-122"/>
                 <a:cs typeface="Times New Roman" pitchFamily="34" charset="-120"/>
               </a:rPr>
-              <a:t>Bouba's, in the shade.</a:t>
+              <a:t>Ali's reading in the sun (45 °C).</a:t>
             </a:r>
             <a:endParaRPr lang="en-US" sz="4000" dirty="0"/>
           </a:p>
@@ -7066,7 +7600,7 @@
                 <a:ea typeface="Times New Roman" pitchFamily="34" charset="-122"/>
                 <a:cs typeface="Times New Roman" pitchFamily="34" charset="-120"/>
               </a:rPr>
-              <a:t>Where should a thermometer be placed?</a:t>
+              <a:t>Why is it higher?</a:t>
             </a:r>
             <a:endParaRPr lang="en-US" sz="4000" dirty="0"/>
           </a:p>
@@ -7285,7 +7819,7 @@
                 <a:ea typeface="Times New Roman" pitchFamily="34" charset="-122"/>
                 <a:cs typeface="Times New Roman" pitchFamily="34" charset="-120"/>
               </a:rPr>
-              <a:t>In the shade, in a Stevenson screen.</a:t>
+              <a:t>The Sun and the hot concrete heat the thermometer directly.</a:t>
             </a:r>
             <a:endParaRPr lang="en-US" sz="4000" dirty="0"/>
           </a:p>
@@ -7937,7 +8471,7 @@
                 <a:ea typeface="Times New Roman" pitchFamily="34" charset="-122"/>
                 <a:cs typeface="Times New Roman" pitchFamily="34" charset="-120"/>
               </a:rPr>
-              <a:t>A thermometer that shows the highest and the lowest temperature.</a:t>
+              <a:t>A special thermometer.</a:t>
             </a:r>
             <a:endParaRPr lang="en-US" sz="1800" dirty="0"/>
           </a:p>
@@ -8751,7 +9285,7 @@
                 <a:ea typeface="Times New Roman" pitchFamily="34" charset="-122"/>
                 <a:cs typeface="Times New Roman" pitchFamily="34" charset="-120"/>
               </a:rPr>
-              <a:t>What does this thermometer record?</a:t>
+              <a:t>This thermometer has two sides. What does it record?</a:t>
             </a:r>
             <a:endParaRPr lang="en-US" sz="4000" dirty="0"/>
           </a:p>
@@ -8970,7 +9504,7 @@
                 <a:ea typeface="Times New Roman" pitchFamily="34" charset="-122"/>
                 <a:cs typeface="Times New Roman" pitchFamily="34" charset="-120"/>
               </a:rPr>
-              <a:t>The maximum and the minimum temperature of the day.</a:t>
+              <a:t>The maximum and the minimum temperatures of the day.</a:t>
             </a:r>
             <a:endParaRPr lang="en-US" sz="4000" dirty="0"/>
           </a:p>
@@ -9082,7 +9616,7 @@
                 <a:ea typeface="Calibri" pitchFamily="34" charset="-122"/>
                 <a:cs typeface="Calibri" pitchFamily="34" charset="-120"/>
               </a:rPr>
-              <a:t>2. CALCULATIONS</a:t>
+              <a:t>2. PRESENTATION</a:t>
             </a:r>
             <a:endParaRPr lang="en-US" sz="1400" dirty="0"/>
           </a:p>
@@ -9184,7 +9718,7 @@
                 <a:ea typeface="Times New Roman" pitchFamily="34" charset="-122"/>
                 <a:cs typeface="Times New Roman" pitchFamily="34" charset="-120"/>
               </a:rPr>
-              <a:t>A worked example.</a:t>
+              <a:t>Calculating with temperatures.</a:t>
             </a:r>
             <a:endParaRPr lang="en-US" sz="1800" dirty="0"/>
           </a:p>
@@ -9296,7 +9830,7 @@
                 <a:ea typeface="Calibri" pitchFamily="34" charset="-122"/>
                 <a:cs typeface="Calibri" pitchFamily="34" charset="-120"/>
               </a:rPr>
-              <a:t>2. CALCULATIONS</a:t>
+              <a:t>2. PRESENTATION</a:t>
             </a:r>
             <a:endParaRPr lang="en-US" sz="1400" dirty="0"/>
           </a:p>
@@ -9361,7 +9895,7 @@
                 <a:ea typeface="Times New Roman" pitchFamily="34" charset="-122"/>
                 <a:cs typeface="Times New Roman" pitchFamily="34" charset="-120"/>
               </a:rPr>
-              <a:t>Activity 2: Question</a:t>
+              <a:t>Activity 2: Question 1</a:t>
             </a:r>
             <a:endParaRPr lang="en-US" sz="3600" dirty="0"/>
           </a:p>
@@ -9403,7 +9937,7 @@
                 <a:ea typeface="Times New Roman" pitchFamily="34" charset="-122"/>
                 <a:cs typeface="Times New Roman" pitchFamily="34" charset="-120"/>
               </a:rPr>
-              <a:t>Maximum 38 °C, minimum 24 °C. Find the mean and the range.</a:t>
+              <a:t>The maximum is 38 °C and the minimum is 24 °C. What is the mean temperature?</a:t>
             </a:r>
             <a:endParaRPr lang="en-US" sz="4000" dirty="0"/>
           </a:p>
@@ -9515,7 +10049,7 @@
                 <a:ea typeface="Calibri" pitchFamily="34" charset="-122"/>
                 <a:cs typeface="Calibri" pitchFamily="34" charset="-120"/>
               </a:rPr>
-              <a:t>2. CALCULATIONS</a:t>
+              <a:t>2. PRESENTATION</a:t>
             </a:r>
             <a:endParaRPr lang="en-US" sz="1400" dirty="0"/>
           </a:p>
@@ -9580,7 +10114,7 @@
                 <a:ea typeface="Times New Roman" pitchFamily="34" charset="-122"/>
                 <a:cs typeface="Times New Roman" pitchFamily="34" charset="-120"/>
               </a:rPr>
-              <a:t>Activity 2: Answer</a:t>
+              <a:t>Activity 2: Answer 1</a:t>
             </a:r>
             <a:endParaRPr lang="en-US" sz="3600" dirty="0"/>
           </a:p>
@@ -9622,7 +10156,7 @@
                 <a:ea typeface="Times New Roman" pitchFamily="34" charset="-122"/>
                 <a:cs typeface="Times New Roman" pitchFamily="34" charset="-120"/>
               </a:rPr>
-              <a:t>Mean: 31 °C. Range: 14 °C.</a:t>
+              <a:t>(38 + 24) ÷ 2 = 31 °C.</a:t>
             </a:r>
             <a:endParaRPr lang="en-US" sz="4000" dirty="0"/>
           </a:p>
@@ -9734,54 +10268,15 @@
                 <a:ea typeface="Calibri" pitchFamily="34" charset="-122"/>
                 <a:cs typeface="Calibri" pitchFamily="34" charset="-120"/>
               </a:rPr>
-              <a:t>3. THE STEVENSON SCREEN</a:t>
+              <a:t>2. PRESENTATION</a:t>
             </a:r>
             <a:endParaRPr lang="en-US" sz="1400" dirty="0"/>
-          </a:p>
-        </p:txBody>
-      </p:sp>
-      <p:sp>
-        <p:nvSpPr>
-          <p:cNvPr id="3" name="Text 1"/>
-          <p:cNvSpPr/>
-          <p:nvPr/>
-        </p:nvSpPr>
-        <p:spPr>
-          <a:xfrm>
-            <a:off x="457200" y="1005840"/>
-            <a:ext cx="11277295" cy="731520"/>
-          </a:xfrm>
-          <a:prstGeom prst="rect">
-            <a:avLst/>
-          </a:prstGeom>
-          <a:noFill/>
-          <a:ln/>
-        </p:spPr>
-        <p:txBody>
-          <a:bodyPr wrap="square" lIns="0" tIns="0" rIns="0" bIns="0" rtlCol="0" anchor="ctr"/>
-          <a:lstStyle/>
-          <a:p>
-            <a:pPr algn="ctr" indent="0" marL="0">
-              <a:buNone/>
-            </a:pPr>
-            <a:r>
-              <a:rPr lang="en-US" sz="3600" b="1" dirty="0">
-                <a:solidFill>
-                  <a:srgbClr val="990011"/>
-                </a:solidFill>
-                <a:latin typeface="Times New Roman" pitchFamily="34" charset="0"/>
-                <a:ea typeface="Times New Roman" pitchFamily="34" charset="-122"/>
-                <a:cs typeface="Times New Roman" pitchFamily="34" charset="-120"/>
-              </a:rPr>
-              <a:t>Activity 3</a:t>
-            </a:r>
-            <a:endParaRPr lang="en-US" sz="3600" dirty="0"/>
           </a:p>
         </p:txBody>
       </p:sp>
       <p:pic>
         <p:nvPicPr>
-          <p:cNvPr id="4" name="Image 0" descr="/home/claude/f4/img/v2/f4_stevenson.jpg">    </p:cNvPr>
+          <p:cNvPr id="3" name="Image 0" descr="/home/claude/f4/img/minesec_sheet.png">    </p:cNvPr>
           <p:cNvPicPr>
             <a:picLocks noChangeAspect="1"/>
           </p:cNvPicPr>
@@ -9795,8 +10290,8 @@
         </p:blipFill>
         <p:spPr>
           <a:xfrm>
-            <a:off x="2246610" y="1783080"/>
-            <a:ext cx="7698475" cy="4270248"/>
+            <a:off x="0" y="658368"/>
+            <a:ext cx="5120640" cy="5833872"/>
           </a:xfrm>
           <a:prstGeom prst="rect">
             <a:avLst/>
@@ -9805,14 +10300,14 @@
       </p:pic>
       <p:sp>
         <p:nvSpPr>
-          <p:cNvPr id="5" name="Text 2"/>
+          <p:cNvPr id="4" name="Text 1"/>
           <p:cNvSpPr/>
           <p:nvPr/>
         </p:nvSpPr>
         <p:spPr>
           <a:xfrm>
-            <a:off x="457200" y="6089904"/>
-            <a:ext cx="11277295" cy="347472"/>
+            <a:off x="5349240" y="1005840"/>
+            <a:ext cx="6522415" cy="731520"/>
           </a:xfrm>
           <a:prstGeom prst="rect">
             <a:avLst/>
@@ -9821,24 +10316,68 @@
           <a:ln/>
         </p:spPr>
         <p:txBody>
-          <a:bodyPr wrap="square" lIns="0" tIns="0" rIns="0" bIns="0" rtlCol="0" anchor="ctr"/>
+          <a:bodyPr wrap="square" lIns="0" tIns="0" rIns="0" bIns="0" rtlCol="0" anchor="ctr">
+            <a:normAutofit/>
+          </a:bodyPr>
           <a:lstStyle/>
           <a:p>
             <a:pPr algn="ctr" indent="0" marL="0">
               <a:buNone/>
             </a:pPr>
             <a:r>
-              <a:rPr lang="en-US" sz="1800" i="1" dirty="0">
-                <a:solidFill>
-                  <a:srgbClr val="555555"/>
+              <a:rPr lang="en-US" sz="3600" b="1" dirty="0">
+                <a:solidFill>
+                  <a:srgbClr val="990011"/>
                 </a:solidFill>
                 <a:latin typeface="Times New Roman" pitchFamily="34" charset="0"/>
                 <a:ea typeface="Times New Roman" pitchFamily="34" charset="-122"/>
                 <a:cs typeface="Times New Roman" pitchFamily="34" charset="-120"/>
               </a:rPr>
-              <a:t>A Stevenson screen.</a:t>
-            </a:r>
-            <a:endParaRPr lang="en-US" sz="1800" dirty="0"/>
+              <a:t>Activity 2: Question 2</a:t>
+            </a:r>
+            <a:endParaRPr lang="en-US" sz="3600" dirty="0"/>
+          </a:p>
+        </p:txBody>
+      </p:sp>
+      <p:sp>
+        <p:nvSpPr>
+          <p:cNvPr id="5" name="Text 2"/>
+          <p:cNvSpPr/>
+          <p:nvPr/>
+        </p:nvSpPr>
+        <p:spPr>
+          <a:xfrm>
+            <a:off x="5349240" y="1783080"/>
+            <a:ext cx="6522415" cy="4663440"/>
+          </a:xfrm>
+          <a:prstGeom prst="rect">
+            <a:avLst/>
+          </a:prstGeom>
+          <a:noFill/>
+          <a:ln/>
+        </p:spPr>
+        <p:txBody>
+          <a:bodyPr wrap="square" lIns="0" tIns="0" rIns="0" bIns="0" rtlCol="0" anchor="t"/>
+          <a:lstStyle/>
+          <a:p>
+            <a:pPr algn="l" indent="0" marL="0">
+              <a:spcAft>
+                <a:spcPts val="800"/>
+              </a:spcAft>
+              <a:buNone/>
+            </a:pPr>
+            <a:r>
+              <a:rPr lang="en-US" sz="4000" dirty="0">
+                <a:solidFill>
+                  <a:srgbClr val="111111"/>
+                </a:solidFill>
+                <a:latin typeface="Times New Roman" pitchFamily="34" charset="0"/>
+                <a:ea typeface="Times New Roman" pitchFamily="34" charset="-122"/>
+                <a:cs typeface="Times New Roman" pitchFamily="34" charset="-120"/>
+              </a:rPr>
+              <a:t>What is the daily range?</a:t>
+            </a:r>
+            <a:endParaRPr lang="en-US" sz="4000" dirty="0"/>
           </a:p>
         </p:txBody>
       </p:sp>
@@ -9948,7 +10487,7 @@
                 <a:ea typeface="Calibri" pitchFamily="34" charset="-122"/>
                 <a:cs typeface="Calibri" pitchFamily="34" charset="-120"/>
               </a:rPr>
-              <a:t>3. THE STEVENSON SCREEN</a:t>
+              <a:t>2. PRESENTATION</a:t>
             </a:r>
             <a:endParaRPr lang="en-US" sz="1400" dirty="0"/>
           </a:p>
@@ -10013,7 +10552,7 @@
                 <a:ea typeface="Times New Roman" pitchFamily="34" charset="-122"/>
                 <a:cs typeface="Times New Roman" pitchFamily="34" charset="-120"/>
               </a:rPr>
-              <a:t>Activity 3: Question</a:t>
+              <a:t>Activity 2: Answer 2</a:t>
             </a:r>
             <a:endParaRPr lang="en-US" sz="3600" dirty="0"/>
           </a:p>
@@ -10055,7 +10594,7 @@
                 <a:ea typeface="Times New Roman" pitchFamily="34" charset="-122"/>
                 <a:cs typeface="Times New Roman" pitchFamily="34" charset="-120"/>
               </a:rPr>
-              <a:t>Why is this box white with openings on the sides?</a:t>
+              <a:t>38 − 24 = 14 °C.</a:t>
             </a:r>
             <a:endParaRPr lang="en-US" sz="4000" dirty="0"/>
           </a:p>
@@ -10167,15 +10706,54 @@
                 <a:ea typeface="Calibri" pitchFamily="34" charset="-122"/>
                 <a:cs typeface="Calibri" pitchFamily="34" charset="-120"/>
               </a:rPr>
-              <a:t>3. THE STEVENSON SCREEN</a:t>
+              <a:t>3. SITING OF THE STEVENSON SCREEN</a:t>
             </a:r>
             <a:endParaRPr lang="en-US" sz="1400" dirty="0"/>
+          </a:p>
+        </p:txBody>
+      </p:sp>
+      <p:sp>
+        <p:nvSpPr>
+          <p:cNvPr id="3" name="Text 1"/>
+          <p:cNvSpPr/>
+          <p:nvPr/>
+        </p:nvSpPr>
+        <p:spPr>
+          <a:xfrm>
+            <a:off x="457200" y="1005840"/>
+            <a:ext cx="11277295" cy="731520"/>
+          </a:xfrm>
+          <a:prstGeom prst="rect">
+            <a:avLst/>
+          </a:prstGeom>
+          <a:noFill/>
+          <a:ln/>
+        </p:spPr>
+        <p:txBody>
+          <a:bodyPr wrap="square" lIns="0" tIns="0" rIns="0" bIns="0" rtlCol="0" anchor="ctr"/>
+          <a:lstStyle/>
+          <a:p>
+            <a:pPr algn="ctr" indent="0" marL="0">
+              <a:buNone/>
+            </a:pPr>
+            <a:r>
+              <a:rPr lang="en-US" sz="3600" b="1" dirty="0">
+                <a:solidFill>
+                  <a:srgbClr val="990011"/>
+                </a:solidFill>
+                <a:latin typeface="Times New Roman" pitchFamily="34" charset="0"/>
+                <a:ea typeface="Times New Roman" pitchFamily="34" charset="-122"/>
+                <a:cs typeface="Times New Roman" pitchFamily="34" charset="-120"/>
+              </a:rPr>
+              <a:t>Activity 3</a:t>
+            </a:r>
+            <a:endParaRPr lang="en-US" sz="3600" dirty="0"/>
           </a:p>
         </p:txBody>
       </p:sp>
       <p:pic>
         <p:nvPicPr>
-          <p:cNvPr id="3" name="Image 0" descr="/home/claude/f4/img/minesec_sheet.png">    </p:cNvPr>
+          <p:cNvPr id="4" name="Image 0" descr="/home/claude/f4/img/v2/f4_stevenson.jpg">    </p:cNvPr>
           <p:cNvPicPr>
             <a:picLocks noChangeAspect="1"/>
           </p:cNvPicPr>
@@ -10189,8 +10767,8 @@
         </p:blipFill>
         <p:spPr>
           <a:xfrm>
-            <a:off x="0" y="658368"/>
-            <a:ext cx="5120640" cy="5833872"/>
+            <a:off x="2246610" y="1783080"/>
+            <a:ext cx="7698475" cy="4270248"/>
           </a:xfrm>
           <a:prstGeom prst="rect">
             <a:avLst/>
@@ -10199,14 +10777,14 @@
       </p:pic>
       <p:sp>
         <p:nvSpPr>
-          <p:cNvPr id="4" name="Text 1"/>
+          <p:cNvPr id="5" name="Text 2"/>
           <p:cNvSpPr/>
           <p:nvPr/>
         </p:nvSpPr>
         <p:spPr>
           <a:xfrm>
-            <a:off x="5349240" y="1005840"/>
-            <a:ext cx="6522415" cy="731520"/>
+            <a:off x="457200" y="6089904"/>
+            <a:ext cx="11277295" cy="347472"/>
           </a:xfrm>
           <a:prstGeom prst="rect">
             <a:avLst/>
@@ -10215,68 +10793,24 @@
           <a:ln/>
         </p:spPr>
         <p:txBody>
-          <a:bodyPr wrap="square" lIns="0" tIns="0" rIns="0" bIns="0" rtlCol="0" anchor="ctr">
-            <a:normAutofit/>
-          </a:bodyPr>
+          <a:bodyPr wrap="square" lIns="0" tIns="0" rIns="0" bIns="0" rtlCol="0" anchor="ctr"/>
           <a:lstStyle/>
           <a:p>
             <a:pPr algn="ctr" indent="0" marL="0">
               <a:buNone/>
             </a:pPr>
             <a:r>
-              <a:rPr lang="en-US" sz="3600" b="1" dirty="0">
-                <a:solidFill>
-                  <a:srgbClr val="990011"/>
+              <a:rPr lang="en-US" sz="1800" i="1" dirty="0">
+                <a:solidFill>
+                  <a:srgbClr val="555555"/>
                 </a:solidFill>
                 <a:latin typeface="Times New Roman" pitchFamily="34" charset="0"/>
                 <a:ea typeface="Times New Roman" pitchFamily="34" charset="-122"/>
                 <a:cs typeface="Times New Roman" pitchFamily="34" charset="-120"/>
               </a:rPr>
-              <a:t>Activity 3: Answer</a:t>
-            </a:r>
-            <a:endParaRPr lang="en-US" sz="3600" dirty="0"/>
-          </a:p>
-        </p:txBody>
-      </p:sp>
-      <p:sp>
-        <p:nvSpPr>
-          <p:cNvPr id="5" name="Text 2"/>
-          <p:cNvSpPr/>
-          <p:nvPr/>
-        </p:nvSpPr>
-        <p:spPr>
-          <a:xfrm>
-            <a:off x="5349240" y="1783080"/>
-            <a:ext cx="6522415" cy="4663440"/>
-          </a:xfrm>
-          <a:prstGeom prst="rect">
-            <a:avLst/>
-          </a:prstGeom>
-          <a:noFill/>
-          <a:ln/>
-        </p:spPr>
-        <p:txBody>
-          <a:bodyPr wrap="square" lIns="0" tIns="0" rIns="0" bIns="0" rtlCol="0" anchor="t"/>
-          <a:lstStyle/>
-          <a:p>
-            <a:pPr algn="l" indent="0" marL="0">
-              <a:spcAft>
-                <a:spcPts val="800"/>
-              </a:spcAft>
-              <a:buNone/>
-            </a:pPr>
-            <a:r>
-              <a:rPr lang="en-US" sz="4000" dirty="0">
-                <a:solidFill>
-                  <a:srgbClr val="111111"/>
-                </a:solidFill>
-                <a:latin typeface="Times New Roman" pitchFamily="34" charset="0"/>
-                <a:ea typeface="Times New Roman" pitchFamily="34" charset="-122"/>
-                <a:cs typeface="Times New Roman" pitchFamily="34" charset="-120"/>
-              </a:rPr>
-              <a:t>White reflects the sun; the openings let the air pass.</a:t>
-            </a:r>
-            <a:endParaRPr lang="en-US" sz="4000" dirty="0"/>
+              <a:t>A white wooden box.</a:t>
+            </a:r>
+            <a:endParaRPr lang="en-US" sz="1800" dirty="0"/>
           </a:p>
         </p:txBody>
       </p:sp>
@@ -10386,7 +10920,7 @@
                 <a:ea typeface="Calibri" pitchFamily="34" charset="-122"/>
                 <a:cs typeface="Calibri" pitchFamily="34" charset="-120"/>
               </a:rPr>
-              <a:t>BOARD SUMMARY</a:t>
+              <a:t>3. SITING OF THE STEVENSON SCREEN</a:t>
             </a:r>
             <a:endParaRPr lang="en-US" sz="1400" dirty="0"/>
           </a:p>
@@ -10451,7 +10985,7 @@
                 <a:ea typeface="Times New Roman" pitchFamily="34" charset="-122"/>
                 <a:cs typeface="Times New Roman" pitchFamily="34" charset="-120"/>
               </a:rPr>
-              <a:t>Board Summary</a:t>
+              <a:t>Activity 3: Question</a:t>
             </a:r>
             <a:endParaRPr lang="en-US" sz="3600" dirty="0"/>
           </a:p>
@@ -10485,7 +11019,7 @@
               <a:buNone/>
             </a:pPr>
             <a:r>
-              <a:rPr lang="en-US" sz="4000" b="1" dirty="0">
+              <a:rPr lang="en-US" sz="4000" dirty="0">
                 <a:solidFill>
                   <a:srgbClr val="111111"/>
                 </a:solidFill>
@@ -10493,47 +11027,7 @@
                 <a:ea typeface="Times New Roman" pitchFamily="34" charset="-122"/>
                 <a:cs typeface="Times New Roman" pitchFamily="34" charset="-120"/>
               </a:rPr>
-              <a:t>Topic: The Earth-Atmosphere System</a:t>
-            </a:r>
-            <a:endParaRPr lang="en-US" sz="4000" dirty="0"/>
-          </a:p>
-          <a:p>
-            <a:pPr algn="l" indent="0" marL="0">
-              <a:spcAft>
-                <a:spcPts val="800"/>
-              </a:spcAft>
-              <a:buNone/>
-            </a:pPr>
-            <a:r>
-              <a:rPr lang="en-US" sz="4000" b="1" dirty="0">
-                <a:solidFill>
-                  <a:srgbClr val="111111"/>
-                </a:solidFill>
-                <a:latin typeface="Times New Roman" pitchFamily="34" charset="0"/>
-                <a:ea typeface="Times New Roman" pitchFamily="34" charset="-122"/>
-                <a:cs typeface="Times New Roman" pitchFamily="34" charset="-120"/>
-              </a:rPr>
-              <a:t>Sub-topic: Measurement of Weather Elements</a:t>
-            </a:r>
-            <a:endParaRPr lang="en-US" sz="4000" dirty="0"/>
-          </a:p>
-          <a:p>
-            <a:pPr algn="l" indent="0" marL="0">
-              <a:spcAft>
-                <a:spcPts val="800"/>
-              </a:spcAft>
-              <a:buNone/>
-            </a:pPr>
-            <a:r>
-              <a:rPr lang="en-US" sz="4000" b="1" dirty="0">
-                <a:solidFill>
-                  <a:srgbClr val="990011"/>
-                </a:solidFill>
-                <a:latin typeface="Times New Roman" pitchFamily="34" charset="0"/>
-                <a:ea typeface="Times New Roman" pitchFamily="34" charset="-122"/>
-                <a:cs typeface="Times New Roman" pitchFamily="34" charset="-120"/>
-              </a:rPr>
-              <a:t>Lesson 32: Weather Elements: Atmospheric Temperatures</a:t>
+              <a:t>Why is this box painted white?</a:t>
             </a:r>
             <a:endParaRPr lang="en-US" sz="4000" dirty="0"/>
           </a:p>
@@ -10645,7 +11139,7 @@
                 <a:ea typeface="Calibri" pitchFamily="34" charset="-122"/>
                 <a:cs typeface="Calibri" pitchFamily="34" charset="-120"/>
               </a:rPr>
-              <a:t>BOARD SUMMARY</a:t>
+              <a:t>3. SITING OF THE STEVENSON SCREEN</a:t>
             </a:r>
             <a:endParaRPr lang="en-US" sz="1400" dirty="0"/>
           </a:p>
@@ -10668,7 +11162,7 @@
         <p:spPr>
           <a:xfrm>
             <a:off x="0" y="658368"/>
-            <a:ext cx="3840480" cy="5833872"/>
+            <a:ext cx="5120640" cy="5833872"/>
           </a:xfrm>
           <a:prstGeom prst="rect">
             <a:avLst/>
@@ -10683,8 +11177,8 @@
         </p:nvSpPr>
         <p:spPr>
           <a:xfrm>
-            <a:off x="4069080" y="1005840"/>
-            <a:ext cx="7802575" cy="731520"/>
+            <a:off x="5349240" y="1005840"/>
+            <a:ext cx="6522415" cy="731520"/>
           </a:xfrm>
           <a:prstGeom prst="rect">
             <a:avLst/>
@@ -10710,7 +11204,7 @@
                 <a:ea typeface="Times New Roman" pitchFamily="34" charset="-122"/>
                 <a:cs typeface="Times New Roman" pitchFamily="34" charset="-120"/>
               </a:rPr>
-              <a:t>1. Meaning and Measurement of Temperature</a:t>
+              <a:t>Activity 3: Answer</a:t>
             </a:r>
             <a:endParaRPr lang="en-US" sz="3600" dirty="0"/>
           </a:p>
@@ -10724,8 +11218,8 @@
         </p:nvSpPr>
         <p:spPr>
           <a:xfrm>
-            <a:off x="4069080" y="1783080"/>
-            <a:ext cx="7802575" cy="4663440"/>
+            <a:off x="5349240" y="1783080"/>
+            <a:ext cx="6522415" cy="4663440"/>
           </a:xfrm>
           <a:prstGeom prst="rect">
             <a:avLst/>
@@ -10744,7 +11238,7 @@
               <a:buNone/>
             </a:pPr>
             <a:r>
-              <a:rPr lang="en-US" sz="4000" i="1" dirty="0">
+              <a:rPr lang="en-US" sz="4000" dirty="0">
                 <a:solidFill>
                   <a:srgbClr val="111111"/>
                 </a:solidFill>
@@ -10752,81 +11246,7 @@
                 <a:ea typeface="Times New Roman" pitchFamily="34" charset="-122"/>
                 <a:cs typeface="Times New Roman" pitchFamily="34" charset="-120"/>
               </a:rPr>
-              <a:t>Temperature is defined and measured as follows:</a:t>
-            </a:r>
-            <a:endParaRPr lang="en-US" sz="4000" dirty="0"/>
-          </a:p>
-          <a:p>
-            <a:pPr algn="l" indent="0" marL="0">
-              <a:spcAft>
-                <a:spcPts val="800"/>
-              </a:spcAft>
-              <a:buNone/>
-            </a:pPr>
-            <a:r>
-              <a:rPr lang="en-US" sz="4000" b="1" dirty="0">
-                <a:solidFill>
-                  <a:srgbClr val="111111"/>
-                </a:solidFill>
-                <a:latin typeface="Times New Roman" pitchFamily="34" charset="0"/>
-                <a:ea typeface="Times New Roman" pitchFamily="34" charset="-122"/>
-                <a:cs typeface="Times New Roman" pitchFamily="34" charset="-120"/>
-              </a:rPr>
-              <a:t>Temperature: </a:t>
-            </a:r>
-            <a:pPr algn="l" indent="0" marL="0">
-              <a:spcAft>
-                <a:spcPts val="800"/>
-              </a:spcAft>
-              <a:buNone/>
-            </a:pPr>
-            <a:r>
-              <a:rPr lang="en-US" sz="4000" dirty="0">
-                <a:solidFill>
-                  <a:srgbClr val="111111"/>
-                </a:solidFill>
-                <a:latin typeface="Times New Roman" pitchFamily="34" charset="0"/>
-                <a:ea typeface="Times New Roman" pitchFamily="34" charset="-122"/>
-                <a:cs typeface="Times New Roman" pitchFamily="34" charset="-120"/>
-              </a:rPr>
-              <a:t>It is the degree of hotness or coldness of the air.</a:t>
-            </a:r>
-            <a:endParaRPr lang="en-US" sz="4000" dirty="0"/>
-          </a:p>
-          <a:p>
-            <a:pPr algn="l" indent="0" marL="0">
-              <a:spcAft>
-                <a:spcPts val="800"/>
-              </a:spcAft>
-              <a:buNone/>
-            </a:pPr>
-            <a:r>
-              <a:rPr lang="en-US" sz="4000" b="1" dirty="0">
-                <a:solidFill>
-                  <a:srgbClr val="111111"/>
-                </a:solidFill>
-                <a:latin typeface="Times New Roman" pitchFamily="34" charset="0"/>
-                <a:ea typeface="Times New Roman" pitchFamily="34" charset="-122"/>
-                <a:cs typeface="Times New Roman" pitchFamily="34" charset="-120"/>
-              </a:rPr>
-              <a:t>Thermometer: </a:t>
-            </a:r>
-            <a:pPr algn="l" indent="0" marL="0">
-              <a:spcAft>
-                <a:spcPts val="800"/>
-              </a:spcAft>
-              <a:buNone/>
-            </a:pPr>
-            <a:r>
-              <a:rPr lang="en-US" sz="4000" dirty="0">
-                <a:solidFill>
-                  <a:srgbClr val="111111"/>
-                </a:solidFill>
-                <a:latin typeface="Times New Roman" pitchFamily="34" charset="0"/>
-                <a:ea typeface="Times New Roman" pitchFamily="34" charset="-122"/>
-                <a:cs typeface="Times New Roman" pitchFamily="34" charset="-120"/>
-              </a:rPr>
-              <a:t>It shows the temperature of the air at the moment it is read.</a:t>
+              <a:t>White reflects the rays of the Sun, so the thermometers inside measure the air in the shade.</a:t>
             </a:r>
             <a:endParaRPr lang="en-US" sz="4000" dirty="0"/>
           </a:p>
@@ -12012,7 +12432,7 @@
                 <a:ea typeface="Times New Roman" pitchFamily="34" charset="-122"/>
                 <a:cs typeface="Times New Roman" pitchFamily="34" charset="-120"/>
               </a:rPr>
-              <a:t>1. Meaning and Measurement of Temperature (continued)</a:t>
+              <a:t>Board Summary</a:t>
             </a:r>
             <a:endParaRPr lang="en-US" sz="3600" dirty="0"/>
           </a:p>
@@ -12046,7 +12466,7 @@
               <a:buNone/>
             </a:pPr>
             <a:r>
-              <a:rPr lang="en-US" sz="4000" b="1" dirty="0">
+              <a:rPr lang="en-US" sz="3200" b="1" dirty="0">
                 <a:solidFill>
                   <a:srgbClr val="111111"/>
                 </a:solidFill>
@@ -12054,8 +12474,11 @@
                 <a:ea typeface="Times New Roman" pitchFamily="34" charset="-122"/>
                 <a:cs typeface="Times New Roman" pitchFamily="34" charset="-120"/>
               </a:rPr>
-              <a:t>Six's thermometer: </a:t>
-            </a:r>
+              <a:t>Topic: The Earth-Atmosphere System</a:t>
+            </a:r>
+            <a:endParaRPr lang="en-US" sz="3200" dirty="0"/>
+          </a:p>
+          <a:p>
             <a:pPr algn="l" indent="0" marL="0">
               <a:spcAft>
                 <a:spcPts val="800"/>
@@ -12063,7 +12486,7 @@
               <a:buNone/>
             </a:pPr>
             <a:r>
-              <a:rPr lang="en-US" sz="4000" dirty="0">
+              <a:rPr lang="en-US" sz="3200" b="1" dirty="0">
                 <a:solidFill>
                   <a:srgbClr val="111111"/>
                 </a:solidFill>
@@ -12071,9 +12494,29 @@
                 <a:ea typeface="Times New Roman" pitchFamily="34" charset="-122"/>
                 <a:cs typeface="Times New Roman" pitchFamily="34" charset="-120"/>
               </a:rPr>
-              <a:t>It records the maximum and the minimum temperatures of the day.</a:t>
-            </a:r>
-            <a:endParaRPr lang="en-US" sz="4000" dirty="0"/>
+              <a:t>Sub-topic: Measurement of Weather Elements</a:t>
+            </a:r>
+            <a:endParaRPr lang="en-US" sz="3200" dirty="0"/>
+          </a:p>
+          <a:p>
+            <a:pPr algn="l" indent="0" marL="0">
+              <a:spcAft>
+                <a:spcPts val="800"/>
+              </a:spcAft>
+              <a:buNone/>
+            </a:pPr>
+            <a:r>
+              <a:rPr lang="en-US" sz="3200" b="1" dirty="0">
+                <a:solidFill>
+                  <a:srgbClr val="990011"/>
+                </a:solidFill>
+                <a:latin typeface="Times New Roman" pitchFamily="34" charset="0"/>
+                <a:ea typeface="Times New Roman" pitchFamily="34" charset="-122"/>
+                <a:cs typeface="Times New Roman" pitchFamily="34" charset="-120"/>
+              </a:rPr>
+              <a:t>Lesson 32: Weather Elements: Atmospheric Temperatures</a:t>
+            </a:r>
+            <a:endParaRPr lang="en-US" sz="3200" dirty="0"/>
           </a:p>
         </p:txBody>
       </p:sp>
@@ -12206,7 +12649,7 @@
         <p:spPr>
           <a:xfrm>
             <a:off x="0" y="658368"/>
-            <a:ext cx="2468880" cy="5833872"/>
+            <a:ext cx="5120640" cy="5833872"/>
           </a:xfrm>
           <a:prstGeom prst="rect">
             <a:avLst/>
@@ -12221,8 +12664,8 @@
         </p:nvSpPr>
         <p:spPr>
           <a:xfrm>
-            <a:off x="2697480" y="1005840"/>
-            <a:ext cx="9174175" cy="731520"/>
+            <a:off x="5349240" y="1005840"/>
+            <a:ext cx="6522415" cy="731520"/>
           </a:xfrm>
           <a:prstGeom prst="rect">
             <a:avLst/>
@@ -12248,7 +12691,7 @@
                 <a:ea typeface="Times New Roman" pitchFamily="34" charset="-122"/>
                 <a:cs typeface="Times New Roman" pitchFamily="34" charset="-120"/>
               </a:rPr>
-              <a:t>2. Presentation of Temperature</a:t>
+              <a:t>DEFINITIONS</a:t>
             </a:r>
             <a:endParaRPr lang="en-US" sz="3600" dirty="0"/>
           </a:p>
@@ -12262,8 +12705,8 @@
         </p:nvSpPr>
         <p:spPr>
           <a:xfrm>
-            <a:off x="2697480" y="1783080"/>
-            <a:ext cx="9174175" cy="4663440"/>
+            <a:off x="5349240" y="1783080"/>
+            <a:ext cx="6522415" cy="4663440"/>
           </a:xfrm>
           <a:prstGeom prst="rect">
             <a:avLst/>
@@ -12290,7 +12733,7 @@
                 <a:ea typeface="Times New Roman" pitchFamily="34" charset="-122"/>
                 <a:cs typeface="Times New Roman" pitchFamily="34" charset="-120"/>
               </a:rPr>
-              <a:t>Temperature data are presented with the following calculations:</a:t>
+              <a:t>The key terms of this lesson are defined as follows:</a:t>
             </a:r>
             <a:endParaRPr lang="en-US" sz="4000" dirty="0"/>
           </a:p>
@@ -12310,7 +12753,7 @@
                 <a:ea typeface="Times New Roman" pitchFamily="34" charset="-122"/>
                 <a:cs typeface="Times New Roman" pitchFamily="34" charset="-120"/>
               </a:rPr>
-              <a:t>Mean daily temperature: </a:t>
+              <a:t>Atmospheric temperature: </a:t>
             </a:r>
             <a:pPr algn="l" indent="0" marL="0">
               <a:spcAft>
@@ -12327,44 +12770,7 @@
                 <a:ea typeface="Times New Roman" pitchFamily="34" charset="-122"/>
                 <a:cs typeface="Times New Roman" pitchFamily="34" charset="-120"/>
               </a:rPr>
-              <a:t>It is (maximum + minimum) ÷ 2, for example (38 + 24) ÷ 2 = 31 °C.</a:t>
-            </a:r>
-            <a:endParaRPr lang="en-US" sz="4000" dirty="0"/>
-          </a:p>
-          <a:p>
-            <a:pPr algn="l" indent="0" marL="0">
-              <a:spcAft>
-                <a:spcPts val="800"/>
-              </a:spcAft>
-              <a:buNone/>
-            </a:pPr>
-            <a:r>
-              <a:rPr lang="en-US" sz="4000" b="1" dirty="0">
-                <a:solidFill>
-                  <a:srgbClr val="111111"/>
-                </a:solidFill>
-                <a:latin typeface="Times New Roman" pitchFamily="34" charset="0"/>
-                <a:ea typeface="Times New Roman" pitchFamily="34" charset="-122"/>
-                <a:cs typeface="Times New Roman" pitchFamily="34" charset="-120"/>
-              </a:rPr>
-              <a:t>Daily range: </a:t>
-            </a:r>
-            <a:pPr algn="l" indent="0" marL="0">
-              <a:spcAft>
-                <a:spcPts val="800"/>
-              </a:spcAft>
-              <a:buNone/>
-            </a:pPr>
-            <a:r>
-              <a:rPr lang="en-US" sz="4000" dirty="0">
-                <a:solidFill>
-                  <a:srgbClr val="111111"/>
-                </a:solidFill>
-                <a:latin typeface="Times New Roman" pitchFamily="34" charset="0"/>
-                <a:ea typeface="Times New Roman" pitchFamily="34" charset="-122"/>
-                <a:cs typeface="Times New Roman" pitchFamily="34" charset="-120"/>
-              </a:rPr>
-              <a:t>It is maximum − minimum, for example 38 − 24 = 14 °C.</a:t>
+              <a:t>It is the degree of hotness or coldness of the air, measured in °C.</a:t>
             </a:r>
             <a:endParaRPr lang="en-US" sz="4000" dirty="0"/>
           </a:p>
@@ -12482,48 +12888,9 @@
           </a:p>
         </p:txBody>
       </p:sp>
-      <p:sp>
-        <p:nvSpPr>
-          <p:cNvPr id="3" name="Text 1"/>
-          <p:cNvSpPr/>
-          <p:nvPr/>
-        </p:nvSpPr>
-        <p:spPr>
-          <a:xfrm>
-            <a:off x="457200" y="1005840"/>
-            <a:ext cx="11277295" cy="731520"/>
-          </a:xfrm>
-          <a:prstGeom prst="rect">
-            <a:avLst/>
-          </a:prstGeom>
-          <a:noFill/>
-          <a:ln/>
-        </p:spPr>
-        <p:txBody>
-          <a:bodyPr wrap="square" lIns="0" tIns="0" rIns="0" bIns="0" rtlCol="0" anchor="ctr"/>
-          <a:lstStyle/>
-          <a:p>
-            <a:pPr algn="ctr" indent="0" marL="0">
-              <a:buNone/>
-            </a:pPr>
-            <a:r>
-              <a:rPr lang="en-US" sz="3600" b="1" dirty="0">
-                <a:solidFill>
-                  <a:srgbClr val="990011"/>
-                </a:solidFill>
-                <a:latin typeface="Times New Roman" pitchFamily="34" charset="0"/>
-                <a:ea typeface="Times New Roman" pitchFamily="34" charset="-122"/>
-                <a:cs typeface="Times New Roman" pitchFamily="34" charset="-120"/>
-              </a:rPr>
-              <a:t>2. Presentation of Temperature</a:t>
-            </a:r>
-            <a:endParaRPr lang="en-US" sz="3600" dirty="0"/>
-          </a:p>
-        </p:txBody>
-      </p:sp>
       <p:pic>
         <p:nvPicPr>
-          <p:cNvPr id="4" name="Image 0" descr="/home/claude/f4/img/v2/temp_mean_big.png">    </p:cNvPr>
+          <p:cNvPr id="3" name="Image 0" descr="/home/claude/f4/img/minesec_sheet.png">    </p:cNvPr>
           <p:cNvPicPr>
             <a:picLocks noChangeAspect="1"/>
           </p:cNvPicPr>
@@ -12537,8 +12904,8 @@
         </p:blipFill>
         <p:spPr>
           <a:xfrm>
-            <a:off x="629930" y="1783080"/>
-            <a:ext cx="10931835" cy="4270248"/>
+            <a:off x="0" y="658368"/>
+            <a:ext cx="3840480" cy="5833872"/>
           </a:xfrm>
           <a:prstGeom prst="rect">
             <a:avLst/>
@@ -12547,14 +12914,14 @@
       </p:pic>
       <p:sp>
         <p:nvSpPr>
-          <p:cNvPr id="5" name="Text 2"/>
+          <p:cNvPr id="4" name="Text 1"/>
           <p:cNvSpPr/>
           <p:nvPr/>
         </p:nvSpPr>
         <p:spPr>
           <a:xfrm>
-            <a:off x="457200" y="6089904"/>
-            <a:ext cx="11277295" cy="347472"/>
+            <a:off x="4069080" y="1005840"/>
+            <a:ext cx="7802575" cy="731520"/>
           </a:xfrm>
           <a:prstGeom prst="rect">
             <a:avLst/>
@@ -12563,24 +12930,122 @@
           <a:ln/>
         </p:spPr>
         <p:txBody>
-          <a:bodyPr wrap="square" lIns="0" tIns="0" rIns="0" bIns="0" rtlCol="0" anchor="ctr"/>
+          <a:bodyPr wrap="square" lIns="0" tIns="0" rIns="0" bIns="0" rtlCol="0" anchor="ctr">
+            <a:normAutofit/>
+          </a:bodyPr>
           <a:lstStyle/>
           <a:p>
             <a:pPr algn="ctr" indent="0" marL="0">
               <a:buNone/>
             </a:pPr>
             <a:r>
-              <a:rPr lang="en-US" sz="1800" i="1" dirty="0">
-                <a:solidFill>
-                  <a:srgbClr val="555555"/>
+              <a:rPr lang="en-US" sz="3600" b="1" dirty="0">
+                <a:solidFill>
+                  <a:srgbClr val="990011"/>
                 </a:solidFill>
                 <a:latin typeface="Times New Roman" pitchFamily="34" charset="0"/>
                 <a:ea typeface="Times New Roman" pitchFamily="34" charset="-122"/>
                 <a:cs typeface="Times New Roman" pitchFamily="34" charset="-120"/>
               </a:rPr>
-              <a:t>Illustration: calculating the mean and the range</a:t>
-            </a:r>
-            <a:endParaRPr lang="en-US" sz="1800" dirty="0"/>
+              <a:t>DEFINITIONS (continued)</a:t>
+            </a:r>
+            <a:endParaRPr lang="en-US" sz="3600" dirty="0"/>
+          </a:p>
+        </p:txBody>
+      </p:sp>
+      <p:sp>
+        <p:nvSpPr>
+          <p:cNvPr id="5" name="Text 2"/>
+          <p:cNvSpPr/>
+          <p:nvPr/>
+        </p:nvSpPr>
+        <p:spPr>
+          <a:xfrm>
+            <a:off x="4069080" y="1783080"/>
+            <a:ext cx="7802575" cy="4663440"/>
+          </a:xfrm>
+          <a:prstGeom prst="rect">
+            <a:avLst/>
+          </a:prstGeom>
+          <a:noFill/>
+          <a:ln/>
+        </p:spPr>
+        <p:txBody>
+          <a:bodyPr wrap="square" lIns="0" tIns="0" rIns="0" bIns="0" rtlCol="0" anchor="t"/>
+          <a:lstStyle/>
+          <a:p>
+            <a:pPr algn="l" indent="0" marL="0">
+              <a:spcAft>
+                <a:spcPts val="800"/>
+              </a:spcAft>
+              <a:buNone/>
+            </a:pPr>
+            <a:r>
+              <a:rPr lang="en-US" sz="4000" b="1" dirty="0">
+                <a:solidFill>
+                  <a:srgbClr val="111111"/>
+                </a:solidFill>
+                <a:latin typeface="Times New Roman" pitchFamily="34" charset="0"/>
+                <a:ea typeface="Times New Roman" pitchFamily="34" charset="-122"/>
+                <a:cs typeface="Times New Roman" pitchFamily="34" charset="-120"/>
+              </a:rPr>
+              <a:t>Mean daily temperature: </a:t>
+            </a:r>
+            <a:pPr algn="l" indent="0" marL="0">
+              <a:spcAft>
+                <a:spcPts val="800"/>
+              </a:spcAft>
+              <a:buNone/>
+            </a:pPr>
+            <a:r>
+              <a:rPr lang="en-US" sz="4000" dirty="0">
+                <a:solidFill>
+                  <a:srgbClr val="111111"/>
+                </a:solidFill>
+                <a:latin typeface="Times New Roman" pitchFamily="34" charset="0"/>
+                <a:ea typeface="Times New Roman" pitchFamily="34" charset="-122"/>
+                <a:cs typeface="Times New Roman" pitchFamily="34" charset="-120"/>
+              </a:rPr>
+              <a:t>It is the average of the maximum and the minimum temperatures of a day.</a:t>
+            </a:r>
+            <a:endParaRPr lang="en-US" sz="4000" dirty="0"/>
+          </a:p>
+          <a:p>
+            <a:pPr algn="l" indent="0" marL="0">
+              <a:spcAft>
+                <a:spcPts val="800"/>
+              </a:spcAft>
+              <a:buNone/>
+            </a:pPr>
+            <a:r>
+              <a:rPr lang="en-US" sz="4000" b="1" dirty="0">
+                <a:solidFill>
+                  <a:srgbClr val="111111"/>
+                </a:solidFill>
+                <a:latin typeface="Times New Roman" pitchFamily="34" charset="0"/>
+                <a:ea typeface="Times New Roman" pitchFamily="34" charset="-122"/>
+                <a:cs typeface="Times New Roman" pitchFamily="34" charset="-120"/>
+              </a:rPr>
+              <a:t>Daily range of temperature: </a:t>
+            </a:r>
+            <a:pPr algn="l" indent="0" marL="0">
+              <a:spcAft>
+                <a:spcPts val="800"/>
+              </a:spcAft>
+              <a:buNone/>
+            </a:pPr>
+            <a:r>
+              <a:rPr lang="en-US" sz="4000" dirty="0">
+                <a:solidFill>
+                  <a:srgbClr val="111111"/>
+                </a:solidFill>
+                <a:latin typeface="Times New Roman" pitchFamily="34" charset="0"/>
+                <a:ea typeface="Times New Roman" pitchFamily="34" charset="-122"/>
+                <a:cs typeface="Times New Roman" pitchFamily="34" charset="-120"/>
+              </a:rPr>
+              <a:t>It is the difference between the maximum and the minimum temperatures of a day.</a:t>
+            </a:r>
+            <a:endParaRPr lang="en-US" sz="4000" dirty="0"/>
           </a:p>
         </p:txBody>
       </p:sp>
@@ -12755,7 +13220,7 @@
                 <a:ea typeface="Times New Roman" pitchFamily="34" charset="-122"/>
                 <a:cs typeface="Times New Roman" pitchFamily="34" charset="-120"/>
               </a:rPr>
-              <a:t>3. Siting of the Stevenson Screen</a:t>
+              <a:t>1. Measurement of Temperature</a:t>
             </a:r>
             <a:endParaRPr lang="en-US" sz="3600" dirty="0"/>
           </a:p>
@@ -12797,7 +13262,7 @@
                 <a:ea typeface="Times New Roman" pitchFamily="34" charset="-122"/>
                 <a:cs typeface="Times New Roman" pitchFamily="34" charset="-120"/>
               </a:rPr>
-              <a:t>The Stevenson screen is built and placed as follows:</a:t>
+              <a:t>Temperature is measured with the following instruments:</a:t>
             </a:r>
             <a:endParaRPr lang="en-US" sz="4000" dirty="0"/>
           </a:p>
@@ -12817,7 +13282,7 @@
                 <a:ea typeface="Times New Roman" pitchFamily="34" charset="-122"/>
                 <a:cs typeface="Times New Roman" pitchFamily="34" charset="-120"/>
               </a:rPr>
-              <a:t>Colour: </a:t>
+              <a:t>Ordinary thermometer: </a:t>
             </a:r>
             <a:pPr algn="l" indent="0" marL="0">
               <a:spcAft>
@@ -12834,44 +13299,7 @@
                 <a:ea typeface="Times New Roman" pitchFamily="34" charset="-122"/>
                 <a:cs typeface="Times New Roman" pitchFamily="34" charset="-120"/>
               </a:rPr>
-              <a:t>It is painted white to reflect sunlight.</a:t>
-            </a:r>
-            <a:endParaRPr lang="en-US" sz="4000" dirty="0"/>
-          </a:p>
-          <a:p>
-            <a:pPr algn="l" indent="0" marL="0">
-              <a:spcAft>
-                <a:spcPts val="800"/>
-              </a:spcAft>
-              <a:buNone/>
-            </a:pPr>
-            <a:r>
-              <a:rPr lang="en-US" sz="4000" b="1" dirty="0">
-                <a:solidFill>
-                  <a:srgbClr val="111111"/>
-                </a:solidFill>
-                <a:latin typeface="Times New Roman" pitchFamily="34" charset="0"/>
-                <a:ea typeface="Times New Roman" pitchFamily="34" charset="-122"/>
-                <a:cs typeface="Times New Roman" pitchFamily="34" charset="-120"/>
-              </a:rPr>
-              <a:t>Louvred sides: </a:t>
-            </a:r>
-            <a:pPr algn="l" indent="0" marL="0">
-              <a:spcAft>
-                <a:spcPts val="800"/>
-              </a:spcAft>
-              <a:buNone/>
-            </a:pPr>
-            <a:r>
-              <a:rPr lang="en-US" sz="4000" dirty="0">
-                <a:solidFill>
-                  <a:srgbClr val="111111"/>
-                </a:solidFill>
-                <a:latin typeface="Times New Roman" pitchFamily="34" charset="0"/>
-                <a:ea typeface="Times New Roman" pitchFamily="34" charset="-122"/>
-                <a:cs typeface="Times New Roman" pitchFamily="34" charset="-120"/>
-              </a:rPr>
-              <a:t>Its slatted sides let the air move freely inside.</a:t>
+              <a:t>It shows the temperature of the air at the moment it is read.</a:t>
             </a:r>
             <a:endParaRPr lang="en-US" sz="4000" dirty="0"/>
           </a:p>
@@ -12989,9 +13417,109 @@
           </a:p>
         </p:txBody>
       </p:sp>
+      <p:sp>
+        <p:nvSpPr>
+          <p:cNvPr id="3" name="Text 1"/>
+          <p:cNvSpPr/>
+          <p:nvPr/>
+        </p:nvSpPr>
+        <p:spPr>
+          <a:xfrm>
+            <a:off x="365760" y="1005840"/>
+            <a:ext cx="11460175" cy="731520"/>
+          </a:xfrm>
+          <a:prstGeom prst="rect">
+            <a:avLst/>
+          </a:prstGeom>
+          <a:noFill/>
+          <a:ln/>
+        </p:spPr>
+        <p:txBody>
+          <a:bodyPr wrap="square" lIns="0" tIns="0" rIns="0" bIns="0" rtlCol="0" anchor="ctr">
+            <a:normAutofit/>
+          </a:bodyPr>
+          <a:lstStyle/>
+          <a:p>
+            <a:pPr algn="ctr" indent="0" marL="0">
+              <a:buNone/>
+            </a:pPr>
+            <a:r>
+              <a:rPr lang="en-US" sz="3600" b="1" dirty="0">
+                <a:solidFill>
+                  <a:srgbClr val="990011"/>
+                </a:solidFill>
+                <a:latin typeface="Times New Roman" pitchFamily="34" charset="0"/>
+                <a:ea typeface="Times New Roman" pitchFamily="34" charset="-122"/>
+                <a:cs typeface="Times New Roman" pitchFamily="34" charset="-120"/>
+              </a:rPr>
+              <a:t>1. Measurement of Temperature</a:t>
+            </a:r>
+            <a:endParaRPr lang="en-US" sz="3600" dirty="0"/>
+          </a:p>
+        </p:txBody>
+      </p:sp>
+      <p:sp>
+        <p:nvSpPr>
+          <p:cNvPr id="4" name="Text 2"/>
+          <p:cNvSpPr/>
+          <p:nvPr/>
+        </p:nvSpPr>
+        <p:spPr>
+          <a:xfrm>
+            <a:off x="365760" y="1783080"/>
+            <a:ext cx="4846320" cy="4617720"/>
+          </a:xfrm>
+          <a:prstGeom prst="rect">
+            <a:avLst/>
+          </a:prstGeom>
+          <a:noFill/>
+          <a:ln/>
+        </p:spPr>
+        <p:txBody>
+          <a:bodyPr wrap="square" lIns="0" tIns="0" rIns="0" bIns="0" rtlCol="0" anchor="t"/>
+          <a:lstStyle/>
+          <a:p>
+            <a:pPr algn="l" indent="0" marL="0">
+              <a:spcAft>
+                <a:spcPts val="800"/>
+              </a:spcAft>
+              <a:buNone/>
+            </a:pPr>
+            <a:r>
+              <a:rPr lang="en-US" sz="3600" b="1" dirty="0">
+                <a:solidFill>
+                  <a:srgbClr val="111111"/>
+                </a:solidFill>
+                <a:latin typeface="Times New Roman" pitchFamily="34" charset="0"/>
+                <a:ea typeface="Times New Roman" pitchFamily="34" charset="-122"/>
+                <a:cs typeface="Times New Roman" pitchFamily="34" charset="-120"/>
+              </a:rPr>
+              <a:t>Six's thermometer: </a:t>
+            </a:r>
+            <a:pPr algn="l" indent="0" marL="0">
+              <a:spcAft>
+                <a:spcPts val="800"/>
+              </a:spcAft>
+              <a:buNone/>
+            </a:pPr>
+            <a:r>
+              <a:rPr lang="en-US" sz="3600" dirty="0">
+                <a:solidFill>
+                  <a:srgbClr val="111111"/>
+                </a:solidFill>
+                <a:latin typeface="Times New Roman" pitchFamily="34" charset="0"/>
+                <a:ea typeface="Times New Roman" pitchFamily="34" charset="-122"/>
+                <a:cs typeface="Times New Roman" pitchFamily="34" charset="-120"/>
+              </a:rPr>
+              <a:t>It records the maximum and the minimum temperatures with two small indexes.</a:t>
+            </a:r>
+            <a:endParaRPr lang="en-US" sz="3600" dirty="0"/>
+          </a:p>
+        </p:txBody>
+      </p:sp>
       <p:pic>
         <p:nvPicPr>
-          <p:cNvPr id="3" name="Image 0" descr="/home/claude/f4/img/minesec_sheet.png">    </p:cNvPr>
+          <p:cNvPr id="5" name="Image 0" descr="/home/claude/f4/img/sixs_thermometer.png">    </p:cNvPr>
           <p:cNvPicPr>
             <a:picLocks noChangeAspect="1"/>
           </p:cNvPicPr>
@@ -13005,8 +13533,8 @@
         </p:blipFill>
         <p:spPr>
           <a:xfrm>
-            <a:off x="0" y="658368"/>
-            <a:ext cx="5120640" cy="5833872"/>
+            <a:off x="6102508" y="1783080"/>
+            <a:ext cx="5153040" cy="4270248"/>
           </a:xfrm>
           <a:prstGeom prst="rect">
             <a:avLst/>
@@ -13015,14 +13543,14 @@
       </p:pic>
       <p:sp>
         <p:nvSpPr>
-          <p:cNvPr id="4" name="Text 1"/>
+          <p:cNvPr id="6" name="Text 3"/>
           <p:cNvSpPr/>
           <p:nvPr/>
         </p:nvSpPr>
         <p:spPr>
           <a:xfrm>
-            <a:off x="5349240" y="1005840"/>
-            <a:ext cx="6522415" cy="731520"/>
+            <a:off x="5349240" y="6089904"/>
+            <a:ext cx="6659575" cy="347472"/>
           </a:xfrm>
           <a:prstGeom prst="rect">
             <a:avLst/>
@@ -13031,85 +13559,24 @@
           <a:ln/>
         </p:spPr>
         <p:txBody>
-          <a:bodyPr wrap="square" lIns="0" tIns="0" rIns="0" bIns="0" rtlCol="0" anchor="ctr">
-            <a:normAutofit/>
-          </a:bodyPr>
+          <a:bodyPr wrap="square" lIns="0" tIns="0" rIns="0" bIns="0" rtlCol="0" anchor="ctr"/>
           <a:lstStyle/>
           <a:p>
             <a:pPr algn="ctr" indent="0" marL="0">
               <a:buNone/>
             </a:pPr>
             <a:r>
-              <a:rPr lang="en-US" sz="3600" b="1" dirty="0">
-                <a:solidFill>
-                  <a:srgbClr val="990011"/>
+              <a:rPr lang="en-US" sz="1600" i="1" dirty="0">
+                <a:solidFill>
+                  <a:srgbClr val="555555"/>
                 </a:solidFill>
                 <a:latin typeface="Times New Roman" pitchFamily="34" charset="0"/>
                 <a:ea typeface="Times New Roman" pitchFamily="34" charset="-122"/>
                 <a:cs typeface="Times New Roman" pitchFamily="34" charset="-120"/>
               </a:rPr>
-              <a:t>3. Siting of the Stevenson Screen (continued)</a:t>
-            </a:r>
-            <a:endParaRPr lang="en-US" sz="3600" dirty="0"/>
-          </a:p>
-        </p:txBody>
-      </p:sp>
-      <p:sp>
-        <p:nvSpPr>
-          <p:cNvPr id="5" name="Text 2"/>
-          <p:cNvSpPr/>
-          <p:nvPr/>
-        </p:nvSpPr>
-        <p:spPr>
-          <a:xfrm>
-            <a:off x="5349240" y="1783080"/>
-            <a:ext cx="6522415" cy="4663440"/>
-          </a:xfrm>
-          <a:prstGeom prst="rect">
-            <a:avLst/>
-          </a:prstGeom>
-          <a:noFill/>
-          <a:ln/>
-        </p:spPr>
-        <p:txBody>
-          <a:bodyPr wrap="square" lIns="0" tIns="0" rIns="0" bIns="0" rtlCol="0" anchor="t"/>
-          <a:lstStyle/>
-          <a:p>
-            <a:pPr algn="l" indent="0" marL="0">
-              <a:spcAft>
-                <a:spcPts val="800"/>
-              </a:spcAft>
-              <a:buNone/>
-            </a:pPr>
-            <a:r>
-              <a:rPr lang="en-US" sz="4000" b="1" dirty="0">
-                <a:solidFill>
-                  <a:srgbClr val="111111"/>
-                </a:solidFill>
-                <a:latin typeface="Times New Roman" pitchFamily="34" charset="0"/>
-                <a:ea typeface="Times New Roman" pitchFamily="34" charset="-122"/>
-                <a:cs typeface="Times New Roman" pitchFamily="34" charset="-120"/>
-              </a:rPr>
-              <a:t>Siting: </a:t>
-            </a:r>
-            <a:pPr algn="l" indent="0" marL="0">
-              <a:spcAft>
-                <a:spcPts val="800"/>
-              </a:spcAft>
-              <a:buNone/>
-            </a:pPr>
-            <a:r>
-              <a:rPr lang="en-US" sz="4000" dirty="0">
-                <a:solidFill>
-                  <a:srgbClr val="111111"/>
-                </a:solidFill>
-                <a:latin typeface="Times New Roman" pitchFamily="34" charset="0"/>
-                <a:ea typeface="Times New Roman" pitchFamily="34" charset="-122"/>
-                <a:cs typeface="Times New Roman" pitchFamily="34" charset="-120"/>
-              </a:rPr>
-              <a:t>It stands on grass in an open place, about 1.2 m above the ground.</a:t>
-            </a:r>
-            <a:endParaRPr lang="en-US" sz="4000" dirty="0"/>
+              <a:t>Illustration: Six's thermometer</a:t>
+            </a:r>
+            <a:endParaRPr lang="en-US" sz="1600" dirty="0"/>
           </a:p>
         </p:txBody>
       </p:sp>
@@ -13219,7 +13686,7 @@
                 <a:ea typeface="Calibri" pitchFamily="34" charset="-122"/>
                 <a:cs typeface="Calibri" pitchFamily="34" charset="-120"/>
               </a:rPr>
-              <a:t>FORMATIVE EVALUATION</a:t>
+              <a:t>BOARD SUMMARY</a:t>
             </a:r>
             <a:endParaRPr lang="en-US" sz="1400" dirty="0"/>
           </a:p>
@@ -13284,7 +13751,7 @@
                 <a:ea typeface="Times New Roman" pitchFamily="34" charset="-122"/>
                 <a:cs typeface="Times New Roman" pitchFamily="34" charset="-120"/>
               </a:rPr>
-              <a:t>Evaluation 1</a:t>
+              <a:t>1. Measurement of Temperature</a:t>
             </a:r>
             <a:endParaRPr lang="en-US" sz="3600" dirty="0"/>
           </a:p>
@@ -13318,7 +13785,7 @@
               <a:buNone/>
             </a:pPr>
             <a:r>
-              <a:rPr lang="en-US" sz="4000" dirty="0">
+              <a:rPr lang="en-US" sz="4000" b="1" dirty="0">
                 <a:solidFill>
                   <a:srgbClr val="111111"/>
                 </a:solidFill>
@@ -13326,7 +13793,24 @@
                 <a:ea typeface="Times New Roman" pitchFamily="34" charset="-122"/>
                 <a:cs typeface="Times New Roman" pitchFamily="34" charset="-120"/>
               </a:rPr>
-              <a:t>Maximum 34 °C, minimum 20 °C. What is the mean?</a:t>
+              <a:t>Time of reading: </a:t>
+            </a:r>
+            <a:pPr algn="l" indent="0" marL="0">
+              <a:spcAft>
+                <a:spcPts val="800"/>
+              </a:spcAft>
+              <a:buNone/>
+            </a:pPr>
+            <a:r>
+              <a:rPr lang="en-US" sz="4000" dirty="0">
+                <a:solidFill>
+                  <a:srgbClr val="111111"/>
+                </a:solidFill>
+                <a:latin typeface="Times New Roman" pitchFamily="34" charset="0"/>
+                <a:ea typeface="Times New Roman" pitchFamily="34" charset="-122"/>
+                <a:cs typeface="Times New Roman" pitchFamily="34" charset="-120"/>
+              </a:rPr>
+              <a:t>Readings are taken every day at the same time, and the indexes are then reset.</a:t>
             </a:r>
             <a:endParaRPr lang="en-US" sz="4000" dirty="0"/>
           </a:p>
@@ -13438,15 +13922,135 @@
                 <a:ea typeface="Calibri" pitchFamily="34" charset="-122"/>
                 <a:cs typeface="Calibri" pitchFamily="34" charset="-120"/>
               </a:rPr>
-              <a:t>FORMATIVE EVALUATION</a:t>
+              <a:t>BOARD SUMMARY</a:t>
             </a:r>
             <a:endParaRPr lang="en-US" sz="1400" dirty="0"/>
+          </a:p>
+        </p:txBody>
+      </p:sp>
+      <p:sp>
+        <p:nvSpPr>
+          <p:cNvPr id="3" name="Text 1"/>
+          <p:cNvSpPr/>
+          <p:nvPr/>
+        </p:nvSpPr>
+        <p:spPr>
+          <a:xfrm>
+            <a:off x="365760" y="1005840"/>
+            <a:ext cx="11460175" cy="731520"/>
+          </a:xfrm>
+          <a:prstGeom prst="rect">
+            <a:avLst/>
+          </a:prstGeom>
+          <a:noFill/>
+          <a:ln/>
+        </p:spPr>
+        <p:txBody>
+          <a:bodyPr wrap="square" lIns="0" tIns="0" rIns="0" bIns="0" rtlCol="0" anchor="ctr">
+            <a:normAutofit/>
+          </a:bodyPr>
+          <a:lstStyle/>
+          <a:p>
+            <a:pPr algn="ctr" indent="0" marL="0">
+              <a:buNone/>
+            </a:pPr>
+            <a:r>
+              <a:rPr lang="en-US" sz="3600" b="1" dirty="0">
+                <a:solidFill>
+                  <a:srgbClr val="990011"/>
+                </a:solidFill>
+                <a:latin typeface="Times New Roman" pitchFamily="34" charset="0"/>
+                <a:ea typeface="Times New Roman" pitchFamily="34" charset="-122"/>
+                <a:cs typeface="Times New Roman" pitchFamily="34" charset="-120"/>
+              </a:rPr>
+              <a:t>2. Presentation of Temperature</a:t>
+            </a:r>
+            <a:endParaRPr lang="en-US" sz="3600" dirty="0"/>
+          </a:p>
+        </p:txBody>
+      </p:sp>
+      <p:sp>
+        <p:nvSpPr>
+          <p:cNvPr id="4" name="Text 2"/>
+          <p:cNvSpPr/>
+          <p:nvPr/>
+        </p:nvSpPr>
+        <p:spPr>
+          <a:xfrm>
+            <a:off x="365760" y="1783080"/>
+            <a:ext cx="4846320" cy="4617720"/>
+          </a:xfrm>
+          <a:prstGeom prst="rect">
+            <a:avLst/>
+          </a:prstGeom>
+          <a:noFill/>
+          <a:ln/>
+        </p:spPr>
+        <p:txBody>
+          <a:bodyPr wrap="square" lIns="0" tIns="0" rIns="0" bIns="0" rtlCol="0" anchor="t"/>
+          <a:lstStyle/>
+          <a:p>
+            <a:pPr algn="l" indent="0" marL="0">
+              <a:spcAft>
+                <a:spcPts val="800"/>
+              </a:spcAft>
+              <a:buNone/>
+            </a:pPr>
+            <a:r>
+              <a:rPr lang="en-US" sz="3600" i="1" dirty="0">
+                <a:solidFill>
+                  <a:srgbClr val="111111"/>
+                </a:solidFill>
+                <a:latin typeface="Times New Roman" pitchFamily="34" charset="0"/>
+                <a:ea typeface="Times New Roman" pitchFamily="34" charset="-122"/>
+                <a:cs typeface="Times New Roman" pitchFamily="34" charset="-120"/>
+              </a:rPr>
+              <a:t>Temperature data are presented as follows:</a:t>
+            </a:r>
+            <a:endParaRPr lang="en-US" sz="3600" dirty="0"/>
+          </a:p>
+          <a:p>
+            <a:pPr algn="l" indent="0" marL="0">
+              <a:spcAft>
+                <a:spcPts val="800"/>
+              </a:spcAft>
+              <a:buNone/>
+            </a:pPr>
+            <a:r>
+              <a:rPr lang="en-US" sz="3600" b="1" dirty="0">
+                <a:solidFill>
+                  <a:srgbClr val="111111"/>
+                </a:solidFill>
+                <a:latin typeface="Times New Roman" pitchFamily="34" charset="0"/>
+                <a:ea typeface="Times New Roman" pitchFamily="34" charset="-122"/>
+                <a:cs typeface="Times New Roman" pitchFamily="34" charset="-120"/>
+              </a:rPr>
+              <a:t>Mean daily temperature: </a:t>
+            </a:r>
+            <a:pPr algn="l" indent="0" marL="0">
+              <a:spcAft>
+                <a:spcPts val="800"/>
+              </a:spcAft>
+              <a:buNone/>
+            </a:pPr>
+            <a:r>
+              <a:rPr lang="en-US" sz="3600" dirty="0">
+                <a:solidFill>
+                  <a:srgbClr val="111111"/>
+                </a:solidFill>
+                <a:latin typeface="Times New Roman" pitchFamily="34" charset="0"/>
+                <a:ea typeface="Times New Roman" pitchFamily="34" charset="-122"/>
+                <a:cs typeface="Times New Roman" pitchFamily="34" charset="-120"/>
+              </a:rPr>
+              <a:t>(maximum + minimum) ÷ 2, for example (38 + 24) ÷ 2 = 31 °C.</a:t>
+            </a:r>
+            <a:endParaRPr lang="en-US" sz="3600" dirty="0"/>
           </a:p>
         </p:txBody>
       </p:sp>
       <p:pic>
         <p:nvPicPr>
-          <p:cNvPr id="3" name="Image 0" descr="/home/claude/f4/img/minesec_sheet.png">    </p:cNvPr>
+          <p:cNvPr id="5" name="Image 0" descr="/home/claude/f4/img/v2/temp_mean_big.png">    </p:cNvPr>
           <p:cNvPicPr>
             <a:picLocks noChangeAspect="1"/>
           </p:cNvPicPr>
@@ -13460,8 +14064,8 @@
         </p:blipFill>
         <p:spPr>
           <a:xfrm>
-            <a:off x="0" y="658368"/>
-            <a:ext cx="5120640" cy="5833872"/>
+            <a:off x="5349240" y="2617506"/>
+            <a:ext cx="6659575" cy="2601397"/>
           </a:xfrm>
           <a:prstGeom prst="rect">
             <a:avLst/>
@@ -13470,14 +14074,14 @@
       </p:pic>
       <p:sp>
         <p:nvSpPr>
-          <p:cNvPr id="4" name="Text 1"/>
+          <p:cNvPr id="6" name="Text 3"/>
           <p:cNvSpPr/>
           <p:nvPr/>
         </p:nvSpPr>
         <p:spPr>
           <a:xfrm>
-            <a:off x="5349240" y="1005840"/>
-            <a:ext cx="6522415" cy="731520"/>
+            <a:off x="5349240" y="6089904"/>
+            <a:ext cx="6659575" cy="347472"/>
           </a:xfrm>
           <a:prstGeom prst="rect">
             <a:avLst/>
@@ -13486,68 +14090,24 @@
           <a:ln/>
         </p:spPr>
         <p:txBody>
-          <a:bodyPr wrap="square" lIns="0" tIns="0" rIns="0" bIns="0" rtlCol="0" anchor="ctr">
-            <a:normAutofit/>
-          </a:bodyPr>
+          <a:bodyPr wrap="square" lIns="0" tIns="0" rIns="0" bIns="0" rtlCol="0" anchor="ctr"/>
           <a:lstStyle/>
           <a:p>
             <a:pPr algn="ctr" indent="0" marL="0">
               <a:buNone/>
             </a:pPr>
             <a:r>
-              <a:rPr lang="en-US" sz="3600" b="1" dirty="0">
-                <a:solidFill>
-                  <a:srgbClr val="990011"/>
+              <a:rPr lang="en-US" sz="1600" i="1" dirty="0">
+                <a:solidFill>
+                  <a:srgbClr val="555555"/>
                 </a:solidFill>
                 <a:latin typeface="Times New Roman" pitchFamily="34" charset="0"/>
                 <a:ea typeface="Times New Roman" pitchFamily="34" charset="-122"/>
                 <a:cs typeface="Times New Roman" pitchFamily="34" charset="-120"/>
               </a:rPr>
-              <a:t>Expected Answer</a:t>
-            </a:r>
-            <a:endParaRPr lang="en-US" sz="3600" dirty="0"/>
-          </a:p>
-        </p:txBody>
-      </p:sp>
-      <p:sp>
-        <p:nvSpPr>
-          <p:cNvPr id="5" name="Text 2"/>
-          <p:cNvSpPr/>
-          <p:nvPr/>
-        </p:nvSpPr>
-        <p:spPr>
-          <a:xfrm>
-            <a:off x="5349240" y="1783080"/>
-            <a:ext cx="6522415" cy="4663440"/>
-          </a:xfrm>
-          <a:prstGeom prst="rect">
-            <a:avLst/>
-          </a:prstGeom>
-          <a:noFill/>
-          <a:ln/>
-        </p:spPr>
-        <p:txBody>
-          <a:bodyPr wrap="square" lIns="0" tIns="0" rIns="0" bIns="0" rtlCol="0" anchor="t"/>
-          <a:lstStyle/>
-          <a:p>
-            <a:pPr algn="l" indent="0" marL="0">
-              <a:spcAft>
-                <a:spcPts val="800"/>
-              </a:spcAft>
-              <a:buNone/>
-            </a:pPr>
-            <a:r>
-              <a:rPr lang="en-US" sz="4000" dirty="0">
-                <a:solidFill>
-                  <a:srgbClr val="111111"/>
-                </a:solidFill>
-                <a:latin typeface="Times New Roman" pitchFamily="34" charset="0"/>
-                <a:ea typeface="Times New Roman" pitchFamily="34" charset="-122"/>
-                <a:cs typeface="Times New Roman" pitchFamily="34" charset="-120"/>
-              </a:rPr>
-              <a:t>27 °C.</a:t>
-            </a:r>
-            <a:endParaRPr lang="en-US" sz="4000" dirty="0"/>
+              <a:t>Illustration: mean and range</a:t>
+            </a:r>
+            <a:endParaRPr lang="en-US" sz="1600" dirty="0"/>
           </a:p>
         </p:txBody>
       </p:sp>
@@ -13657,7 +14217,7 @@
                 <a:ea typeface="Calibri" pitchFamily="34" charset="-122"/>
                 <a:cs typeface="Calibri" pitchFamily="34" charset="-120"/>
               </a:rPr>
-              <a:t>FORMATIVE EVALUATION</a:t>
+              <a:t>BOARD SUMMARY</a:t>
             </a:r>
             <a:endParaRPr lang="en-US" sz="1400" dirty="0"/>
           </a:p>
@@ -13680,7 +14240,7 @@
         <p:spPr>
           <a:xfrm>
             <a:off x="0" y="658368"/>
-            <a:ext cx="5120640" cy="5833872"/>
+            <a:ext cx="1463040" cy="5833872"/>
           </a:xfrm>
           <a:prstGeom prst="rect">
             <a:avLst/>
@@ -13695,8 +14255,8 @@
         </p:nvSpPr>
         <p:spPr>
           <a:xfrm>
-            <a:off x="5349240" y="1005840"/>
-            <a:ext cx="6522415" cy="731520"/>
+            <a:off x="1691640" y="1005840"/>
+            <a:ext cx="10180015" cy="731520"/>
           </a:xfrm>
           <a:prstGeom prst="rect">
             <a:avLst/>
@@ -13722,7 +14282,7 @@
                 <a:ea typeface="Times New Roman" pitchFamily="34" charset="-122"/>
                 <a:cs typeface="Times New Roman" pitchFamily="34" charset="-120"/>
               </a:rPr>
-              <a:t>Evaluation 2</a:t>
+              <a:t>2. Presentation of Temperature</a:t>
             </a:r>
             <a:endParaRPr lang="en-US" sz="3600" dirty="0"/>
           </a:p>
@@ -13736,8 +14296,8 @@
         </p:nvSpPr>
         <p:spPr>
           <a:xfrm>
-            <a:off x="5349240" y="1783080"/>
-            <a:ext cx="6522415" cy="4663440"/>
+            <a:off x="1691640" y="1783080"/>
+            <a:ext cx="10180015" cy="4663440"/>
           </a:xfrm>
           <a:prstGeom prst="rect">
             <a:avLst/>
@@ -13756,7 +14316,7 @@
               <a:buNone/>
             </a:pPr>
             <a:r>
-              <a:rPr lang="en-US" sz="4000" dirty="0">
+              <a:rPr lang="en-US" sz="4000" b="1" dirty="0">
                 <a:solidFill>
                   <a:srgbClr val="111111"/>
                 </a:solidFill>
@@ -13764,7 +14324,98 @@
                 <a:ea typeface="Times New Roman" pitchFamily="34" charset="-122"/>
                 <a:cs typeface="Times New Roman" pitchFamily="34" charset="-120"/>
               </a:rPr>
-              <a:t>Why is the Stevenson screen painted white?</a:t>
+              <a:t>Daily range: </a:t>
+            </a:r>
+            <a:pPr algn="l" indent="0" marL="0">
+              <a:spcAft>
+                <a:spcPts val="800"/>
+              </a:spcAft>
+              <a:buNone/>
+            </a:pPr>
+            <a:r>
+              <a:rPr lang="en-US" sz="4000" dirty="0">
+                <a:solidFill>
+                  <a:srgbClr val="111111"/>
+                </a:solidFill>
+                <a:latin typeface="Times New Roman" pitchFamily="34" charset="0"/>
+                <a:ea typeface="Times New Roman" pitchFamily="34" charset="-122"/>
+                <a:cs typeface="Times New Roman" pitchFamily="34" charset="-120"/>
+              </a:rPr>
+              <a:t>maximum − minimum, for example 38 − 24 = 14 °C.</a:t>
+            </a:r>
+            <a:endParaRPr lang="en-US" sz="4000" dirty="0"/>
+          </a:p>
+          <a:p>
+            <a:pPr algn="l" indent="0" marL="0">
+              <a:spcAft>
+                <a:spcPts val="800"/>
+              </a:spcAft>
+              <a:buNone/>
+            </a:pPr>
+            <a:r>
+              <a:rPr lang="en-US" sz="4000" b="1" dirty="0">
+                <a:solidFill>
+                  <a:srgbClr val="111111"/>
+                </a:solidFill>
+                <a:latin typeface="Times New Roman" pitchFamily="34" charset="0"/>
+                <a:ea typeface="Times New Roman" pitchFamily="34" charset="-122"/>
+                <a:cs typeface="Times New Roman" pitchFamily="34" charset="-120"/>
+              </a:rPr>
+              <a:t>Mean monthly and annual temperature: </a:t>
+            </a:r>
+            <a:pPr algn="l" indent="0" marL="0">
+              <a:spcAft>
+                <a:spcPts val="800"/>
+              </a:spcAft>
+              <a:buNone/>
+            </a:pPr>
+            <a:r>
+              <a:rPr lang="en-US" sz="4000" dirty="0">
+                <a:solidFill>
+                  <a:srgbClr val="111111"/>
+                </a:solidFill>
+                <a:latin typeface="Times New Roman" pitchFamily="34" charset="0"/>
+                <a:ea typeface="Times New Roman" pitchFamily="34" charset="-122"/>
+                <a:cs typeface="Times New Roman" pitchFamily="34" charset="-120"/>
+              </a:rPr>
+              <a:t>They are the averages of the daily means over a month or a year.</a:t>
+            </a:r>
+            <a:endParaRPr lang="en-US" sz="4000" dirty="0"/>
+          </a:p>
+          <a:p>
+            <a:pPr algn="l" indent="0" marL="0">
+              <a:spcAft>
+                <a:spcPts val="800"/>
+              </a:spcAft>
+              <a:buNone/>
+            </a:pPr>
+            <a:r>
+              <a:rPr lang="en-US" sz="4000" b="1" dirty="0">
+                <a:solidFill>
+                  <a:srgbClr val="111111"/>
+                </a:solidFill>
+                <a:latin typeface="Times New Roman" pitchFamily="34" charset="0"/>
+                <a:ea typeface="Times New Roman" pitchFamily="34" charset="-122"/>
+                <a:cs typeface="Times New Roman" pitchFamily="34" charset="-120"/>
+              </a:rPr>
+              <a:t>Graphs and maps: </a:t>
+            </a:r>
+            <a:pPr algn="l" indent="0" marL="0">
+              <a:spcAft>
+                <a:spcPts val="800"/>
+              </a:spcAft>
+              <a:buNone/>
+            </a:pPr>
+            <a:r>
+              <a:rPr lang="en-US" sz="4000" dirty="0">
+                <a:solidFill>
+                  <a:srgbClr val="111111"/>
+                </a:solidFill>
+                <a:latin typeface="Times New Roman" pitchFamily="34" charset="0"/>
+                <a:ea typeface="Times New Roman" pitchFamily="34" charset="-122"/>
+                <a:cs typeface="Times New Roman" pitchFamily="34" charset="-120"/>
+              </a:rPr>
+              <a:t>Temperatures are shown on line graphs and on maps with isotherms.</a:t>
             </a:r>
             <a:endParaRPr lang="en-US" sz="4000" dirty="0"/>
           </a:p>
@@ -13876,15 +14527,135 @@
                 <a:ea typeface="Calibri" pitchFamily="34" charset="-122"/>
                 <a:cs typeface="Calibri" pitchFamily="34" charset="-120"/>
               </a:rPr>
-              <a:t>FORMATIVE EVALUATION</a:t>
+              <a:t>BOARD SUMMARY</a:t>
             </a:r>
             <a:endParaRPr lang="en-US" sz="1400" dirty="0"/>
+          </a:p>
+        </p:txBody>
+      </p:sp>
+      <p:sp>
+        <p:nvSpPr>
+          <p:cNvPr id="3" name="Text 1"/>
+          <p:cNvSpPr/>
+          <p:nvPr/>
+        </p:nvSpPr>
+        <p:spPr>
+          <a:xfrm>
+            <a:off x="365760" y="1005840"/>
+            <a:ext cx="11460175" cy="731520"/>
+          </a:xfrm>
+          <a:prstGeom prst="rect">
+            <a:avLst/>
+          </a:prstGeom>
+          <a:noFill/>
+          <a:ln/>
+        </p:spPr>
+        <p:txBody>
+          <a:bodyPr wrap="square" lIns="0" tIns="0" rIns="0" bIns="0" rtlCol="0" anchor="ctr">
+            <a:normAutofit/>
+          </a:bodyPr>
+          <a:lstStyle/>
+          <a:p>
+            <a:pPr algn="ctr" indent="0" marL="0">
+              <a:buNone/>
+            </a:pPr>
+            <a:r>
+              <a:rPr lang="en-US" sz="3600" b="1" dirty="0">
+                <a:solidFill>
+                  <a:srgbClr val="990011"/>
+                </a:solidFill>
+                <a:latin typeface="Times New Roman" pitchFamily="34" charset="0"/>
+                <a:ea typeface="Times New Roman" pitchFamily="34" charset="-122"/>
+                <a:cs typeface="Times New Roman" pitchFamily="34" charset="-120"/>
+              </a:rPr>
+              <a:t>3. Siting of the Stevenson Screen</a:t>
+            </a:r>
+            <a:endParaRPr lang="en-US" sz="3600" dirty="0"/>
+          </a:p>
+        </p:txBody>
+      </p:sp>
+      <p:sp>
+        <p:nvSpPr>
+          <p:cNvPr id="4" name="Text 2"/>
+          <p:cNvSpPr/>
+          <p:nvPr/>
+        </p:nvSpPr>
+        <p:spPr>
+          <a:xfrm>
+            <a:off x="365760" y="1783080"/>
+            <a:ext cx="4846320" cy="4617720"/>
+          </a:xfrm>
+          <a:prstGeom prst="rect">
+            <a:avLst/>
+          </a:prstGeom>
+          <a:noFill/>
+          <a:ln/>
+        </p:spPr>
+        <p:txBody>
+          <a:bodyPr wrap="square" lIns="0" tIns="0" rIns="0" bIns="0" rtlCol="0" anchor="t"/>
+          <a:lstStyle/>
+          <a:p>
+            <a:pPr algn="l" indent="0" marL="0">
+              <a:spcAft>
+                <a:spcPts val="800"/>
+              </a:spcAft>
+              <a:buNone/>
+            </a:pPr>
+            <a:r>
+              <a:rPr lang="en-US" sz="3600" i="1" dirty="0">
+                <a:solidFill>
+                  <a:srgbClr val="111111"/>
+                </a:solidFill>
+                <a:latin typeface="Times New Roman" pitchFamily="34" charset="0"/>
+                <a:ea typeface="Times New Roman" pitchFamily="34" charset="-122"/>
+                <a:cs typeface="Times New Roman" pitchFamily="34" charset="-120"/>
+              </a:rPr>
+              <a:t>The Stevenson screen is built and placed as follows:</a:t>
+            </a:r>
+            <a:endParaRPr lang="en-US" sz="3600" dirty="0"/>
+          </a:p>
+          <a:p>
+            <a:pPr algn="l" indent="0" marL="0">
+              <a:spcAft>
+                <a:spcPts val="800"/>
+              </a:spcAft>
+              <a:buNone/>
+            </a:pPr>
+            <a:r>
+              <a:rPr lang="en-US" sz="3600" b="1" dirty="0">
+                <a:solidFill>
+                  <a:srgbClr val="111111"/>
+                </a:solidFill>
+                <a:latin typeface="Times New Roman" pitchFamily="34" charset="0"/>
+                <a:ea typeface="Times New Roman" pitchFamily="34" charset="-122"/>
+                <a:cs typeface="Times New Roman" pitchFamily="34" charset="-120"/>
+              </a:rPr>
+              <a:t>White colour: </a:t>
+            </a:r>
+            <a:pPr algn="l" indent="0" marL="0">
+              <a:spcAft>
+                <a:spcPts val="800"/>
+              </a:spcAft>
+              <a:buNone/>
+            </a:pPr>
+            <a:r>
+              <a:rPr lang="en-US" sz="3600" dirty="0">
+                <a:solidFill>
+                  <a:srgbClr val="111111"/>
+                </a:solidFill>
+                <a:latin typeface="Times New Roman" pitchFamily="34" charset="0"/>
+                <a:ea typeface="Times New Roman" pitchFamily="34" charset="-122"/>
+                <a:cs typeface="Times New Roman" pitchFamily="34" charset="-120"/>
+              </a:rPr>
+              <a:t>It is painted white to reflect the rays of the Sun.</a:t>
+            </a:r>
+            <a:endParaRPr lang="en-US" sz="3600" dirty="0"/>
           </a:p>
         </p:txBody>
       </p:sp>
       <p:pic>
         <p:nvPicPr>
-          <p:cNvPr id="3" name="Image 0" descr="/home/claude/f4/img/minesec_sheet.png">    </p:cNvPr>
+          <p:cNvPr id="5" name="Image 0" descr="/home/claude/f4/img/stevenson_screen.png">    </p:cNvPr>
           <p:cNvPicPr>
             <a:picLocks noChangeAspect="1"/>
           </p:cNvPicPr>
@@ -13898,8 +14669,8 @@
         </p:blipFill>
         <p:spPr>
           <a:xfrm>
-            <a:off x="0" y="658368"/>
-            <a:ext cx="5120640" cy="5833872"/>
+            <a:off x="5349240" y="1983235"/>
+            <a:ext cx="6659575" cy="3869938"/>
           </a:xfrm>
           <a:prstGeom prst="rect">
             <a:avLst/>
@@ -13908,14 +14679,14 @@
       </p:pic>
       <p:sp>
         <p:nvSpPr>
-          <p:cNvPr id="4" name="Text 1"/>
+          <p:cNvPr id="6" name="Text 3"/>
           <p:cNvSpPr/>
           <p:nvPr/>
         </p:nvSpPr>
         <p:spPr>
           <a:xfrm>
-            <a:off x="5349240" y="1005840"/>
-            <a:ext cx="6522415" cy="731520"/>
+            <a:off x="5349240" y="6089904"/>
+            <a:ext cx="6659575" cy="347472"/>
           </a:xfrm>
           <a:prstGeom prst="rect">
             <a:avLst/>
@@ -13924,68 +14695,24 @@
           <a:ln/>
         </p:spPr>
         <p:txBody>
-          <a:bodyPr wrap="square" lIns="0" tIns="0" rIns="0" bIns="0" rtlCol="0" anchor="ctr">
-            <a:normAutofit/>
-          </a:bodyPr>
+          <a:bodyPr wrap="square" lIns="0" tIns="0" rIns="0" bIns="0" rtlCol="0" anchor="ctr"/>
           <a:lstStyle/>
           <a:p>
             <a:pPr algn="ctr" indent="0" marL="0">
               <a:buNone/>
             </a:pPr>
             <a:r>
-              <a:rPr lang="en-US" sz="3600" b="1" dirty="0">
-                <a:solidFill>
-                  <a:srgbClr val="990011"/>
+              <a:rPr lang="en-US" sz="1600" i="1" dirty="0">
+                <a:solidFill>
+                  <a:srgbClr val="555555"/>
                 </a:solidFill>
                 <a:latin typeface="Times New Roman" pitchFamily="34" charset="0"/>
                 <a:ea typeface="Times New Roman" pitchFamily="34" charset="-122"/>
                 <a:cs typeface="Times New Roman" pitchFamily="34" charset="-120"/>
               </a:rPr>
-              <a:t>Expected Answer</a:t>
-            </a:r>
-            <a:endParaRPr lang="en-US" sz="3600" dirty="0"/>
-          </a:p>
-        </p:txBody>
-      </p:sp>
-      <p:sp>
-        <p:nvSpPr>
-          <p:cNvPr id="5" name="Text 2"/>
-          <p:cNvSpPr/>
-          <p:nvPr/>
-        </p:nvSpPr>
-        <p:spPr>
-          <a:xfrm>
-            <a:off x="5349240" y="1783080"/>
-            <a:ext cx="6522415" cy="4663440"/>
-          </a:xfrm>
-          <a:prstGeom prst="rect">
-            <a:avLst/>
-          </a:prstGeom>
-          <a:noFill/>
-          <a:ln/>
-        </p:spPr>
-        <p:txBody>
-          <a:bodyPr wrap="square" lIns="0" tIns="0" rIns="0" bIns="0" rtlCol="0" anchor="t"/>
-          <a:lstStyle/>
-          <a:p>
-            <a:pPr algn="l" indent="0" marL="0">
-              <a:spcAft>
-                <a:spcPts val="800"/>
-              </a:spcAft>
-              <a:buNone/>
-            </a:pPr>
-            <a:r>
-              <a:rPr lang="en-US" sz="4000" dirty="0">
-                <a:solidFill>
-                  <a:srgbClr val="111111"/>
-                </a:solidFill>
-                <a:latin typeface="Times New Roman" pitchFamily="34" charset="0"/>
-                <a:ea typeface="Times New Roman" pitchFamily="34" charset="-122"/>
-                <a:cs typeface="Times New Roman" pitchFamily="34" charset="-120"/>
-              </a:rPr>
-              <a:t>To reflect the sunlight.</a:t>
-            </a:r>
-            <a:endParaRPr lang="en-US" sz="4000" dirty="0"/>
+              <a:t>Illustration: the Stevenson screen and its siting</a:t>
+            </a:r>
+            <a:endParaRPr lang="en-US" sz="1600" dirty="0"/>
           </a:p>
         </p:txBody>
       </p:sp>
@@ -14095,7 +14822,7 @@
                 <a:ea typeface="Calibri" pitchFamily="34" charset="-122"/>
                 <a:cs typeface="Calibri" pitchFamily="34" charset="-120"/>
               </a:rPr>
-              <a:t>REMEDIATION</a:t>
+              <a:t>BOARD SUMMARY</a:t>
             </a:r>
             <a:endParaRPr lang="en-US" sz="1400" dirty="0"/>
           </a:p>
@@ -14118,7 +14845,7 @@
         <p:spPr>
           <a:xfrm>
             <a:off x="0" y="658368"/>
-            <a:ext cx="1463040" cy="5833872"/>
+            <a:ext cx="5120640" cy="5833872"/>
           </a:xfrm>
           <a:prstGeom prst="rect">
             <a:avLst/>
@@ -14133,8 +14860,8 @@
         </p:nvSpPr>
         <p:spPr>
           <a:xfrm>
-            <a:off x="1691640" y="1005840"/>
-            <a:ext cx="10180015" cy="731520"/>
+            <a:off x="5349240" y="1005840"/>
+            <a:ext cx="6522415" cy="731520"/>
           </a:xfrm>
           <a:prstGeom prst="rect">
             <a:avLst/>
@@ -14160,7 +14887,7 @@
                 <a:ea typeface="Times New Roman" pitchFamily="34" charset="-122"/>
                 <a:cs typeface="Times New Roman" pitchFamily="34" charset="-120"/>
               </a:rPr>
-              <a:t>Remediation</a:t>
+              <a:t>3. Siting of the Stevenson Screen</a:t>
             </a:r>
             <a:endParaRPr lang="en-US" sz="3600" dirty="0"/>
           </a:p>
@@ -14174,8 +14901,8 @@
         </p:nvSpPr>
         <p:spPr>
           <a:xfrm>
-            <a:off x="1691640" y="1783080"/>
-            <a:ext cx="10180015" cy="4663440"/>
+            <a:off x="5349240" y="1783080"/>
+            <a:ext cx="6522415" cy="4663440"/>
           </a:xfrm>
           <a:prstGeom prst="rect">
             <a:avLst/>
@@ -14202,18 +14929,13 @@
                 <a:ea typeface="Times New Roman" pitchFamily="34" charset="-122"/>
                 <a:cs typeface="Times New Roman" pitchFamily="34" charset="-120"/>
               </a:rPr>
-              <a:t>Fill in the blanks:</a:t>
-            </a:r>
-            <a:endParaRPr lang="en-US" sz="4000" dirty="0"/>
-          </a:p>
-          <a:p>
-            <a:pPr algn="l" marL="342900" indent="-342900">
+              <a:t>Louvred sides: </a:t>
+            </a:r>
+            <a:pPr algn="l" indent="0" marL="0">
               <a:spcAft>
                 <a:spcPts val="800"/>
               </a:spcAft>
-              <a:buSzPct val="100000"/>
-              <a:buFont typeface="+mj-lt"/>
-              <a:buAutoNum type="arabicPeriod" startAt="1"/>
+              <a:buNone/>
             </a:pPr>
             <a:r>
               <a:rPr lang="en-US" sz="4000" dirty="0">
@@ -14224,21 +14946,19 @@
                 <a:ea typeface="Times New Roman" pitchFamily="34" charset="-122"/>
                 <a:cs typeface="Times New Roman" pitchFamily="34" charset="-120"/>
               </a:rPr>
-              <a:t>The highest and lowest temperatures are recorded by the ______ thermometer.</a:t>
+              <a:t>Its slatted sides let air flow in freely but keep out sun and rain.</a:t>
             </a:r>
             <a:endParaRPr lang="en-US" sz="4000" dirty="0"/>
           </a:p>
           <a:p>
-            <a:pPr algn="l" marL="342900" indent="-342900">
+            <a:pPr algn="l" indent="0" marL="0">
               <a:spcAft>
                 <a:spcPts val="800"/>
               </a:spcAft>
-              <a:buSzPct val="100000"/>
-              <a:buFont typeface="+mj-lt"/>
-              <a:buAutoNum type="arabicPeriod" startAt="1"/>
+              <a:buNone/>
             </a:pPr>
             <a:r>
-              <a:rPr lang="en-US" sz="4000" dirty="0">
+              <a:rPr lang="en-US" sz="4000" b="1" dirty="0">
                 <a:solidFill>
                   <a:srgbClr val="111111"/>
                 </a:solidFill>
@@ -14246,18 +14966,13 @@
                 <a:ea typeface="Times New Roman" pitchFamily="34" charset="-122"/>
                 <a:cs typeface="Times New Roman" pitchFamily="34" charset="-120"/>
               </a:rPr>
-              <a:t>Mean = (maximum + minimum) ÷ ______.</a:t>
-            </a:r>
-            <a:endParaRPr lang="en-US" sz="4000" dirty="0"/>
-          </a:p>
-          <a:p>
-            <a:pPr algn="l" marL="342900" indent="-342900">
+              <a:t>Height: </a:t>
+            </a:r>
+            <a:pPr algn="l" indent="0" marL="0">
               <a:spcAft>
                 <a:spcPts val="800"/>
               </a:spcAft>
-              <a:buSzPct val="100000"/>
-              <a:buFont typeface="+mj-lt"/>
-              <a:buAutoNum type="arabicPeriod" startAt="1"/>
+              <a:buNone/>
             </a:pPr>
             <a:r>
               <a:rPr lang="en-US" sz="4000" dirty="0">
@@ -14268,7 +14983,7 @@
                 <a:ea typeface="Times New Roman" pitchFamily="34" charset="-122"/>
                 <a:cs typeface="Times New Roman" pitchFamily="34" charset="-120"/>
               </a:rPr>
-              <a:t>Thermometers are kept in a ______ screen.</a:t>
+              <a:t>It stands on legs so that the thermometers are about 1.2 m above the ground.</a:t>
             </a:r>
             <a:endParaRPr lang="en-US" sz="4000" dirty="0"/>
           </a:p>
@@ -14619,7 +15334,7 @@
                 <a:ea typeface="Calibri" pitchFamily="34" charset="-122"/>
                 <a:cs typeface="Calibri" pitchFamily="34" charset="-120"/>
               </a:rPr>
-              <a:t>HOMEWORK</a:t>
+              <a:t>BOARD SUMMARY</a:t>
             </a:r>
             <a:endParaRPr lang="en-US" sz="1400" dirty="0"/>
           </a:p>
@@ -14642,7 +15357,7 @@
         <p:spPr>
           <a:xfrm>
             <a:off x="0" y="658368"/>
-            <a:ext cx="5120640" cy="5833872"/>
+            <a:ext cx="2468880" cy="5833872"/>
           </a:xfrm>
           <a:prstGeom prst="rect">
             <a:avLst/>
@@ -14657,8 +15372,8 @@
         </p:nvSpPr>
         <p:spPr>
           <a:xfrm>
-            <a:off x="5349240" y="1005840"/>
-            <a:ext cx="6522415" cy="731520"/>
+            <a:off x="2697480" y="1005840"/>
+            <a:ext cx="9174175" cy="731520"/>
           </a:xfrm>
           <a:prstGeom prst="rect">
             <a:avLst/>
@@ -14684,7 +15399,7 @@
                 <a:ea typeface="Times New Roman" pitchFamily="34" charset="-122"/>
                 <a:cs typeface="Times New Roman" pitchFamily="34" charset="-120"/>
               </a:rPr>
-              <a:t>Homework</a:t>
+              <a:t>3. Siting of the Stevenson Screen (continued)</a:t>
             </a:r>
             <a:endParaRPr lang="en-US" sz="3600" dirty="0"/>
           </a:p>
@@ -14698,8 +15413,8 @@
         </p:nvSpPr>
         <p:spPr>
           <a:xfrm>
-            <a:off x="5349240" y="1783080"/>
-            <a:ext cx="6522415" cy="4663440"/>
+            <a:off x="2697480" y="1783080"/>
+            <a:ext cx="9174175" cy="4663440"/>
           </a:xfrm>
           <a:prstGeom prst="rect">
             <a:avLst/>
@@ -14718,7 +15433,7 @@
               <a:buNone/>
             </a:pPr>
             <a:r>
-              <a:rPr lang="en-US" sz="4000" dirty="0">
+              <a:rPr lang="en-US" sz="4000" b="1" dirty="0">
                 <a:solidFill>
                   <a:srgbClr val="111111"/>
                 </a:solidFill>
@@ -14726,7 +15441,61 @@
                 <a:ea typeface="Times New Roman" pitchFamily="34" charset="-122"/>
                 <a:cs typeface="Times New Roman" pitchFamily="34" charset="-120"/>
               </a:rPr>
-              <a:t>Wet a piece of cloth and hang it outside in the morning and in the afternoon. Note how long it takes to dry each time.</a:t>
+              <a:t>Open site on grass: </a:t>
+            </a:r>
+            <a:pPr algn="l" indent="0" marL="0">
+              <a:spcAft>
+                <a:spcPts val="800"/>
+              </a:spcAft>
+              <a:buNone/>
+            </a:pPr>
+            <a:r>
+              <a:rPr lang="en-US" sz="4000" dirty="0">
+                <a:solidFill>
+                  <a:srgbClr val="111111"/>
+                </a:solidFill>
+                <a:latin typeface="Times New Roman" pitchFamily="34" charset="0"/>
+                <a:ea typeface="Times New Roman" pitchFamily="34" charset="-122"/>
+                <a:cs typeface="Times New Roman" pitchFamily="34" charset="-120"/>
+              </a:rPr>
+              <a:t>It is placed on short grass, far from trees, buildings and concrete.</a:t>
+            </a:r>
+            <a:endParaRPr lang="en-US" sz="4000" dirty="0"/>
+          </a:p>
+          <a:p>
+            <a:pPr algn="l" indent="0" marL="0">
+              <a:spcAft>
+                <a:spcPts val="800"/>
+              </a:spcAft>
+              <a:buNone/>
+            </a:pPr>
+            <a:r>
+              <a:rPr lang="en-US" sz="4000" b="1" dirty="0">
+                <a:solidFill>
+                  <a:srgbClr val="111111"/>
+                </a:solidFill>
+                <a:latin typeface="Times New Roman" pitchFamily="34" charset="0"/>
+                <a:ea typeface="Times New Roman" pitchFamily="34" charset="-122"/>
+                <a:cs typeface="Times New Roman" pitchFamily="34" charset="-120"/>
+              </a:rPr>
+              <a:t>Door facing north: </a:t>
+            </a:r>
+            <a:pPr algn="l" indent="0" marL="0">
+              <a:spcAft>
+                <a:spcPts val="800"/>
+              </a:spcAft>
+              <a:buNone/>
+            </a:pPr>
+            <a:r>
+              <a:rPr lang="en-US" sz="4000" dirty="0">
+                <a:solidFill>
+                  <a:srgbClr val="111111"/>
+                </a:solidFill>
+                <a:latin typeface="Times New Roman" pitchFamily="34" charset="0"/>
+                <a:ea typeface="Times New Roman" pitchFamily="34" charset="-122"/>
+                <a:cs typeface="Times New Roman" pitchFamily="34" charset="-120"/>
+              </a:rPr>
+              <a:t>In the Northern Hemisphere, its door faces north so that the Sun does not shine on the thermometers when it is opened.</a:t>
             </a:r>
             <a:endParaRPr lang="en-US" sz="4000" dirty="0"/>
           </a:p>
@@ -14838,7 +15607,7 @@
                 <a:ea typeface="Calibri" pitchFamily="34" charset="-122"/>
                 <a:cs typeface="Calibri" pitchFamily="34" charset="-120"/>
               </a:rPr>
-              <a:t>NEXT LESSON</a:t>
+              <a:t>FORMATIVE EVALUATION</a:t>
             </a:r>
             <a:endParaRPr lang="en-US" sz="1400" dirty="0"/>
           </a:p>
@@ -14903,7 +15672,7 @@
                 <a:ea typeface="Times New Roman" pitchFamily="34" charset="-122"/>
                 <a:cs typeface="Times New Roman" pitchFamily="34" charset="-120"/>
               </a:rPr>
-              <a:t>Next Lesson</a:t>
+              <a:t>Evaluation 1</a:t>
             </a:r>
             <a:endParaRPr lang="en-US" sz="3600" dirty="0"/>
           </a:p>
@@ -14927,17 +15696,17 @@
           <a:ln/>
         </p:spPr>
         <p:txBody>
-          <a:bodyPr wrap="square" lIns="0" tIns="0" rIns="0" bIns="0" rtlCol="0" anchor="ctr"/>
-          <a:lstStyle/>
-          <a:p>
-            <a:pPr algn="ctr" indent="0" marL="0">
+          <a:bodyPr wrap="square" lIns="0" tIns="0" rIns="0" bIns="0" rtlCol="0" anchor="t"/>
+          <a:lstStyle/>
+          <a:p>
+            <a:pPr algn="l" indent="0" marL="0">
               <a:spcAft>
                 <a:spcPts val="800"/>
               </a:spcAft>
               <a:buNone/>
             </a:pPr>
             <a:r>
-              <a:rPr lang="en-US" sz="4000" b="1" dirty="0">
+              <a:rPr lang="en-US" sz="4000" dirty="0">
                 <a:solidFill>
                   <a:srgbClr val="111111"/>
                 </a:solidFill>
@@ -14945,27 +15714,7 @@
                 <a:ea typeface="Times New Roman" pitchFamily="34" charset="-122"/>
                 <a:cs typeface="Times New Roman" pitchFamily="34" charset="-120"/>
               </a:rPr>
-              <a:t>Our next lesson will be on:</a:t>
-            </a:r>
-            <a:endParaRPr lang="en-US" sz="4000" dirty="0"/>
-          </a:p>
-          <a:p>
-            <a:pPr algn="ctr" indent="0" marL="0">
-              <a:spcAft>
-                <a:spcPts val="800"/>
-              </a:spcAft>
-              <a:buNone/>
-            </a:pPr>
-            <a:r>
-              <a:rPr lang="en-US" sz="4000" b="1" dirty="0">
-                <a:solidFill>
-                  <a:srgbClr val="990011"/>
-                </a:solidFill>
-                <a:latin typeface="Times New Roman" pitchFamily="34" charset="0"/>
-                <a:ea typeface="Times New Roman" pitchFamily="34" charset="-122"/>
-                <a:cs typeface="Times New Roman" pitchFamily="34" charset="-120"/>
-              </a:rPr>
-              <a:t>Lesson 33: Weather Elements: Humidity, Wind, Pressure and Sunshine</a:t>
+              <a:t>Maximum 34 °C, minimum 20 °C. What is the mean?</a:t>
             </a:r>
             <a:endParaRPr lang="en-US" sz="4000" dirty="0"/>
           </a:p>
@@ -15077,6 +15826,1406 @@
                 <a:ea typeface="Calibri" pitchFamily="34" charset="-122"/>
                 <a:cs typeface="Calibri" pitchFamily="34" charset="-120"/>
               </a:rPr>
+              <a:t>FORMATIVE EVALUATION</a:t>
+            </a:r>
+            <a:endParaRPr lang="en-US" sz="1400" dirty="0"/>
+          </a:p>
+        </p:txBody>
+      </p:sp>
+      <p:pic>
+        <p:nvPicPr>
+          <p:cNvPr id="3" name="Image 0" descr="/home/claude/f4/img/minesec_sheet.png">    </p:cNvPr>
+          <p:cNvPicPr>
+            <a:picLocks noChangeAspect="1"/>
+          </p:cNvPicPr>
+          <p:nvPr/>
+        </p:nvPicPr>
+        <p:blipFill>
+          <a:blip r:embed="rId1"/>
+          <a:stretch>
+            <a:fillRect/>
+          </a:stretch>
+        </p:blipFill>
+        <p:spPr>
+          <a:xfrm>
+            <a:off x="0" y="658368"/>
+            <a:ext cx="5120640" cy="5833872"/>
+          </a:xfrm>
+          <a:prstGeom prst="rect">
+            <a:avLst/>
+          </a:prstGeom>
+        </p:spPr>
+      </p:pic>
+      <p:sp>
+        <p:nvSpPr>
+          <p:cNvPr id="4" name="Text 1"/>
+          <p:cNvSpPr/>
+          <p:nvPr/>
+        </p:nvSpPr>
+        <p:spPr>
+          <a:xfrm>
+            <a:off x="5349240" y="1005840"/>
+            <a:ext cx="6522415" cy="731520"/>
+          </a:xfrm>
+          <a:prstGeom prst="rect">
+            <a:avLst/>
+          </a:prstGeom>
+          <a:noFill/>
+          <a:ln/>
+        </p:spPr>
+        <p:txBody>
+          <a:bodyPr wrap="square" lIns="0" tIns="0" rIns="0" bIns="0" rtlCol="0" anchor="ctr">
+            <a:normAutofit/>
+          </a:bodyPr>
+          <a:lstStyle/>
+          <a:p>
+            <a:pPr algn="ctr" indent="0" marL="0">
+              <a:buNone/>
+            </a:pPr>
+            <a:r>
+              <a:rPr lang="en-US" sz="3600" b="1" dirty="0">
+                <a:solidFill>
+                  <a:srgbClr val="990011"/>
+                </a:solidFill>
+                <a:latin typeface="Times New Roman" pitchFamily="34" charset="0"/>
+                <a:ea typeface="Times New Roman" pitchFamily="34" charset="-122"/>
+                <a:cs typeface="Times New Roman" pitchFamily="34" charset="-120"/>
+              </a:rPr>
+              <a:t>Expected Answer</a:t>
+            </a:r>
+            <a:endParaRPr lang="en-US" sz="3600" dirty="0"/>
+          </a:p>
+        </p:txBody>
+      </p:sp>
+      <p:sp>
+        <p:nvSpPr>
+          <p:cNvPr id="5" name="Text 2"/>
+          <p:cNvSpPr/>
+          <p:nvPr/>
+        </p:nvSpPr>
+        <p:spPr>
+          <a:xfrm>
+            <a:off x="5349240" y="1783080"/>
+            <a:ext cx="6522415" cy="4663440"/>
+          </a:xfrm>
+          <a:prstGeom prst="rect">
+            <a:avLst/>
+          </a:prstGeom>
+          <a:noFill/>
+          <a:ln/>
+        </p:spPr>
+        <p:txBody>
+          <a:bodyPr wrap="square" lIns="0" tIns="0" rIns="0" bIns="0" rtlCol="0" anchor="t"/>
+          <a:lstStyle/>
+          <a:p>
+            <a:pPr algn="l" indent="0" marL="0">
+              <a:spcAft>
+                <a:spcPts val="800"/>
+              </a:spcAft>
+              <a:buNone/>
+            </a:pPr>
+            <a:r>
+              <a:rPr lang="en-US" sz="4000" dirty="0">
+                <a:solidFill>
+                  <a:srgbClr val="111111"/>
+                </a:solidFill>
+                <a:latin typeface="Times New Roman" pitchFamily="34" charset="0"/>
+                <a:ea typeface="Times New Roman" pitchFamily="34" charset="-122"/>
+                <a:cs typeface="Times New Roman" pitchFamily="34" charset="-120"/>
+              </a:rPr>
+              <a:t>27 °C.</a:t>
+            </a:r>
+            <a:endParaRPr lang="en-US" sz="4000" dirty="0"/>
+          </a:p>
+        </p:txBody>
+      </p:sp>
+      <p:sp>
+        <p:nvSpPr>
+          <p:cNvPr id="25" name="Slide Number Placeholder 0"/>
+          <p:cNvSpPr>
+            <a:spLocks noGrp="1"/>
+          </p:cNvSpPr>
+          <p:nvPr>
+            <p:ph type="sldNum" sz="quarter" idx="4294967295"/>
+          </p:nvPr>
+        </p:nvSpPr>
+        <p:spPr>
+          <a:xfrm>
+            <a:off x="27432" y="91440"/>
+            <a:ext cx="585216" cy="475488"/>
+          </a:xfrm>
+          <a:prstGeom prst="rect">
+            <a:avLst/>
+          </a:prstGeom>
+          <a:extLst>
+            <a:ext uri="{C572A759-6A51-4108-AA02-DFA0A04FC94B}">
+              <ma14:wrappingTextBoxFlag xmlns:ma14="http://schemas.microsoft.com/office/mac/drawingml/2011/main" val="0"/>
+            </a:ext>
+          </a:extLst>
+        </p:spPr>
+        <p:txBody>
+          <a:bodyPr/>
+          <a:lstStyle>
+            <a:lvl1pPr>
+              <a:defRPr sz="2000">
+                <a:solidFill>
+                  <a:srgbClr val="FFFFFF"/>
+                </a:solidFill>
+                <a:latin typeface="Calibri"/>
+                <a:ea typeface="Calibri"/>
+                <a:cs typeface="Calibri"/>
+              </a:defRPr>
+            </a:lvl1pPr>
+          </a:lstStyle>
+          <a:p>
+            <a:pPr algn="ctr"/>
+            <a:fld id="{F7021451-1387-4CA6-816F-3879F97B5CBC}" type="slidenum">
+              <a:rPr b="1" lang="en-US"/>
+              <a:t>42</a:t>
+            </a:fld>
+            <a:endParaRPr lang="en-US"/>
+          </a:p>
+        </p:txBody>
+      </p:sp>
+    </p:spTree>
+  </p:cSld>
+  <p:clrMapOvr>
+    <a:masterClrMapping/>
+  </p:clrMapOvr>
+</p:sld>
+</file>
+
+<file path=ppt/slides/slide43.xml><?xml version="1.0" encoding="utf-8"?>
+<p:sld xmlns:a="http://schemas.openxmlformats.org/drawingml/2006/main" xmlns:r="http://schemas.openxmlformats.org/officeDocument/2006/relationships" xmlns:p="http://schemas.openxmlformats.org/presentationml/2006/main">
+  <p:cSld name="Slide 43">
+    <p:spTree>
+      <p:nvGrpSpPr>
+        <p:cNvPr id="1" name=""/>
+        <p:cNvGrpSpPr/>
+        <p:nvPr/>
+      </p:nvGrpSpPr>
+      <p:grpSpPr>
+        <a:xfrm>
+          <a:off x="0" y="0"/>
+          <a:ext cx="0" cy="0"/>
+          <a:chOff x="0" y="0"/>
+          <a:chExt cx="0" cy="0"/>
+        </a:xfrm>
+      </p:grpSpPr>
+      <p:sp>
+        <p:nvSpPr>
+          <p:cNvPr id="2" name="Text 0"/>
+          <p:cNvSpPr/>
+          <p:nvPr/>
+        </p:nvSpPr>
+        <p:spPr>
+          <a:xfrm>
+            <a:off x="457200" y="713232"/>
+            <a:ext cx="11368735" cy="274320"/>
+          </a:xfrm>
+          <a:prstGeom prst="rect">
+            <a:avLst/>
+          </a:prstGeom>
+          <a:noFill/>
+          <a:ln/>
+        </p:spPr>
+        <p:txBody>
+          <a:bodyPr wrap="square" lIns="0" tIns="0" rIns="0" bIns="0" rtlCol="0" anchor="ctr"/>
+          <a:lstStyle/>
+          <a:p>
+            <a:pPr algn="r" indent="0" marL="0">
+              <a:buNone/>
+            </a:pPr>
+            <a:r>
+              <a:rPr lang="en-US" sz="1400" b="1" dirty="0">
+                <a:solidFill>
+                  <a:srgbClr val="1C3F6E"/>
+                </a:solidFill>
+                <a:latin typeface="Calibri" pitchFamily="34" charset="0"/>
+                <a:ea typeface="Calibri" pitchFamily="34" charset="-122"/>
+                <a:cs typeface="Calibri" pitchFamily="34" charset="-120"/>
+              </a:rPr>
+              <a:t>FORMATIVE EVALUATION</a:t>
+            </a:r>
+            <a:endParaRPr lang="en-US" sz="1400" dirty="0"/>
+          </a:p>
+        </p:txBody>
+      </p:sp>
+      <p:pic>
+        <p:nvPicPr>
+          <p:cNvPr id="3" name="Image 0" descr="/home/claude/f4/img/minesec_sheet.png">    </p:cNvPr>
+          <p:cNvPicPr>
+            <a:picLocks noChangeAspect="1"/>
+          </p:cNvPicPr>
+          <p:nvPr/>
+        </p:nvPicPr>
+        <p:blipFill>
+          <a:blip r:embed="rId1"/>
+          <a:stretch>
+            <a:fillRect/>
+          </a:stretch>
+        </p:blipFill>
+        <p:spPr>
+          <a:xfrm>
+            <a:off x="0" y="658368"/>
+            <a:ext cx="5120640" cy="5833872"/>
+          </a:xfrm>
+          <a:prstGeom prst="rect">
+            <a:avLst/>
+          </a:prstGeom>
+        </p:spPr>
+      </p:pic>
+      <p:sp>
+        <p:nvSpPr>
+          <p:cNvPr id="4" name="Text 1"/>
+          <p:cNvSpPr/>
+          <p:nvPr/>
+        </p:nvSpPr>
+        <p:spPr>
+          <a:xfrm>
+            <a:off x="5349240" y="1005840"/>
+            <a:ext cx="6522415" cy="731520"/>
+          </a:xfrm>
+          <a:prstGeom prst="rect">
+            <a:avLst/>
+          </a:prstGeom>
+          <a:noFill/>
+          <a:ln/>
+        </p:spPr>
+        <p:txBody>
+          <a:bodyPr wrap="square" lIns="0" tIns="0" rIns="0" bIns="0" rtlCol="0" anchor="ctr">
+            <a:normAutofit/>
+          </a:bodyPr>
+          <a:lstStyle/>
+          <a:p>
+            <a:pPr algn="ctr" indent="0" marL="0">
+              <a:buNone/>
+            </a:pPr>
+            <a:r>
+              <a:rPr lang="en-US" sz="3600" b="1" dirty="0">
+                <a:solidFill>
+                  <a:srgbClr val="990011"/>
+                </a:solidFill>
+                <a:latin typeface="Times New Roman" pitchFamily="34" charset="0"/>
+                <a:ea typeface="Times New Roman" pitchFamily="34" charset="-122"/>
+                <a:cs typeface="Times New Roman" pitchFamily="34" charset="-120"/>
+              </a:rPr>
+              <a:t>Evaluation 2</a:t>
+            </a:r>
+            <a:endParaRPr lang="en-US" sz="3600" dirty="0"/>
+          </a:p>
+        </p:txBody>
+      </p:sp>
+      <p:sp>
+        <p:nvSpPr>
+          <p:cNvPr id="5" name="Text 2"/>
+          <p:cNvSpPr/>
+          <p:nvPr/>
+        </p:nvSpPr>
+        <p:spPr>
+          <a:xfrm>
+            <a:off x="5349240" y="1783080"/>
+            <a:ext cx="6522415" cy="4663440"/>
+          </a:xfrm>
+          <a:prstGeom prst="rect">
+            <a:avLst/>
+          </a:prstGeom>
+          <a:noFill/>
+          <a:ln/>
+        </p:spPr>
+        <p:txBody>
+          <a:bodyPr wrap="square" lIns="0" tIns="0" rIns="0" bIns="0" rtlCol="0" anchor="t"/>
+          <a:lstStyle/>
+          <a:p>
+            <a:pPr algn="l" indent="0" marL="0">
+              <a:spcAft>
+                <a:spcPts val="800"/>
+              </a:spcAft>
+              <a:buNone/>
+            </a:pPr>
+            <a:r>
+              <a:rPr lang="en-US" sz="4000" dirty="0">
+                <a:solidFill>
+                  <a:srgbClr val="111111"/>
+                </a:solidFill>
+                <a:latin typeface="Times New Roman" pitchFamily="34" charset="0"/>
+                <a:ea typeface="Times New Roman" pitchFamily="34" charset="-122"/>
+                <a:cs typeface="Times New Roman" pitchFamily="34" charset="-120"/>
+              </a:rPr>
+              <a:t>Why is the Stevenson screen painted white?</a:t>
+            </a:r>
+            <a:endParaRPr lang="en-US" sz="4000" dirty="0"/>
+          </a:p>
+        </p:txBody>
+      </p:sp>
+      <p:sp>
+        <p:nvSpPr>
+          <p:cNvPr id="25" name="Slide Number Placeholder 0"/>
+          <p:cNvSpPr>
+            <a:spLocks noGrp="1"/>
+          </p:cNvSpPr>
+          <p:nvPr>
+            <p:ph type="sldNum" sz="quarter" idx="4294967295"/>
+          </p:nvPr>
+        </p:nvSpPr>
+        <p:spPr>
+          <a:xfrm>
+            <a:off x="27432" y="91440"/>
+            <a:ext cx="585216" cy="475488"/>
+          </a:xfrm>
+          <a:prstGeom prst="rect">
+            <a:avLst/>
+          </a:prstGeom>
+          <a:extLst>
+            <a:ext uri="{C572A759-6A51-4108-AA02-DFA0A04FC94B}">
+              <ma14:wrappingTextBoxFlag xmlns:ma14="http://schemas.microsoft.com/office/mac/drawingml/2011/main" val="0"/>
+            </a:ext>
+          </a:extLst>
+        </p:spPr>
+        <p:txBody>
+          <a:bodyPr/>
+          <a:lstStyle>
+            <a:lvl1pPr>
+              <a:defRPr sz="2000">
+                <a:solidFill>
+                  <a:srgbClr val="FFFFFF"/>
+                </a:solidFill>
+                <a:latin typeface="Calibri"/>
+                <a:ea typeface="Calibri"/>
+                <a:cs typeface="Calibri"/>
+              </a:defRPr>
+            </a:lvl1pPr>
+          </a:lstStyle>
+          <a:p>
+            <a:pPr algn="ctr"/>
+            <a:fld id="{F7021451-1387-4CA6-816F-3879F97B5CBC}" type="slidenum">
+              <a:rPr b="1" lang="en-US"/>
+              <a:t>43</a:t>
+            </a:fld>
+            <a:endParaRPr lang="en-US"/>
+          </a:p>
+        </p:txBody>
+      </p:sp>
+    </p:spTree>
+  </p:cSld>
+  <p:clrMapOvr>
+    <a:masterClrMapping/>
+  </p:clrMapOvr>
+</p:sld>
+</file>
+
+<file path=ppt/slides/slide44.xml><?xml version="1.0" encoding="utf-8"?>
+<p:sld xmlns:a="http://schemas.openxmlformats.org/drawingml/2006/main" xmlns:r="http://schemas.openxmlformats.org/officeDocument/2006/relationships" xmlns:p="http://schemas.openxmlformats.org/presentationml/2006/main">
+  <p:cSld name="Slide 44">
+    <p:spTree>
+      <p:nvGrpSpPr>
+        <p:cNvPr id="1" name=""/>
+        <p:cNvGrpSpPr/>
+        <p:nvPr/>
+      </p:nvGrpSpPr>
+      <p:grpSpPr>
+        <a:xfrm>
+          <a:off x="0" y="0"/>
+          <a:ext cx="0" cy="0"/>
+          <a:chOff x="0" y="0"/>
+          <a:chExt cx="0" cy="0"/>
+        </a:xfrm>
+      </p:grpSpPr>
+      <p:sp>
+        <p:nvSpPr>
+          <p:cNvPr id="2" name="Text 0"/>
+          <p:cNvSpPr/>
+          <p:nvPr/>
+        </p:nvSpPr>
+        <p:spPr>
+          <a:xfrm>
+            <a:off x="457200" y="713232"/>
+            <a:ext cx="11368735" cy="274320"/>
+          </a:xfrm>
+          <a:prstGeom prst="rect">
+            <a:avLst/>
+          </a:prstGeom>
+          <a:noFill/>
+          <a:ln/>
+        </p:spPr>
+        <p:txBody>
+          <a:bodyPr wrap="square" lIns="0" tIns="0" rIns="0" bIns="0" rtlCol="0" anchor="ctr"/>
+          <a:lstStyle/>
+          <a:p>
+            <a:pPr algn="r" indent="0" marL="0">
+              <a:buNone/>
+            </a:pPr>
+            <a:r>
+              <a:rPr lang="en-US" sz="1400" b="1" dirty="0">
+                <a:solidFill>
+                  <a:srgbClr val="1C3F6E"/>
+                </a:solidFill>
+                <a:latin typeface="Calibri" pitchFamily="34" charset="0"/>
+                <a:ea typeface="Calibri" pitchFamily="34" charset="-122"/>
+                <a:cs typeface="Calibri" pitchFamily="34" charset="-120"/>
+              </a:rPr>
+              <a:t>FORMATIVE EVALUATION</a:t>
+            </a:r>
+            <a:endParaRPr lang="en-US" sz="1400" dirty="0"/>
+          </a:p>
+        </p:txBody>
+      </p:sp>
+      <p:pic>
+        <p:nvPicPr>
+          <p:cNvPr id="3" name="Image 0" descr="/home/claude/f4/img/minesec_sheet.png">    </p:cNvPr>
+          <p:cNvPicPr>
+            <a:picLocks noChangeAspect="1"/>
+          </p:cNvPicPr>
+          <p:nvPr/>
+        </p:nvPicPr>
+        <p:blipFill>
+          <a:blip r:embed="rId1"/>
+          <a:stretch>
+            <a:fillRect/>
+          </a:stretch>
+        </p:blipFill>
+        <p:spPr>
+          <a:xfrm>
+            <a:off x="0" y="658368"/>
+            <a:ext cx="5120640" cy="5833872"/>
+          </a:xfrm>
+          <a:prstGeom prst="rect">
+            <a:avLst/>
+          </a:prstGeom>
+        </p:spPr>
+      </p:pic>
+      <p:sp>
+        <p:nvSpPr>
+          <p:cNvPr id="4" name="Text 1"/>
+          <p:cNvSpPr/>
+          <p:nvPr/>
+        </p:nvSpPr>
+        <p:spPr>
+          <a:xfrm>
+            <a:off x="5349240" y="1005840"/>
+            <a:ext cx="6522415" cy="731520"/>
+          </a:xfrm>
+          <a:prstGeom prst="rect">
+            <a:avLst/>
+          </a:prstGeom>
+          <a:noFill/>
+          <a:ln/>
+        </p:spPr>
+        <p:txBody>
+          <a:bodyPr wrap="square" lIns="0" tIns="0" rIns="0" bIns="0" rtlCol="0" anchor="ctr">
+            <a:normAutofit/>
+          </a:bodyPr>
+          <a:lstStyle/>
+          <a:p>
+            <a:pPr algn="ctr" indent="0" marL="0">
+              <a:buNone/>
+            </a:pPr>
+            <a:r>
+              <a:rPr lang="en-US" sz="3600" b="1" dirty="0">
+                <a:solidFill>
+                  <a:srgbClr val="990011"/>
+                </a:solidFill>
+                <a:latin typeface="Times New Roman" pitchFamily="34" charset="0"/>
+                <a:ea typeface="Times New Roman" pitchFamily="34" charset="-122"/>
+                <a:cs typeface="Times New Roman" pitchFamily="34" charset="-120"/>
+              </a:rPr>
+              <a:t>Expected Answer</a:t>
+            </a:r>
+            <a:endParaRPr lang="en-US" sz="3600" dirty="0"/>
+          </a:p>
+        </p:txBody>
+      </p:sp>
+      <p:sp>
+        <p:nvSpPr>
+          <p:cNvPr id="5" name="Text 2"/>
+          <p:cNvSpPr/>
+          <p:nvPr/>
+        </p:nvSpPr>
+        <p:spPr>
+          <a:xfrm>
+            <a:off x="5349240" y="1783080"/>
+            <a:ext cx="6522415" cy="4663440"/>
+          </a:xfrm>
+          <a:prstGeom prst="rect">
+            <a:avLst/>
+          </a:prstGeom>
+          <a:noFill/>
+          <a:ln/>
+        </p:spPr>
+        <p:txBody>
+          <a:bodyPr wrap="square" lIns="0" tIns="0" rIns="0" bIns="0" rtlCol="0" anchor="t"/>
+          <a:lstStyle/>
+          <a:p>
+            <a:pPr algn="l" indent="0" marL="0">
+              <a:spcAft>
+                <a:spcPts val="800"/>
+              </a:spcAft>
+              <a:buNone/>
+            </a:pPr>
+            <a:r>
+              <a:rPr lang="en-US" sz="4000" dirty="0">
+                <a:solidFill>
+                  <a:srgbClr val="111111"/>
+                </a:solidFill>
+                <a:latin typeface="Times New Roman" pitchFamily="34" charset="0"/>
+                <a:ea typeface="Times New Roman" pitchFamily="34" charset="-122"/>
+                <a:cs typeface="Times New Roman" pitchFamily="34" charset="-120"/>
+              </a:rPr>
+              <a:t>To reflect the sunlight.</a:t>
+            </a:r>
+            <a:endParaRPr lang="en-US" sz="4000" dirty="0"/>
+          </a:p>
+        </p:txBody>
+      </p:sp>
+      <p:sp>
+        <p:nvSpPr>
+          <p:cNvPr id="25" name="Slide Number Placeholder 0"/>
+          <p:cNvSpPr>
+            <a:spLocks noGrp="1"/>
+          </p:cNvSpPr>
+          <p:nvPr>
+            <p:ph type="sldNum" sz="quarter" idx="4294967295"/>
+          </p:nvPr>
+        </p:nvSpPr>
+        <p:spPr>
+          <a:xfrm>
+            <a:off x="27432" y="91440"/>
+            <a:ext cx="585216" cy="475488"/>
+          </a:xfrm>
+          <a:prstGeom prst="rect">
+            <a:avLst/>
+          </a:prstGeom>
+          <a:extLst>
+            <a:ext uri="{C572A759-6A51-4108-AA02-DFA0A04FC94B}">
+              <ma14:wrappingTextBoxFlag xmlns:ma14="http://schemas.microsoft.com/office/mac/drawingml/2011/main" val="0"/>
+            </a:ext>
+          </a:extLst>
+        </p:spPr>
+        <p:txBody>
+          <a:bodyPr/>
+          <a:lstStyle>
+            <a:lvl1pPr>
+              <a:defRPr sz="2000">
+                <a:solidFill>
+                  <a:srgbClr val="FFFFFF"/>
+                </a:solidFill>
+                <a:latin typeface="Calibri"/>
+                <a:ea typeface="Calibri"/>
+                <a:cs typeface="Calibri"/>
+              </a:defRPr>
+            </a:lvl1pPr>
+          </a:lstStyle>
+          <a:p>
+            <a:pPr algn="ctr"/>
+            <a:fld id="{F7021451-1387-4CA6-816F-3879F97B5CBC}" type="slidenum">
+              <a:rPr b="1" lang="en-US"/>
+              <a:t>44</a:t>
+            </a:fld>
+            <a:endParaRPr lang="en-US"/>
+          </a:p>
+        </p:txBody>
+      </p:sp>
+    </p:spTree>
+  </p:cSld>
+  <p:clrMapOvr>
+    <a:masterClrMapping/>
+  </p:clrMapOvr>
+</p:sld>
+</file>
+
+<file path=ppt/slides/slide45.xml><?xml version="1.0" encoding="utf-8"?>
+<p:sld xmlns:a="http://schemas.openxmlformats.org/drawingml/2006/main" xmlns:r="http://schemas.openxmlformats.org/officeDocument/2006/relationships" xmlns:p="http://schemas.openxmlformats.org/presentationml/2006/main">
+  <p:cSld name="Slide 45">
+    <p:spTree>
+      <p:nvGrpSpPr>
+        <p:cNvPr id="1" name=""/>
+        <p:cNvGrpSpPr/>
+        <p:nvPr/>
+      </p:nvGrpSpPr>
+      <p:grpSpPr>
+        <a:xfrm>
+          <a:off x="0" y="0"/>
+          <a:ext cx="0" cy="0"/>
+          <a:chOff x="0" y="0"/>
+          <a:chExt cx="0" cy="0"/>
+        </a:xfrm>
+      </p:grpSpPr>
+      <p:sp>
+        <p:nvSpPr>
+          <p:cNvPr id="2" name="Text 0"/>
+          <p:cNvSpPr/>
+          <p:nvPr/>
+        </p:nvSpPr>
+        <p:spPr>
+          <a:xfrm>
+            <a:off x="457200" y="713232"/>
+            <a:ext cx="11368735" cy="274320"/>
+          </a:xfrm>
+          <a:prstGeom prst="rect">
+            <a:avLst/>
+          </a:prstGeom>
+          <a:noFill/>
+          <a:ln/>
+        </p:spPr>
+        <p:txBody>
+          <a:bodyPr wrap="square" lIns="0" tIns="0" rIns="0" bIns="0" rtlCol="0" anchor="ctr"/>
+          <a:lstStyle/>
+          <a:p>
+            <a:pPr algn="r" indent="0" marL="0">
+              <a:buNone/>
+            </a:pPr>
+            <a:r>
+              <a:rPr lang="en-US" sz="1400" b="1" dirty="0">
+                <a:solidFill>
+                  <a:srgbClr val="1C3F6E"/>
+                </a:solidFill>
+                <a:latin typeface="Calibri" pitchFamily="34" charset="0"/>
+                <a:ea typeface="Calibri" pitchFamily="34" charset="-122"/>
+                <a:cs typeface="Calibri" pitchFamily="34" charset="-120"/>
+              </a:rPr>
+              <a:t>REMEDIATION</a:t>
+            </a:r>
+            <a:endParaRPr lang="en-US" sz="1400" dirty="0"/>
+          </a:p>
+        </p:txBody>
+      </p:sp>
+      <p:pic>
+        <p:nvPicPr>
+          <p:cNvPr id="3" name="Image 0" descr="/home/claude/f4/img/minesec_sheet.png">    </p:cNvPr>
+          <p:cNvPicPr>
+            <a:picLocks noChangeAspect="1"/>
+          </p:cNvPicPr>
+          <p:nvPr/>
+        </p:nvPicPr>
+        <p:blipFill>
+          <a:blip r:embed="rId1"/>
+          <a:stretch>
+            <a:fillRect/>
+          </a:stretch>
+        </p:blipFill>
+        <p:spPr>
+          <a:xfrm>
+            <a:off x="0" y="658368"/>
+            <a:ext cx="1463040" cy="5833872"/>
+          </a:xfrm>
+          <a:prstGeom prst="rect">
+            <a:avLst/>
+          </a:prstGeom>
+        </p:spPr>
+      </p:pic>
+      <p:sp>
+        <p:nvSpPr>
+          <p:cNvPr id="4" name="Text 1"/>
+          <p:cNvSpPr/>
+          <p:nvPr/>
+        </p:nvSpPr>
+        <p:spPr>
+          <a:xfrm>
+            <a:off x="1691640" y="1005840"/>
+            <a:ext cx="10180015" cy="731520"/>
+          </a:xfrm>
+          <a:prstGeom prst="rect">
+            <a:avLst/>
+          </a:prstGeom>
+          <a:noFill/>
+          <a:ln/>
+        </p:spPr>
+        <p:txBody>
+          <a:bodyPr wrap="square" lIns="0" tIns="0" rIns="0" bIns="0" rtlCol="0" anchor="ctr">
+            <a:normAutofit/>
+          </a:bodyPr>
+          <a:lstStyle/>
+          <a:p>
+            <a:pPr algn="ctr" indent="0" marL="0">
+              <a:buNone/>
+            </a:pPr>
+            <a:r>
+              <a:rPr lang="en-US" sz="3600" b="1" dirty="0">
+                <a:solidFill>
+                  <a:srgbClr val="990011"/>
+                </a:solidFill>
+                <a:latin typeface="Times New Roman" pitchFamily="34" charset="0"/>
+                <a:ea typeface="Times New Roman" pitchFamily="34" charset="-122"/>
+                <a:cs typeface="Times New Roman" pitchFamily="34" charset="-120"/>
+              </a:rPr>
+              <a:t>Remediation</a:t>
+            </a:r>
+            <a:endParaRPr lang="en-US" sz="3600" dirty="0"/>
+          </a:p>
+        </p:txBody>
+      </p:sp>
+      <p:sp>
+        <p:nvSpPr>
+          <p:cNvPr id="5" name="Text 2"/>
+          <p:cNvSpPr/>
+          <p:nvPr/>
+        </p:nvSpPr>
+        <p:spPr>
+          <a:xfrm>
+            <a:off x="1691640" y="1783080"/>
+            <a:ext cx="10180015" cy="4663440"/>
+          </a:xfrm>
+          <a:prstGeom prst="rect">
+            <a:avLst/>
+          </a:prstGeom>
+          <a:noFill/>
+          <a:ln/>
+        </p:spPr>
+        <p:txBody>
+          <a:bodyPr wrap="square" lIns="0" tIns="0" rIns="0" bIns="0" rtlCol="0" anchor="t"/>
+          <a:lstStyle/>
+          <a:p>
+            <a:pPr algn="l" indent="0" marL="0">
+              <a:spcAft>
+                <a:spcPts val="800"/>
+              </a:spcAft>
+              <a:buNone/>
+            </a:pPr>
+            <a:r>
+              <a:rPr lang="en-US" sz="4000" b="1" dirty="0">
+                <a:solidFill>
+                  <a:srgbClr val="111111"/>
+                </a:solidFill>
+                <a:latin typeface="Times New Roman" pitchFamily="34" charset="0"/>
+                <a:ea typeface="Times New Roman" pitchFamily="34" charset="-122"/>
+                <a:cs typeface="Times New Roman" pitchFamily="34" charset="-120"/>
+              </a:rPr>
+              <a:t>Fill in the blanks:</a:t>
+            </a:r>
+            <a:endParaRPr lang="en-US" sz="4000" dirty="0"/>
+          </a:p>
+          <a:p>
+            <a:pPr algn="l" marL="342900" indent="-342900">
+              <a:spcAft>
+                <a:spcPts val="800"/>
+              </a:spcAft>
+              <a:buSzPct val="100000"/>
+              <a:buFont typeface="+mj-lt"/>
+              <a:buAutoNum type="arabicPeriod" startAt="1"/>
+            </a:pPr>
+            <a:r>
+              <a:rPr lang="en-US" sz="4000" dirty="0">
+                <a:solidFill>
+                  <a:srgbClr val="111111"/>
+                </a:solidFill>
+                <a:latin typeface="Times New Roman" pitchFamily="34" charset="0"/>
+                <a:ea typeface="Times New Roman" pitchFamily="34" charset="-122"/>
+                <a:cs typeface="Times New Roman" pitchFamily="34" charset="-120"/>
+              </a:rPr>
+              <a:t>The highest and lowest temperatures are recorded by the ______ thermometer.</a:t>
+            </a:r>
+            <a:endParaRPr lang="en-US" sz="4000" dirty="0"/>
+          </a:p>
+          <a:p>
+            <a:pPr algn="l" marL="342900" indent="-342900">
+              <a:spcAft>
+                <a:spcPts val="800"/>
+              </a:spcAft>
+              <a:buSzPct val="100000"/>
+              <a:buFont typeface="+mj-lt"/>
+              <a:buAutoNum type="arabicPeriod" startAt="1"/>
+            </a:pPr>
+            <a:r>
+              <a:rPr lang="en-US" sz="4000" dirty="0">
+                <a:solidFill>
+                  <a:srgbClr val="111111"/>
+                </a:solidFill>
+                <a:latin typeface="Times New Roman" pitchFamily="34" charset="0"/>
+                <a:ea typeface="Times New Roman" pitchFamily="34" charset="-122"/>
+                <a:cs typeface="Times New Roman" pitchFamily="34" charset="-120"/>
+              </a:rPr>
+              <a:t>Mean = (maximum + minimum) ÷ ______.</a:t>
+            </a:r>
+            <a:endParaRPr lang="en-US" sz="4000" dirty="0"/>
+          </a:p>
+          <a:p>
+            <a:pPr algn="l" marL="342900" indent="-342900">
+              <a:spcAft>
+                <a:spcPts val="800"/>
+              </a:spcAft>
+              <a:buSzPct val="100000"/>
+              <a:buFont typeface="+mj-lt"/>
+              <a:buAutoNum type="arabicPeriod" startAt="1"/>
+            </a:pPr>
+            <a:r>
+              <a:rPr lang="en-US" sz="4000" dirty="0">
+                <a:solidFill>
+                  <a:srgbClr val="111111"/>
+                </a:solidFill>
+                <a:latin typeface="Times New Roman" pitchFamily="34" charset="0"/>
+                <a:ea typeface="Times New Roman" pitchFamily="34" charset="-122"/>
+                <a:cs typeface="Times New Roman" pitchFamily="34" charset="-120"/>
+              </a:rPr>
+              <a:t>Thermometers are kept in a ______ screen.</a:t>
+            </a:r>
+            <a:endParaRPr lang="en-US" sz="4000" dirty="0"/>
+          </a:p>
+        </p:txBody>
+      </p:sp>
+      <p:sp>
+        <p:nvSpPr>
+          <p:cNvPr id="25" name="Slide Number Placeholder 0"/>
+          <p:cNvSpPr>
+            <a:spLocks noGrp="1"/>
+          </p:cNvSpPr>
+          <p:nvPr>
+            <p:ph type="sldNum" sz="quarter" idx="4294967295"/>
+          </p:nvPr>
+        </p:nvSpPr>
+        <p:spPr>
+          <a:xfrm>
+            <a:off x="27432" y="91440"/>
+            <a:ext cx="585216" cy="475488"/>
+          </a:xfrm>
+          <a:prstGeom prst="rect">
+            <a:avLst/>
+          </a:prstGeom>
+          <a:extLst>
+            <a:ext uri="{C572A759-6A51-4108-AA02-DFA0A04FC94B}">
+              <ma14:wrappingTextBoxFlag xmlns:ma14="http://schemas.microsoft.com/office/mac/drawingml/2011/main" val="0"/>
+            </a:ext>
+          </a:extLst>
+        </p:spPr>
+        <p:txBody>
+          <a:bodyPr/>
+          <a:lstStyle>
+            <a:lvl1pPr>
+              <a:defRPr sz="2000">
+                <a:solidFill>
+                  <a:srgbClr val="FFFFFF"/>
+                </a:solidFill>
+                <a:latin typeface="Calibri"/>
+                <a:ea typeface="Calibri"/>
+                <a:cs typeface="Calibri"/>
+              </a:defRPr>
+            </a:lvl1pPr>
+          </a:lstStyle>
+          <a:p>
+            <a:pPr algn="ctr"/>
+            <a:fld id="{F7021451-1387-4CA6-816F-3879F97B5CBC}" type="slidenum">
+              <a:rPr b="1" lang="en-US"/>
+              <a:t>45</a:t>
+            </a:fld>
+            <a:endParaRPr lang="en-US"/>
+          </a:p>
+        </p:txBody>
+      </p:sp>
+    </p:spTree>
+  </p:cSld>
+  <p:clrMapOvr>
+    <a:masterClrMapping/>
+  </p:clrMapOvr>
+</p:sld>
+</file>
+
+<file path=ppt/slides/slide46.xml><?xml version="1.0" encoding="utf-8"?>
+<p:sld xmlns:a="http://schemas.openxmlformats.org/drawingml/2006/main" xmlns:r="http://schemas.openxmlformats.org/officeDocument/2006/relationships" xmlns:p="http://schemas.openxmlformats.org/presentationml/2006/main">
+  <p:cSld name="Slide 46">
+    <p:spTree>
+      <p:nvGrpSpPr>
+        <p:cNvPr id="1" name=""/>
+        <p:cNvGrpSpPr/>
+        <p:nvPr/>
+      </p:nvGrpSpPr>
+      <p:grpSpPr>
+        <a:xfrm>
+          <a:off x="0" y="0"/>
+          <a:ext cx="0" cy="0"/>
+          <a:chOff x="0" y="0"/>
+          <a:chExt cx="0" cy="0"/>
+        </a:xfrm>
+      </p:grpSpPr>
+      <p:sp>
+        <p:nvSpPr>
+          <p:cNvPr id="2" name="Text 0"/>
+          <p:cNvSpPr/>
+          <p:nvPr/>
+        </p:nvSpPr>
+        <p:spPr>
+          <a:xfrm>
+            <a:off x="457200" y="713232"/>
+            <a:ext cx="11368735" cy="274320"/>
+          </a:xfrm>
+          <a:prstGeom prst="rect">
+            <a:avLst/>
+          </a:prstGeom>
+          <a:noFill/>
+          <a:ln/>
+        </p:spPr>
+        <p:txBody>
+          <a:bodyPr wrap="square" lIns="0" tIns="0" rIns="0" bIns="0" rtlCol="0" anchor="ctr"/>
+          <a:lstStyle/>
+          <a:p>
+            <a:pPr algn="r" indent="0" marL="0">
+              <a:buNone/>
+            </a:pPr>
+            <a:r>
+              <a:rPr lang="en-US" sz="1400" b="1" dirty="0">
+                <a:solidFill>
+                  <a:srgbClr val="1C3F6E"/>
+                </a:solidFill>
+                <a:latin typeface="Calibri" pitchFamily="34" charset="0"/>
+                <a:ea typeface="Calibri" pitchFamily="34" charset="-122"/>
+                <a:cs typeface="Calibri" pitchFamily="34" charset="-120"/>
+              </a:rPr>
+              <a:t>HOMEWORK</a:t>
+            </a:r>
+            <a:endParaRPr lang="en-US" sz="1400" dirty="0"/>
+          </a:p>
+        </p:txBody>
+      </p:sp>
+      <p:pic>
+        <p:nvPicPr>
+          <p:cNvPr id="3" name="Image 0" descr="/home/claude/f4/img/minesec_sheet.png">    </p:cNvPr>
+          <p:cNvPicPr>
+            <a:picLocks noChangeAspect="1"/>
+          </p:cNvPicPr>
+          <p:nvPr/>
+        </p:nvPicPr>
+        <p:blipFill>
+          <a:blip r:embed="rId1"/>
+          <a:stretch>
+            <a:fillRect/>
+          </a:stretch>
+        </p:blipFill>
+        <p:spPr>
+          <a:xfrm>
+            <a:off x="0" y="658368"/>
+            <a:ext cx="5120640" cy="5833872"/>
+          </a:xfrm>
+          <a:prstGeom prst="rect">
+            <a:avLst/>
+          </a:prstGeom>
+        </p:spPr>
+      </p:pic>
+      <p:sp>
+        <p:nvSpPr>
+          <p:cNvPr id="4" name="Text 1"/>
+          <p:cNvSpPr/>
+          <p:nvPr/>
+        </p:nvSpPr>
+        <p:spPr>
+          <a:xfrm>
+            <a:off x="5349240" y="1005840"/>
+            <a:ext cx="6522415" cy="731520"/>
+          </a:xfrm>
+          <a:prstGeom prst="rect">
+            <a:avLst/>
+          </a:prstGeom>
+          <a:noFill/>
+          <a:ln/>
+        </p:spPr>
+        <p:txBody>
+          <a:bodyPr wrap="square" lIns="0" tIns="0" rIns="0" bIns="0" rtlCol="0" anchor="ctr">
+            <a:normAutofit/>
+          </a:bodyPr>
+          <a:lstStyle/>
+          <a:p>
+            <a:pPr algn="ctr" indent="0" marL="0">
+              <a:buNone/>
+            </a:pPr>
+            <a:r>
+              <a:rPr lang="en-US" sz="3600" b="1" dirty="0">
+                <a:solidFill>
+                  <a:srgbClr val="990011"/>
+                </a:solidFill>
+                <a:latin typeface="Times New Roman" pitchFamily="34" charset="0"/>
+                <a:ea typeface="Times New Roman" pitchFamily="34" charset="-122"/>
+                <a:cs typeface="Times New Roman" pitchFamily="34" charset="-120"/>
+              </a:rPr>
+              <a:t>Homework</a:t>
+            </a:r>
+            <a:endParaRPr lang="en-US" sz="3600" dirty="0"/>
+          </a:p>
+        </p:txBody>
+      </p:sp>
+      <p:sp>
+        <p:nvSpPr>
+          <p:cNvPr id="5" name="Text 2"/>
+          <p:cNvSpPr/>
+          <p:nvPr/>
+        </p:nvSpPr>
+        <p:spPr>
+          <a:xfrm>
+            <a:off x="5349240" y="1783080"/>
+            <a:ext cx="6522415" cy="4663440"/>
+          </a:xfrm>
+          <a:prstGeom prst="rect">
+            <a:avLst/>
+          </a:prstGeom>
+          <a:noFill/>
+          <a:ln/>
+        </p:spPr>
+        <p:txBody>
+          <a:bodyPr wrap="square" lIns="0" tIns="0" rIns="0" bIns="0" rtlCol="0" anchor="t"/>
+          <a:lstStyle/>
+          <a:p>
+            <a:pPr algn="l" indent="0" marL="0">
+              <a:spcAft>
+                <a:spcPts val="800"/>
+              </a:spcAft>
+              <a:buNone/>
+            </a:pPr>
+            <a:r>
+              <a:rPr lang="en-US" sz="4000" dirty="0">
+                <a:solidFill>
+                  <a:srgbClr val="111111"/>
+                </a:solidFill>
+                <a:latin typeface="Times New Roman" pitchFamily="34" charset="0"/>
+                <a:ea typeface="Times New Roman" pitchFamily="34" charset="-122"/>
+                <a:cs typeface="Times New Roman" pitchFamily="34" charset="-120"/>
+              </a:rPr>
+              <a:t>Wet a piece of cloth and hang it outside in the morning and in the afternoon. Note how long it takes to dry each time.</a:t>
+            </a:r>
+            <a:endParaRPr lang="en-US" sz="4000" dirty="0"/>
+          </a:p>
+        </p:txBody>
+      </p:sp>
+      <p:sp>
+        <p:nvSpPr>
+          <p:cNvPr id="25" name="Slide Number Placeholder 0"/>
+          <p:cNvSpPr>
+            <a:spLocks noGrp="1"/>
+          </p:cNvSpPr>
+          <p:nvPr>
+            <p:ph type="sldNum" sz="quarter" idx="4294967295"/>
+          </p:nvPr>
+        </p:nvSpPr>
+        <p:spPr>
+          <a:xfrm>
+            <a:off x="27432" y="91440"/>
+            <a:ext cx="585216" cy="475488"/>
+          </a:xfrm>
+          <a:prstGeom prst="rect">
+            <a:avLst/>
+          </a:prstGeom>
+          <a:extLst>
+            <a:ext uri="{C572A759-6A51-4108-AA02-DFA0A04FC94B}">
+              <ma14:wrappingTextBoxFlag xmlns:ma14="http://schemas.microsoft.com/office/mac/drawingml/2011/main" val="0"/>
+            </a:ext>
+          </a:extLst>
+        </p:spPr>
+        <p:txBody>
+          <a:bodyPr/>
+          <a:lstStyle>
+            <a:lvl1pPr>
+              <a:defRPr sz="2000">
+                <a:solidFill>
+                  <a:srgbClr val="FFFFFF"/>
+                </a:solidFill>
+                <a:latin typeface="Calibri"/>
+                <a:ea typeface="Calibri"/>
+                <a:cs typeface="Calibri"/>
+              </a:defRPr>
+            </a:lvl1pPr>
+          </a:lstStyle>
+          <a:p>
+            <a:pPr algn="ctr"/>
+            <a:fld id="{F7021451-1387-4CA6-816F-3879F97B5CBC}" type="slidenum">
+              <a:rPr b="1" lang="en-US"/>
+              <a:t>46</a:t>
+            </a:fld>
+            <a:endParaRPr lang="en-US"/>
+          </a:p>
+        </p:txBody>
+      </p:sp>
+    </p:spTree>
+  </p:cSld>
+  <p:clrMapOvr>
+    <a:masterClrMapping/>
+  </p:clrMapOvr>
+</p:sld>
+</file>
+
+<file path=ppt/slides/slide47.xml><?xml version="1.0" encoding="utf-8"?>
+<p:sld xmlns:a="http://schemas.openxmlformats.org/drawingml/2006/main" xmlns:r="http://schemas.openxmlformats.org/officeDocument/2006/relationships" xmlns:p="http://schemas.openxmlformats.org/presentationml/2006/main">
+  <p:cSld name="Slide 47">
+    <p:spTree>
+      <p:nvGrpSpPr>
+        <p:cNvPr id="1" name=""/>
+        <p:cNvGrpSpPr/>
+        <p:nvPr/>
+      </p:nvGrpSpPr>
+      <p:grpSpPr>
+        <a:xfrm>
+          <a:off x="0" y="0"/>
+          <a:ext cx="0" cy="0"/>
+          <a:chOff x="0" y="0"/>
+          <a:chExt cx="0" cy="0"/>
+        </a:xfrm>
+      </p:grpSpPr>
+      <p:sp>
+        <p:nvSpPr>
+          <p:cNvPr id="2" name="Text 0"/>
+          <p:cNvSpPr/>
+          <p:nvPr/>
+        </p:nvSpPr>
+        <p:spPr>
+          <a:xfrm>
+            <a:off x="457200" y="713232"/>
+            <a:ext cx="11368735" cy="274320"/>
+          </a:xfrm>
+          <a:prstGeom prst="rect">
+            <a:avLst/>
+          </a:prstGeom>
+          <a:noFill/>
+          <a:ln/>
+        </p:spPr>
+        <p:txBody>
+          <a:bodyPr wrap="square" lIns="0" tIns="0" rIns="0" bIns="0" rtlCol="0" anchor="ctr"/>
+          <a:lstStyle/>
+          <a:p>
+            <a:pPr algn="r" indent="0" marL="0">
+              <a:buNone/>
+            </a:pPr>
+            <a:r>
+              <a:rPr lang="en-US" sz="1400" b="1" dirty="0">
+                <a:solidFill>
+                  <a:srgbClr val="1C3F6E"/>
+                </a:solidFill>
+                <a:latin typeface="Calibri" pitchFamily="34" charset="0"/>
+                <a:ea typeface="Calibri" pitchFamily="34" charset="-122"/>
+                <a:cs typeface="Calibri" pitchFamily="34" charset="-120"/>
+              </a:rPr>
+              <a:t>NEXT LESSON</a:t>
+            </a:r>
+            <a:endParaRPr lang="en-US" sz="1400" dirty="0"/>
+          </a:p>
+        </p:txBody>
+      </p:sp>
+      <p:pic>
+        <p:nvPicPr>
+          <p:cNvPr id="3" name="Image 0" descr="/home/claude/f4/img/minesec_sheet.png">    </p:cNvPr>
+          <p:cNvPicPr>
+            <a:picLocks noChangeAspect="1"/>
+          </p:cNvPicPr>
+          <p:nvPr/>
+        </p:nvPicPr>
+        <p:blipFill>
+          <a:blip r:embed="rId1"/>
+          <a:stretch>
+            <a:fillRect/>
+          </a:stretch>
+        </p:blipFill>
+        <p:spPr>
+          <a:xfrm>
+            <a:off x="0" y="658368"/>
+            <a:ext cx="5120640" cy="5833872"/>
+          </a:xfrm>
+          <a:prstGeom prst="rect">
+            <a:avLst/>
+          </a:prstGeom>
+        </p:spPr>
+      </p:pic>
+      <p:sp>
+        <p:nvSpPr>
+          <p:cNvPr id="4" name="Text 1"/>
+          <p:cNvSpPr/>
+          <p:nvPr/>
+        </p:nvSpPr>
+        <p:spPr>
+          <a:xfrm>
+            <a:off x="5349240" y="1005840"/>
+            <a:ext cx="6522415" cy="731520"/>
+          </a:xfrm>
+          <a:prstGeom prst="rect">
+            <a:avLst/>
+          </a:prstGeom>
+          <a:noFill/>
+          <a:ln/>
+        </p:spPr>
+        <p:txBody>
+          <a:bodyPr wrap="square" lIns="0" tIns="0" rIns="0" bIns="0" rtlCol="0" anchor="ctr">
+            <a:normAutofit/>
+          </a:bodyPr>
+          <a:lstStyle/>
+          <a:p>
+            <a:pPr algn="ctr" indent="0" marL="0">
+              <a:buNone/>
+            </a:pPr>
+            <a:r>
+              <a:rPr lang="en-US" sz="3600" b="1" dirty="0">
+                <a:solidFill>
+                  <a:srgbClr val="990011"/>
+                </a:solidFill>
+                <a:latin typeface="Times New Roman" pitchFamily="34" charset="0"/>
+                <a:ea typeface="Times New Roman" pitchFamily="34" charset="-122"/>
+                <a:cs typeface="Times New Roman" pitchFamily="34" charset="-120"/>
+              </a:rPr>
+              <a:t>Next Lesson</a:t>
+            </a:r>
+            <a:endParaRPr lang="en-US" sz="3600" dirty="0"/>
+          </a:p>
+        </p:txBody>
+      </p:sp>
+      <p:sp>
+        <p:nvSpPr>
+          <p:cNvPr id="5" name="Text 2"/>
+          <p:cNvSpPr/>
+          <p:nvPr/>
+        </p:nvSpPr>
+        <p:spPr>
+          <a:xfrm>
+            <a:off x="5349240" y="1783080"/>
+            <a:ext cx="6522415" cy="4663440"/>
+          </a:xfrm>
+          <a:prstGeom prst="rect">
+            <a:avLst/>
+          </a:prstGeom>
+          <a:noFill/>
+          <a:ln/>
+        </p:spPr>
+        <p:txBody>
+          <a:bodyPr wrap="square" lIns="0" tIns="0" rIns="0" bIns="0" rtlCol="0" anchor="ctr"/>
+          <a:lstStyle/>
+          <a:p>
+            <a:pPr algn="ctr" indent="0" marL="0">
+              <a:spcAft>
+                <a:spcPts val="800"/>
+              </a:spcAft>
+              <a:buNone/>
+            </a:pPr>
+            <a:r>
+              <a:rPr lang="en-US" sz="4000" b="1" dirty="0">
+                <a:solidFill>
+                  <a:srgbClr val="111111"/>
+                </a:solidFill>
+                <a:latin typeface="Times New Roman" pitchFamily="34" charset="0"/>
+                <a:ea typeface="Times New Roman" pitchFamily="34" charset="-122"/>
+                <a:cs typeface="Times New Roman" pitchFamily="34" charset="-120"/>
+              </a:rPr>
+              <a:t>Our next lesson will be on:</a:t>
+            </a:r>
+            <a:endParaRPr lang="en-US" sz="4000" dirty="0"/>
+          </a:p>
+          <a:p>
+            <a:pPr algn="ctr" indent="0" marL="0">
+              <a:spcAft>
+                <a:spcPts val="800"/>
+              </a:spcAft>
+              <a:buNone/>
+            </a:pPr>
+            <a:r>
+              <a:rPr lang="en-US" sz="4000" b="1" dirty="0">
+                <a:solidFill>
+                  <a:srgbClr val="990011"/>
+                </a:solidFill>
+                <a:latin typeface="Times New Roman" pitchFamily="34" charset="0"/>
+                <a:ea typeface="Times New Roman" pitchFamily="34" charset="-122"/>
+                <a:cs typeface="Times New Roman" pitchFamily="34" charset="-120"/>
+              </a:rPr>
+              <a:t>Lesson 33: Weather Elements: Humidity, Wind, Pressure and Sunshine</a:t>
+            </a:r>
+            <a:endParaRPr lang="en-US" sz="4000" dirty="0"/>
+          </a:p>
+        </p:txBody>
+      </p:sp>
+      <p:sp>
+        <p:nvSpPr>
+          <p:cNvPr id="25" name="Slide Number Placeholder 0"/>
+          <p:cNvSpPr>
+            <a:spLocks noGrp="1"/>
+          </p:cNvSpPr>
+          <p:nvPr>
+            <p:ph type="sldNum" sz="quarter" idx="4294967295"/>
+          </p:nvPr>
+        </p:nvSpPr>
+        <p:spPr>
+          <a:xfrm>
+            <a:off x="27432" y="91440"/>
+            <a:ext cx="585216" cy="475488"/>
+          </a:xfrm>
+          <a:prstGeom prst="rect">
+            <a:avLst/>
+          </a:prstGeom>
+          <a:extLst>
+            <a:ext uri="{C572A759-6A51-4108-AA02-DFA0A04FC94B}">
+              <ma14:wrappingTextBoxFlag xmlns:ma14="http://schemas.microsoft.com/office/mac/drawingml/2011/main" val="0"/>
+            </a:ext>
+          </a:extLst>
+        </p:spPr>
+        <p:txBody>
+          <a:bodyPr/>
+          <a:lstStyle>
+            <a:lvl1pPr>
+              <a:defRPr sz="2000">
+                <a:solidFill>
+                  <a:srgbClr val="FFFFFF"/>
+                </a:solidFill>
+                <a:latin typeface="Calibri"/>
+                <a:ea typeface="Calibri"/>
+                <a:cs typeface="Calibri"/>
+              </a:defRPr>
+            </a:lvl1pPr>
+          </a:lstStyle>
+          <a:p>
+            <a:pPr algn="ctr"/>
+            <a:fld id="{F7021451-1387-4CA6-816F-3879F97B5CBC}" type="slidenum">
+              <a:rPr b="1" lang="en-US"/>
+              <a:t>47</a:t>
+            </a:fld>
+            <a:endParaRPr lang="en-US"/>
+          </a:p>
+        </p:txBody>
+      </p:sp>
+    </p:spTree>
+  </p:cSld>
+  <p:clrMapOvr>
+    <a:masterClrMapping/>
+  </p:clrMapOvr>
+</p:sld>
+</file>
+
+<file path=ppt/slides/slide48.xml><?xml version="1.0" encoding="utf-8"?>
+<p:sld xmlns:a="http://schemas.openxmlformats.org/drawingml/2006/main" xmlns:r="http://schemas.openxmlformats.org/officeDocument/2006/relationships" xmlns:p="http://schemas.openxmlformats.org/presentationml/2006/main">
+  <p:cSld name="Slide 48">
+    <p:spTree>
+      <p:nvGrpSpPr>
+        <p:cNvPr id="1" name=""/>
+        <p:cNvGrpSpPr/>
+        <p:nvPr/>
+      </p:nvGrpSpPr>
+      <p:grpSpPr>
+        <a:xfrm>
+          <a:off x="0" y="0"/>
+          <a:ext cx="0" cy="0"/>
+          <a:chOff x="0" y="0"/>
+          <a:chExt cx="0" cy="0"/>
+        </a:xfrm>
+      </p:grpSpPr>
+      <p:sp>
+        <p:nvSpPr>
+          <p:cNvPr id="2" name="Text 0"/>
+          <p:cNvSpPr/>
+          <p:nvPr/>
+        </p:nvSpPr>
+        <p:spPr>
+          <a:xfrm>
+            <a:off x="457200" y="713232"/>
+            <a:ext cx="11368735" cy="274320"/>
+          </a:xfrm>
+          <a:prstGeom prst="rect">
+            <a:avLst/>
+          </a:prstGeom>
+          <a:noFill/>
+          <a:ln/>
+        </p:spPr>
+        <p:txBody>
+          <a:bodyPr wrap="square" lIns="0" tIns="0" rIns="0" bIns="0" rtlCol="0" anchor="ctr"/>
+          <a:lstStyle/>
+          <a:p>
+            <a:pPr algn="r" indent="0" marL="0">
+              <a:buNone/>
+            </a:pPr>
+            <a:r>
+              <a:rPr lang="en-US" sz="1400" b="1" dirty="0">
+                <a:solidFill>
+                  <a:srgbClr val="1C3F6E"/>
+                </a:solidFill>
+                <a:latin typeface="Calibri" pitchFamily="34" charset="0"/>
+                <a:ea typeface="Calibri" pitchFamily="34" charset="-122"/>
+                <a:cs typeface="Calibri" pitchFamily="34" charset="-120"/>
+              </a:rPr>
               <a:t>BILINGUAL GAME</a:t>
             </a:r>
             <a:endParaRPr lang="en-US" sz="1400" dirty="0"/>
@@ -15124,7 +17273,7 @@
       </p:sp>
       <p:graphicFrame>
         <p:nvGraphicFramePr>
-          <p:cNvPr id="43" name="Table 0"/>
+          <p:cNvPr id="49" name="Table 0"/>
           <p:cNvGraphicFramePr>
             <a:graphicFrameLocks noGrp="1"/>
           </p:cNvGraphicFramePr>
@@ -16436,7 +18585,7 @@
             <a:pPr algn="ctr"/>
             <a:fld id="{F7021451-1387-4CA6-816F-3879F97B5CBC}" type="slidenum">
               <a:rPr b="1" lang="en-US"/>
-              <a:t>42</a:t>
+              <a:t>48</a:t>
             </a:fld>
             <a:endParaRPr lang="en-US"/>
           </a:p>
@@ -16450,9 +18599,9 @@
 </p:sld>
 </file>
 
-<file path=ppt/slides/slide43.xml><?xml version="1.0" encoding="utf-8"?>
+<file path=ppt/slides/slide49.xml><?xml version="1.0" encoding="utf-8"?>
 <p:sld xmlns:a="http://schemas.openxmlformats.org/drawingml/2006/main" xmlns:r="http://schemas.openxmlformats.org/officeDocument/2006/relationships" xmlns:p="http://schemas.openxmlformats.org/presentationml/2006/main">
-  <p:cSld name="Slide 43">
+  <p:cSld name="Slide 49">
     <p:spTree>
       <p:nvGrpSpPr>
         <p:cNvPr id="1" name=""/>
@@ -16547,7 +18696,7 @@
       </p:sp>
       <p:graphicFrame>
         <p:nvGraphicFramePr>
-          <p:cNvPr id="44" name="Table 0"/>
+          <p:cNvPr id="50" name="Table 0"/>
           <p:cNvGraphicFramePr>
             <a:graphicFrameLocks noGrp="1"/>
           </p:cNvGraphicFramePr>
@@ -17169,7 +19318,7 @@
             <a:pPr algn="ctr"/>
             <a:fld id="{F7021451-1387-4CA6-816F-3879F97B5CBC}" type="slidenum">
               <a:rPr b="1" lang="en-US"/>
-              <a:t>43</a:t>
+              <a:t>49</a:t>
             </a:fld>
             <a:endParaRPr lang="en-US"/>
           </a:p>
@@ -17183,9 +19332,9 @@
 </p:sld>
 </file>
 
-<file path=ppt/slides/slide44.xml><?xml version="1.0" encoding="utf-8"?>
+<file path=ppt/slides/slide5.xml><?xml version="1.0" encoding="utf-8"?>
 <p:sld xmlns:a="http://schemas.openxmlformats.org/drawingml/2006/main" xmlns:r="http://schemas.openxmlformats.org/officeDocument/2006/relationships" xmlns:p="http://schemas.openxmlformats.org/presentationml/2006/main">
-  <p:cSld name="Slide 44">
+  <p:cSld name="Slide 5">
     <p:spTree>
       <p:nvGrpSpPr>
         <p:cNvPr id="1" name=""/>
@@ -17233,6 +19382,225 @@
                 <a:ea typeface="Calibri" pitchFamily="34" charset="-122"/>
                 <a:cs typeface="Calibri" pitchFamily="34" charset="-120"/>
               </a:rPr>
+              <a:t>HOMEWORK CORRECTION</a:t>
+            </a:r>
+            <a:endParaRPr lang="en-US" sz="1400" dirty="0"/>
+          </a:p>
+        </p:txBody>
+      </p:sp>
+      <p:pic>
+        <p:nvPicPr>
+          <p:cNvPr id="3" name="Image 0" descr="/home/claude/f4/img/minesec_sheet.png">    </p:cNvPr>
+          <p:cNvPicPr>
+            <a:picLocks noChangeAspect="1"/>
+          </p:cNvPicPr>
+          <p:nvPr/>
+        </p:nvPicPr>
+        <p:blipFill>
+          <a:blip r:embed="rId1"/>
+          <a:stretch>
+            <a:fillRect/>
+          </a:stretch>
+        </p:blipFill>
+        <p:spPr>
+          <a:xfrm>
+            <a:off x="0" y="658368"/>
+            <a:ext cx="5120640" cy="5833872"/>
+          </a:xfrm>
+          <a:prstGeom prst="rect">
+            <a:avLst/>
+          </a:prstGeom>
+        </p:spPr>
+      </p:pic>
+      <p:sp>
+        <p:nvSpPr>
+          <p:cNvPr id="4" name="Text 1"/>
+          <p:cNvSpPr/>
+          <p:nvPr/>
+        </p:nvSpPr>
+        <p:spPr>
+          <a:xfrm>
+            <a:off x="5349240" y="1005840"/>
+            <a:ext cx="6522415" cy="731520"/>
+          </a:xfrm>
+          <a:prstGeom prst="rect">
+            <a:avLst/>
+          </a:prstGeom>
+          <a:noFill/>
+          <a:ln/>
+        </p:spPr>
+        <p:txBody>
+          <a:bodyPr wrap="square" lIns="0" tIns="0" rIns="0" bIns="0" rtlCol="0" anchor="ctr">
+            <a:normAutofit/>
+          </a:bodyPr>
+          <a:lstStyle/>
+          <a:p>
+            <a:pPr algn="ctr" indent="0" marL="0">
+              <a:buNone/>
+            </a:pPr>
+            <a:r>
+              <a:rPr lang="en-US" sz="3600" b="1" dirty="0">
+                <a:solidFill>
+                  <a:srgbClr val="990011"/>
+                </a:solidFill>
+                <a:latin typeface="Times New Roman" pitchFamily="34" charset="0"/>
+                <a:ea typeface="Times New Roman" pitchFamily="34" charset="-122"/>
+                <a:cs typeface="Times New Roman" pitchFamily="34" charset="-120"/>
+              </a:rPr>
+              <a:t>Correction: Possible Answer</a:t>
+            </a:r>
+            <a:endParaRPr lang="en-US" sz="3600" dirty="0"/>
+          </a:p>
+        </p:txBody>
+      </p:sp>
+      <p:sp>
+        <p:nvSpPr>
+          <p:cNvPr id="5" name="Text 2"/>
+          <p:cNvSpPr/>
+          <p:nvPr/>
+        </p:nvSpPr>
+        <p:spPr>
+          <a:xfrm>
+            <a:off x="5349240" y="1783080"/>
+            <a:ext cx="6522415" cy="4663440"/>
+          </a:xfrm>
+          <a:prstGeom prst="rect">
+            <a:avLst/>
+          </a:prstGeom>
+          <a:noFill/>
+          <a:ln/>
+        </p:spPr>
+        <p:txBody>
+          <a:bodyPr wrap="square" lIns="0" tIns="0" rIns="0" bIns="0" rtlCol="0" anchor="t"/>
+          <a:lstStyle/>
+          <a:p>
+            <a:pPr algn="l" indent="0" marL="0">
+              <a:spcAft>
+                <a:spcPts val="800"/>
+              </a:spcAft>
+              <a:buNone/>
+            </a:pPr>
+            <a:r>
+              <a:rPr lang="en-US" sz="4000" dirty="0">
+                <a:solidFill>
+                  <a:srgbClr val="111111"/>
+                </a:solidFill>
+                <a:latin typeface="Times New Roman" pitchFamily="34" charset="0"/>
+                <a:ea typeface="Times New Roman" pitchFamily="34" charset="-122"/>
+                <a:cs typeface="Times New Roman" pitchFamily="34" charset="-120"/>
+              </a:rPr>
+              <a:t>The bottle in the sun is hotter, because it receives the direct rays of the Sun, while the one in the shade is protected from them.</a:t>
+            </a:r>
+            <a:endParaRPr lang="en-US" sz="4000" dirty="0"/>
+          </a:p>
+        </p:txBody>
+      </p:sp>
+      <p:sp>
+        <p:nvSpPr>
+          <p:cNvPr id="25" name="Slide Number Placeholder 0"/>
+          <p:cNvSpPr>
+            <a:spLocks noGrp="1"/>
+          </p:cNvSpPr>
+          <p:nvPr>
+            <p:ph type="sldNum" sz="quarter" idx="4294967295"/>
+          </p:nvPr>
+        </p:nvSpPr>
+        <p:spPr>
+          <a:xfrm>
+            <a:off x="27432" y="91440"/>
+            <a:ext cx="585216" cy="475488"/>
+          </a:xfrm>
+          <a:prstGeom prst="rect">
+            <a:avLst/>
+          </a:prstGeom>
+          <a:extLst>
+            <a:ext uri="{C572A759-6A51-4108-AA02-DFA0A04FC94B}">
+              <ma14:wrappingTextBoxFlag xmlns:ma14="http://schemas.microsoft.com/office/mac/drawingml/2011/main" val="0"/>
+            </a:ext>
+          </a:extLst>
+        </p:spPr>
+        <p:txBody>
+          <a:bodyPr/>
+          <a:lstStyle>
+            <a:lvl1pPr>
+              <a:defRPr sz="2000">
+                <a:solidFill>
+                  <a:srgbClr val="FFFFFF"/>
+                </a:solidFill>
+                <a:latin typeface="Calibri"/>
+                <a:ea typeface="Calibri"/>
+                <a:cs typeface="Calibri"/>
+              </a:defRPr>
+            </a:lvl1pPr>
+          </a:lstStyle>
+          <a:p>
+            <a:pPr algn="ctr"/>
+            <a:fld id="{F7021451-1387-4CA6-816F-3879F97B5CBC}" type="slidenum">
+              <a:rPr b="1" lang="en-US"/>
+              <a:t>5</a:t>
+            </a:fld>
+            <a:endParaRPr lang="en-US"/>
+          </a:p>
+        </p:txBody>
+      </p:sp>
+    </p:spTree>
+  </p:cSld>
+  <p:clrMapOvr>
+    <a:masterClrMapping/>
+  </p:clrMapOvr>
+</p:sld>
+</file>
+
+<file path=ppt/slides/slide50.xml><?xml version="1.0" encoding="utf-8"?>
+<p:sld xmlns:a="http://schemas.openxmlformats.org/drawingml/2006/main" xmlns:r="http://schemas.openxmlformats.org/officeDocument/2006/relationships" xmlns:p="http://schemas.openxmlformats.org/presentationml/2006/main">
+  <p:cSld name="Slide 50">
+    <p:spTree>
+      <p:nvGrpSpPr>
+        <p:cNvPr id="1" name=""/>
+        <p:cNvGrpSpPr/>
+        <p:nvPr/>
+      </p:nvGrpSpPr>
+      <p:grpSpPr>
+        <a:xfrm>
+          <a:off x="0" y="0"/>
+          <a:ext cx="0" cy="0"/>
+          <a:chOff x="0" y="0"/>
+          <a:chExt cx="0" cy="0"/>
+        </a:xfrm>
+      </p:grpSpPr>
+      <p:sp>
+        <p:nvSpPr>
+          <p:cNvPr id="2" name="Text 0"/>
+          <p:cNvSpPr/>
+          <p:nvPr/>
+        </p:nvSpPr>
+        <p:spPr>
+          <a:xfrm>
+            <a:off x="457200" y="713232"/>
+            <a:ext cx="11368735" cy="274320"/>
+          </a:xfrm>
+          <a:prstGeom prst="rect">
+            <a:avLst/>
+          </a:prstGeom>
+          <a:noFill/>
+          <a:ln/>
+        </p:spPr>
+        <p:txBody>
+          <a:bodyPr wrap="square" lIns="0" tIns="0" rIns="0" bIns="0" rtlCol="0" anchor="ctr"/>
+          <a:lstStyle/>
+          <a:p>
+            <a:pPr algn="r" indent="0" marL="0">
+              <a:buNone/>
+            </a:pPr>
+            <a:r>
+              <a:rPr lang="en-US" sz="1400" b="1" dirty="0">
+                <a:solidFill>
+                  <a:srgbClr val="1C3F6E"/>
+                </a:solidFill>
+                <a:latin typeface="Calibri" pitchFamily="34" charset="0"/>
+                <a:ea typeface="Calibri" pitchFamily="34" charset="-122"/>
+                <a:cs typeface="Calibri" pitchFamily="34" charset="-120"/>
+              </a:rPr>
               <a:t>LOGBOOK</a:t>
             </a:r>
             <a:endParaRPr lang="en-US" sz="1400" dirty="0"/>
@@ -17280,7 +19648,7 @@
       </p:sp>
       <p:graphicFrame>
         <p:nvGraphicFramePr>
-          <p:cNvPr id="45" name="Table 0"/>
+          <p:cNvPr id="51" name="Table 0"/>
           <p:cNvGraphicFramePr>
             <a:graphicFrameLocks noGrp="1"/>
           </p:cNvGraphicFramePr>
@@ -17390,7 +19758,7 @@
                           <a:ea typeface="Calibri" pitchFamily="34" charset="-122"/>
                           <a:cs typeface="Calibri" pitchFamily="34" charset="-120"/>
                         </a:rPr>
-                        <a:t>Meaning and Measurement of Temperature; Presentation of Temperature; Siting of the Stevenson Screen.</a:t>
+                        <a:t>DEFINITIONS; Measurement of Temperature; Presentation of Temperature; Siting of the Stevenson Screen.</a:t>
                       </a:r>
                       <a:endParaRPr lang="en-US" sz="1600" dirty="0">
                         <a:latin typeface="Calibri" charset="0"/>
@@ -18040,7 +20408,7 @@
             <a:pPr algn="ctr"/>
             <a:fld id="{F7021451-1387-4CA6-816F-3879F97B5CBC}" type="slidenum">
               <a:rPr b="1" lang="en-US"/>
-              <a:t>44</a:t>
+              <a:t>50</a:t>
             </a:fld>
             <a:endParaRPr lang="en-US"/>
           </a:p>
@@ -18054,9 +20422,9 @@
 </p:sld>
 </file>
 
-<file path=ppt/slides/slide45.xml><?xml version="1.0" encoding="utf-8"?>
+<file path=ppt/slides/slide51.xml><?xml version="1.0" encoding="utf-8"?>
 <p:sld xmlns:a="http://schemas.openxmlformats.org/drawingml/2006/main" xmlns:r="http://schemas.openxmlformats.org/officeDocument/2006/relationships" xmlns:p="http://schemas.openxmlformats.org/presentationml/2006/main">
-  <p:cSld name="Slide 45">
+  <p:cSld name="Slide 51">
     <p:spTree>
       <p:nvGrpSpPr>
         <p:cNvPr id="1" name=""/>
@@ -18254,7 +20622,7 @@
                 <a:ea typeface="Calibri" pitchFamily="34" charset="-122"/>
                 <a:cs typeface="Calibri" pitchFamily="34" charset="-120"/>
               </a:rPr>
-              <a:t>Without the projector (Activity 2): write the example on the board.</a:t>
+              <a:t>Without the projector (Activity 2): write the numbers on the board.</a:t>
             </a:r>
             <a:endParaRPr lang="en-US" sz="2000" dirty="0"/>
           </a:p>
@@ -18275,7 +20643,7 @@
                 <a:ea typeface="Calibri" pitchFamily="34" charset="-122"/>
                 <a:cs typeface="Calibri" pitchFamily="34" charset="-120"/>
               </a:rPr>
-              <a:t>Without the projector (Activity 3): describe a white wooden box on legs.</a:t>
+              <a:t>Without the projector (Activity 3): compare a white shirt and a black shirt in the sun.</a:t>
             </a:r>
             <a:endParaRPr lang="en-US" sz="2000" dirty="0"/>
           </a:p>
@@ -18323,7 +20691,7 @@
             <a:pPr algn="ctr"/>
             <a:fld id="{F7021451-1387-4CA6-816F-3879F97B5CBC}" type="slidenum">
               <a:rPr b="1" lang="en-US"/>
-              <a:t>45</a:t>
+              <a:t>51</a:t>
             </a:fld>
             <a:endParaRPr lang="en-US"/>
           </a:p>
@@ -18337,9 +20705,9 @@
 </p:sld>
 </file>
 
-<file path=ppt/slides/slide46.xml><?xml version="1.0" encoding="utf-8"?>
+<file path=ppt/slides/slide52.xml><?xml version="1.0" encoding="utf-8"?>
 <p:sld xmlns:a="http://schemas.openxmlformats.org/drawingml/2006/main" xmlns:r="http://schemas.openxmlformats.org/officeDocument/2006/relationships" xmlns:p="http://schemas.openxmlformats.org/presentationml/2006/main">
-  <p:cSld name="Slide 46">
+  <p:cSld name="Slide 52">
     <p:spTree>
       <p:nvGrpSpPr>
         <p:cNvPr id="1" name=""/>
@@ -18648,226 +21016,7 @@
             <a:pPr algn="ctr"/>
             <a:fld id="{F7021451-1387-4CA6-816F-3879F97B5CBC}" type="slidenum">
               <a:rPr b="1" lang="en-US"/>
-              <a:t>46</a:t>
-            </a:fld>
-            <a:endParaRPr lang="en-US"/>
-          </a:p>
-        </p:txBody>
-      </p:sp>
-    </p:spTree>
-  </p:cSld>
-  <p:clrMapOvr>
-    <a:masterClrMapping/>
-  </p:clrMapOvr>
-</p:sld>
-</file>
-
-<file path=ppt/slides/slide5.xml><?xml version="1.0" encoding="utf-8"?>
-<p:sld xmlns:a="http://schemas.openxmlformats.org/drawingml/2006/main" xmlns:r="http://schemas.openxmlformats.org/officeDocument/2006/relationships" xmlns:p="http://schemas.openxmlformats.org/presentationml/2006/main">
-  <p:cSld name="Slide 5">
-    <p:spTree>
-      <p:nvGrpSpPr>
-        <p:cNvPr id="1" name=""/>
-        <p:cNvGrpSpPr/>
-        <p:nvPr/>
-      </p:nvGrpSpPr>
-      <p:grpSpPr>
-        <a:xfrm>
-          <a:off x="0" y="0"/>
-          <a:ext cx="0" cy="0"/>
-          <a:chOff x="0" y="0"/>
-          <a:chExt cx="0" cy="0"/>
-        </a:xfrm>
-      </p:grpSpPr>
-      <p:sp>
-        <p:nvSpPr>
-          <p:cNvPr id="2" name="Text 0"/>
-          <p:cNvSpPr/>
-          <p:nvPr/>
-        </p:nvSpPr>
-        <p:spPr>
-          <a:xfrm>
-            <a:off x="457200" y="713232"/>
-            <a:ext cx="11368735" cy="274320"/>
-          </a:xfrm>
-          <a:prstGeom prst="rect">
-            <a:avLst/>
-          </a:prstGeom>
-          <a:noFill/>
-          <a:ln/>
-        </p:spPr>
-        <p:txBody>
-          <a:bodyPr wrap="square" lIns="0" tIns="0" rIns="0" bIns="0" rtlCol="0" anchor="ctr"/>
-          <a:lstStyle/>
-          <a:p>
-            <a:pPr algn="r" indent="0" marL="0">
-              <a:buNone/>
-            </a:pPr>
-            <a:r>
-              <a:rPr lang="en-US" sz="1400" b="1" dirty="0">
-                <a:solidFill>
-                  <a:srgbClr val="1C3F6E"/>
-                </a:solidFill>
-                <a:latin typeface="Calibri" pitchFamily="34" charset="0"/>
-                <a:ea typeface="Calibri" pitchFamily="34" charset="-122"/>
-                <a:cs typeface="Calibri" pitchFamily="34" charset="-120"/>
-              </a:rPr>
-              <a:t>HOMEWORK CORRECTION</a:t>
-            </a:r>
-            <a:endParaRPr lang="en-US" sz="1400" dirty="0"/>
-          </a:p>
-        </p:txBody>
-      </p:sp>
-      <p:pic>
-        <p:nvPicPr>
-          <p:cNvPr id="3" name="Image 0" descr="/home/claude/f4/img/minesec_sheet.png">    </p:cNvPr>
-          <p:cNvPicPr>
-            <a:picLocks noChangeAspect="1"/>
-          </p:cNvPicPr>
-          <p:nvPr/>
-        </p:nvPicPr>
-        <p:blipFill>
-          <a:blip r:embed="rId1"/>
-          <a:stretch>
-            <a:fillRect/>
-          </a:stretch>
-        </p:blipFill>
-        <p:spPr>
-          <a:xfrm>
-            <a:off x="0" y="658368"/>
-            <a:ext cx="5120640" cy="5833872"/>
-          </a:xfrm>
-          <a:prstGeom prst="rect">
-            <a:avLst/>
-          </a:prstGeom>
-        </p:spPr>
-      </p:pic>
-      <p:sp>
-        <p:nvSpPr>
-          <p:cNvPr id="4" name="Text 1"/>
-          <p:cNvSpPr/>
-          <p:nvPr/>
-        </p:nvSpPr>
-        <p:spPr>
-          <a:xfrm>
-            <a:off x="5349240" y="1005840"/>
-            <a:ext cx="6522415" cy="731520"/>
-          </a:xfrm>
-          <a:prstGeom prst="rect">
-            <a:avLst/>
-          </a:prstGeom>
-          <a:noFill/>
-          <a:ln/>
-        </p:spPr>
-        <p:txBody>
-          <a:bodyPr wrap="square" lIns="0" tIns="0" rIns="0" bIns="0" rtlCol="0" anchor="ctr">
-            <a:normAutofit/>
-          </a:bodyPr>
-          <a:lstStyle/>
-          <a:p>
-            <a:pPr algn="ctr" indent="0" marL="0">
-              <a:buNone/>
-            </a:pPr>
-            <a:r>
-              <a:rPr lang="en-US" sz="3600" b="1" dirty="0">
-                <a:solidFill>
-                  <a:srgbClr val="990011"/>
-                </a:solidFill>
-                <a:latin typeface="Times New Roman" pitchFamily="34" charset="0"/>
-                <a:ea typeface="Times New Roman" pitchFamily="34" charset="-122"/>
-                <a:cs typeface="Times New Roman" pitchFamily="34" charset="-120"/>
-              </a:rPr>
-              <a:t>Correction: Possible Answer</a:t>
-            </a:r>
-            <a:endParaRPr lang="en-US" sz="3600" dirty="0"/>
-          </a:p>
-        </p:txBody>
-      </p:sp>
-      <p:sp>
-        <p:nvSpPr>
-          <p:cNvPr id="5" name="Text 2"/>
-          <p:cNvSpPr/>
-          <p:nvPr/>
-        </p:nvSpPr>
-        <p:spPr>
-          <a:xfrm>
-            <a:off x="5349240" y="1783080"/>
-            <a:ext cx="6522415" cy="4663440"/>
-          </a:xfrm>
-          <a:prstGeom prst="rect">
-            <a:avLst/>
-          </a:prstGeom>
-          <a:noFill/>
-          <a:ln/>
-        </p:spPr>
-        <p:txBody>
-          <a:bodyPr wrap="square" lIns="0" tIns="0" rIns="0" bIns="0" rtlCol="0" anchor="t"/>
-          <a:lstStyle/>
-          <a:p>
-            <a:pPr algn="l" indent="0" marL="0">
-              <a:spcAft>
-                <a:spcPts val="800"/>
-              </a:spcAft>
-              <a:buNone/>
-            </a:pPr>
-            <a:r>
-              <a:rPr lang="en-US" sz="4000" dirty="0">
-                <a:solidFill>
-                  <a:srgbClr val="111111"/>
-                </a:solidFill>
-                <a:latin typeface="Times New Roman" pitchFamily="34" charset="0"/>
-                <a:ea typeface="Times New Roman" pitchFamily="34" charset="-122"/>
-                <a:cs typeface="Times New Roman" pitchFamily="34" charset="-120"/>
-              </a:rPr>
-              <a:t>The bottle in the sun is hotter, because it receives the direct rays of the Sun, while the one in the shade is protected from them.</a:t>
-            </a:r>
-            <a:endParaRPr lang="en-US" sz="4000" dirty="0"/>
-          </a:p>
-        </p:txBody>
-      </p:sp>
-      <p:sp>
-        <p:nvSpPr>
-          <p:cNvPr id="25" name="Slide Number Placeholder 0"/>
-          <p:cNvSpPr>
-            <a:spLocks noGrp="1"/>
-          </p:cNvSpPr>
-          <p:nvPr>
-            <p:ph type="sldNum" sz="quarter" idx="4294967295"/>
-          </p:nvPr>
-        </p:nvSpPr>
-        <p:spPr>
-          <a:xfrm>
-            <a:off x="27432" y="91440"/>
-            <a:ext cx="585216" cy="475488"/>
-          </a:xfrm>
-          <a:prstGeom prst="rect">
-            <a:avLst/>
-          </a:prstGeom>
-          <a:extLst>
-            <a:ext uri="{C572A759-6A51-4108-AA02-DFA0A04FC94B}">
-              <ma14:wrappingTextBoxFlag xmlns:ma14="http://schemas.microsoft.com/office/mac/drawingml/2011/main" val="0"/>
-            </a:ext>
-          </a:extLst>
-        </p:spPr>
-        <p:txBody>
-          <a:bodyPr/>
-          <a:lstStyle>
-            <a:lvl1pPr>
-              <a:defRPr sz="2000">
-                <a:solidFill>
-                  <a:srgbClr val="FFFFFF"/>
-                </a:solidFill>
-                <a:latin typeface="Calibri"/>
-                <a:ea typeface="Calibri"/>
-                <a:cs typeface="Calibri"/>
-              </a:defRPr>
-            </a:lvl1pPr>
-          </a:lstStyle>
-          <a:p>
-            <a:pPr algn="ctr"/>
-            <a:fld id="{F7021451-1387-4CA6-816F-3879F97B5CBC}" type="slidenum">
-              <a:rPr b="1" lang="en-US"/>
-              <a:t>5</a:t>
+              <a:t>52</a:t>
             </a:fld>
             <a:endParaRPr lang="en-US"/>
           </a:p>

--- a/lecons/F3/36_FORM4_LESSON32_Atmospheric_Temperatures.pptx
+++ b/lecons/F3/36_FORM4_LESSON32_Atmospheric_Temperatures.pptx
@@ -2841,7 +2841,7 @@
           <a:p>
             <a:r>
               <a:rPr lang="en-US" dirty="0"/>
-              <a:t>Let us copy Measurement of Temperature. Temperature is measured with the following instruments. On this slide we have Ordinary thermometer. Write each point on a new line, with the key term first, and explain it in your own words when we revise.</a:t>
+              <a:t>Let us copy Measurement of Temperature. Temperature is measured as follows. On this slide we have Ordinary thermometer. Write each point on a new line, with the key term first, and explain it in your own words when we revise.</a:t>
             </a:r>
             <a:endParaRPr lang="en-US" dirty="0"/>
           </a:p>
@@ -13262,7 +13262,7 @@
                 <a:ea typeface="Times New Roman" pitchFamily="34" charset="-122"/>
                 <a:cs typeface="Times New Roman" pitchFamily="34" charset="-120"/>
               </a:rPr>
-              <a:t>Temperature is measured with the following instruments:</a:t>
+              <a:t>Temperature is measured as follows:</a:t>
             </a:r>
             <a:endParaRPr lang="en-US" sz="4000" dirty="0"/>
           </a:p>

--- a/lecons/F3/36_FORM4_LESSON32_Atmospheric_Temperatures.pptx
+++ b/lecons/F3/36_FORM4_LESSON32_Atmospheric_Temperatures.pptx
@@ -3457,7 +3457,7 @@
           <a:p>
             <a:r>
               <a:rPr lang="en-US" dirty="0"/>
-              <a:t>Before we start the new lesson, let us correct the homework I gave you at the end of Lesson 31: Weather and Climate. The question was: Put one bottle of water in the sun and another in the shade for one hour. Touch both and write down which is hotter and why. Take out your exercise books.</a:t>
+              <a:t>Before we start the new lesson, let us correct the homework I gave you at the end of Lesson 31: Weather and Climate. The question was: Name the instrument that records the maximum and minimum temperatures. Take out your exercise books.</a:t>
             </a:r>
             <a:endParaRPr lang="en-US" dirty="0"/>
           </a:p>
@@ -4073,7 +4073,7 @@
           <a:p>
             <a:r>
               <a:rPr lang="en-US" dirty="0"/>
-              <a:t>For your homework: Wet a piece of cloth and hang it outside in the morning and in the afternoon. Note how long it takes to dry each time. We shall correct it at the beginning of our next lesson.</a:t>
+              <a:t>For your homework: Name the instrument that measures air pressure. We shall correct it at the beginning of our next lesson.</a:t>
             </a:r>
             <a:endParaRPr lang="en-US" dirty="0"/>
           </a:p>
@@ -4425,7 +4425,7 @@
           <a:p>
             <a:r>
               <a:rPr lang="en-US" dirty="0"/>
-              <a:t>Here is a good answer. The bottle in the sun is hotter, because it receives the direct rays of the Sun, while the one in the shade is protected from them. Compare it with your own answer and correct your work in red.</a:t>
+              <a:t>Here is a good answer. Six's thermometer. Compare it with your own answer and correct your work in red.</a:t>
             </a:r>
             <a:endParaRPr lang="en-US" dirty="0"/>
           </a:p>
@@ -15222,7 +15222,7 @@
                 <a:ea typeface="Times New Roman" pitchFamily="34" charset="-122"/>
                 <a:cs typeface="Times New Roman" pitchFamily="34" charset="-120"/>
               </a:rPr>
-              <a:t>Put one bottle of water in the sun and another in the shade for one hour. Touch both and write down which is hotter and why.</a:t>
+              <a:t>Name the instrument that records the maximum and minimum temperatures.</a:t>
             </a:r>
             <a:endParaRPr lang="en-US" sz="4000" dirty="0"/>
           </a:p>
@@ -16875,7 +16875,7 @@
                 <a:ea typeface="Times New Roman" pitchFamily="34" charset="-122"/>
                 <a:cs typeface="Times New Roman" pitchFamily="34" charset="-120"/>
               </a:rPr>
-              <a:t>Wet a piece of cloth and hang it outside in the morning and in the afternoon. Note how long it takes to dry each time.</a:t>
+              <a:t>Name the instrument that measures air pressure.</a:t>
             </a:r>
             <a:endParaRPr lang="en-US" sz="4000" dirty="0"/>
           </a:p>
@@ -19489,7 +19489,7 @@
                 <a:ea typeface="Times New Roman" pitchFamily="34" charset="-122"/>
                 <a:cs typeface="Times New Roman" pitchFamily="34" charset="-120"/>
               </a:rPr>
-              <a:t>The bottle in the sun is hotter, because it receives the direct rays of the Sun, while the one in the shade is protected from them.</a:t>
+              <a:t>Six's thermometer.</a:t>
             </a:r>
             <a:endParaRPr lang="en-US" sz="4000" dirty="0"/>
           </a:p>
@@ -20034,7 +20034,7 @@
                           <a:ea typeface="Calibri" pitchFamily="34" charset="-122"/>
                           <a:cs typeface="Calibri" pitchFamily="34" charset="-120"/>
                         </a:rPr>
-                        <a:t>Wet a piece of cloth and hang it outside in the morning and in the afternoon. Note how long it takes to dry each time.</a:t>
+                        <a:t>Name the instrument that measures air pressure.</a:t>
                       </a:r>
                       <a:endParaRPr lang="en-US" sz="1600" dirty="0">
                         <a:latin typeface="Calibri" charset="0"/>
